--- a/WebCam_AI視覺與YOLO應用_教學投影片.pptx
+++ b/WebCam_AI視覺與YOLO應用_教學投影片.pptx
@@ -3119,9 +3119,7 @@
             <a:srgbClr val="14233C"/>
           </a:solidFill>
           <a:ln>
-            <a:solidFill>
-              <a:srgbClr val="14233C"/>
-            </a:solidFill>
+            <a:noFill/>
           </a:ln>
         </p:spPr>
         <p:style>
@@ -3148,14 +3146,57 @@
       </p:sp>
       <p:sp>
         <p:nvSpPr>
-          <p:cNvPr id="3" name="TextBox 2"/>
+          <p:cNvPr id="3" name="Oval 2"/>
+          <p:cNvSpPr/>
+          <p:nvPr/>
+        </p:nvSpPr>
+        <p:spPr>
+          <a:xfrm>
+            <a:off x="8778240" y="-1097280"/>
+            <a:ext cx="4572000" cy="4572000"/>
+          </a:xfrm>
+          <a:prstGeom prst="ellipse">
+            <a:avLst/>
+          </a:prstGeom>
+          <a:solidFill>
+            <a:srgbClr val="1C3458"/>
+          </a:solidFill>
+          <a:ln>
+            <a:noFill/>
+          </a:ln>
+        </p:spPr>
+        <p:style>
+          <a:lnRef idx="1">
+            <a:schemeClr val="accent1"/>
+          </a:lnRef>
+          <a:fillRef idx="3">
+            <a:schemeClr val="accent1"/>
+          </a:fillRef>
+          <a:effectRef idx="2">
+            <a:schemeClr val="accent1"/>
+          </a:effectRef>
+          <a:fontRef idx="minor">
+            <a:schemeClr val="lt1"/>
+          </a:fontRef>
+        </p:style>
+        <p:txBody>
+          <a:bodyPr rtlCol="0" anchor="ctr"/>
+          <a:lstStyle/>
+          <a:p>
+            <a:pPr algn="ctr"/>
+          </a:p>
+        </p:txBody>
+      </p:sp>
+      <p:sp>
+        <p:nvSpPr>
+          <p:cNvPr id="4" name="TextBox 3"/>
           <p:cNvSpPr txBox="1"/>
           <p:nvPr/>
         </p:nvSpPr>
         <p:spPr>
           <a:xfrm>
-            <a:off x="1097280" y="1645920"/>
-            <a:ext cx="10058400" cy="3474720"/>
+            <a:off x="1097280" y="1554480"/>
+            <a:ext cx="10058400" cy="3840480"/>
           </a:xfrm>
           <a:prstGeom prst="rect">
             <a:avLst/>
@@ -3170,9 +3211,25 @@
           <a:p>
             <a:pPr>
               <a:spcAft>
+                <a:spcPts val="1200"/>
+              </a:spcAft>
+              <a:defRPr sz="1700" b="1">
+                <a:solidFill>
+                  <a:srgbClr val="EB6E28"/>
+                </a:solidFill>
+                <a:latin typeface="微軟正黑體"/>
+              </a:defRPr>
+            </a:pPr>
+            <a:r>
+              <a:t>📷 AI 視覺與電腦視覺專題實作系列</a:t>
+            </a:r>
+          </a:p>
+          <a:p>
+            <a:pPr>
+              <a:spcAft>
                 <a:spcPts val="1400"/>
               </a:spcAft>
-              <a:defRPr sz="3800" b="1">
+              <a:defRPr sz="4000" b="1">
                 <a:solidFill>
                   <a:srgbClr val="FFFFFF"/>
                 </a:solidFill>
@@ -3196,12 +3253,12 @@
               </a:defRPr>
             </a:pPr>
             <a:r>
-              <a:t>AI 輔助程式開發 ‧ Prompt 提示詞工程 ‧ 多分割監控 ‧ 跌倒與手勢控制</a:t>
-            </a:r>
-          </a:p>
-          <a:p>
-            <a:pPr>
-              <a:defRPr sz="1400">
+              <a:t>AI 輔助程式開發 ‧ Prompt 提示詞工程 ‧ 四宮格多分割監控 ‧ 跌倒與手勢控制</a:t>
+            </a:r>
+          </a:p>
+          <a:p>
+            <a:pPr>
+              <a:defRPr sz="1450">
                 <a:solidFill>
                   <a:srgbClr val="C8D7EB"/>
                 </a:solidFill>
@@ -3209,11 +3266,11 @@
               </a:defRPr>
             </a:pPr>
             <a:r>
-              <a:t>課程解析整理與教師教學講義 / 投影片模組</a:t>
+              <a:t>主講：簡樹桐 老師 ｜ 適用：高中職專題製作 ‧ 教師研習 ‧ AI 應用實作</a:t>
             </a:r>
             <a:br/>
             <a:r>
-              <a:t>主講課程精華：簡樹桐 老師 ｜ 適用：高中職專題製作 ‧ 教師研習 ‧ AI 應用實作</a:t>
+              <a:t>🌐 線上互動教材：https://stjedu.github.io/www/yolo_webcam_course.html</a:t>
             </a:r>
           </a:p>
         </p:txBody>
@@ -3223,6 +3280,9 @@
   <p:clrMapOvr>
     <a:masterClrMapping/>
   </p:clrMapOvr>
+  <p:transition spd="med">
+    <p:fade/>
+  </p:transition>
 </p:sld>
 </file>
 
@@ -3245,18 +3305,16 @@
         <p:spPr>
           <a:xfrm>
             <a:off x="0" y="0"/>
-            <a:ext cx="12191695" cy="1005840"/>
+            <a:ext cx="12191695" cy="6858000"/>
           </a:xfrm>
           <a:prstGeom prst="rect">
             <a:avLst/>
           </a:prstGeom>
           <a:solidFill>
-            <a:srgbClr val="14233C"/>
+            <a:srgbClr val="F8FAFC"/>
           </a:solidFill>
           <a:ln>
-            <a:solidFill>
-              <a:srgbClr val="14233C"/>
-            </a:solidFill>
+            <a:noFill/>
           </a:ln>
         </p:spPr>
         <p:style>
@@ -3283,14 +3341,100 @@
       </p:sp>
       <p:sp>
         <p:nvSpPr>
-          <p:cNvPr id="3" name="TextBox 2"/>
+          <p:cNvPr id="3" name="Rectangle 2"/>
+          <p:cNvSpPr/>
+          <p:nvPr/>
+        </p:nvSpPr>
+        <p:spPr>
+          <a:xfrm>
+            <a:off x="0" y="0"/>
+            <a:ext cx="12191695" cy="1051560"/>
+          </a:xfrm>
+          <a:prstGeom prst="rect">
+            <a:avLst/>
+          </a:prstGeom>
+          <a:solidFill>
+            <a:srgbClr val="14233C"/>
+          </a:solidFill>
+          <a:ln>
+            <a:noFill/>
+          </a:ln>
+        </p:spPr>
+        <p:style>
+          <a:lnRef idx="1">
+            <a:schemeClr val="accent1"/>
+          </a:lnRef>
+          <a:fillRef idx="3">
+            <a:schemeClr val="accent1"/>
+          </a:fillRef>
+          <a:effectRef idx="2">
+            <a:schemeClr val="accent1"/>
+          </a:effectRef>
+          <a:fontRef idx="minor">
+            <a:schemeClr val="lt1"/>
+          </a:fontRef>
+        </p:style>
+        <p:txBody>
+          <a:bodyPr rtlCol="0" anchor="ctr"/>
+          <a:lstStyle/>
+          <a:p>
+            <a:pPr algn="ctr"/>
+          </a:p>
+        </p:txBody>
+      </p:sp>
+      <p:sp>
+        <p:nvSpPr>
+          <p:cNvPr id="4" name="Rectangle 3"/>
+          <p:cNvSpPr/>
+          <p:nvPr/>
+        </p:nvSpPr>
+        <p:spPr>
+          <a:xfrm>
+            <a:off x="0" y="1051560"/>
+            <a:ext cx="4114800" cy="45720"/>
+          </a:xfrm>
+          <a:prstGeom prst="rect">
+            <a:avLst/>
+          </a:prstGeom>
+          <a:solidFill>
+            <a:srgbClr val="008CA0"/>
+          </a:solidFill>
+          <a:ln>
+            <a:noFill/>
+          </a:ln>
+        </p:spPr>
+        <p:style>
+          <a:lnRef idx="1">
+            <a:schemeClr val="accent1"/>
+          </a:lnRef>
+          <a:fillRef idx="3">
+            <a:schemeClr val="accent1"/>
+          </a:fillRef>
+          <a:effectRef idx="2">
+            <a:schemeClr val="accent1"/>
+          </a:effectRef>
+          <a:fontRef idx="minor">
+            <a:schemeClr val="lt1"/>
+          </a:fontRef>
+        </p:style>
+        <p:txBody>
+          <a:bodyPr rtlCol="0" anchor="ctr"/>
+          <a:lstStyle/>
+          <a:p>
+            <a:pPr algn="ctr"/>
+          </a:p>
+        </p:txBody>
+      </p:sp>
+      <p:sp>
+        <p:nvSpPr>
+          <p:cNvPr id="5" name="TextBox 4"/>
           <p:cNvSpPr txBox="1"/>
           <p:nvPr/>
         </p:nvSpPr>
         <p:spPr>
           <a:xfrm>
             <a:off x="731520" y="109728"/>
-            <a:ext cx="10698480" cy="274320"/>
+            <a:ext cx="7772400" cy="274320"/>
           </a:xfrm>
           <a:prstGeom prst="rect">
             <a:avLst/>
@@ -3304,7 +3448,7 @@
           <a:lstStyle/>
           <a:p>
             <a:pPr>
-              <a:defRPr sz="1100" b="1">
+              <a:defRPr sz="1150" b="1">
                 <a:solidFill>
                   <a:srgbClr val="008CA0"/>
                 </a:solidFill>
@@ -3312,20 +3456,56 @@
               </a:defRPr>
             </a:pPr>
             <a:r>
-              <a:t>專題製作與教師研習課程</a:t>
-            </a:r>
-          </a:p>
-        </p:txBody>
-      </p:sp>
-      <p:sp>
-        <p:nvSpPr>
-          <p:cNvPr id="4" name="TextBox 3"/>
+              <a:t>📷 WEBCAM AI 視覺與 YOLO 專題實作課程</a:t>
+            </a:r>
+          </a:p>
+        </p:txBody>
+      </p:sp>
+      <p:sp>
+        <p:nvSpPr>
+          <p:cNvPr id="6" name="TextBox 5"/>
           <p:cNvSpPr txBox="1"/>
           <p:nvPr/>
         </p:nvSpPr>
         <p:spPr>
           <a:xfrm>
-            <a:off x="731520" y="320040"/>
+            <a:off x="9144000" y="109728"/>
+            <a:ext cx="2286000" cy="274320"/>
+          </a:xfrm>
+          <a:prstGeom prst="rect">
+            <a:avLst/>
+          </a:prstGeom>
+          <a:noFill/>
+        </p:spPr>
+        <p:txBody>
+          <a:bodyPr wrap="none">
+            <a:spAutoFit/>
+          </a:bodyPr>
+          <a:lstStyle/>
+          <a:p>
+            <a:pPr algn="r">
+              <a:defRPr sz="1200" b="1">
+                <a:solidFill>
+                  <a:srgbClr val="B4C8E1"/>
+                </a:solidFill>
+                <a:latin typeface="微軟正黑體"/>
+              </a:defRPr>
+            </a:pPr>
+            <a:r>
+              <a:t>第 10 / 14 頁</a:t>
+            </a:r>
+          </a:p>
+        </p:txBody>
+      </p:sp>
+      <p:sp>
+        <p:nvSpPr>
+          <p:cNvPr id="7" name="TextBox 6"/>
+          <p:cNvSpPr txBox="1"/>
+          <p:nvPr/>
+        </p:nvSpPr>
+        <p:spPr>
+          <a:xfrm>
+            <a:off x="731520" y="365760"/>
             <a:ext cx="10698480" cy="594360"/>
           </a:xfrm>
           <a:prstGeom prst="rect">
@@ -3340,7 +3520,7 @@
           <a:lstStyle/>
           <a:p>
             <a:pPr>
-              <a:defRPr sz="2200" b="1">
+              <a:defRPr sz="2400" b="1">
                 <a:solidFill>
                   <a:srgbClr val="FFFFFF"/>
                 </a:solidFill>
@@ -3355,14 +3535,50 @@
       </p:sp>
       <p:sp>
         <p:nvSpPr>
-          <p:cNvPr id="5" name="Rounded Rectangle 4"/>
+          <p:cNvPr id="8" name="TextBox 7"/>
+          <p:cNvSpPr txBox="1"/>
+          <p:nvPr/>
+        </p:nvSpPr>
+        <p:spPr>
+          <a:xfrm>
+            <a:off x="731520" y="6510528"/>
+            <a:ext cx="10698480" cy="274320"/>
+          </a:xfrm>
+          <a:prstGeom prst="rect">
+            <a:avLst/>
+          </a:prstGeom>
+          <a:noFill/>
+        </p:spPr>
+        <p:txBody>
+          <a:bodyPr wrap="none">
+            <a:spAutoFit/>
+          </a:bodyPr>
+          <a:lstStyle/>
+          <a:p>
+            <a:pPr>
+              <a:defRPr sz="1050">
+                <a:solidFill>
+                  <a:srgbClr val="64748B"/>
+                </a:solidFill>
+                <a:latin typeface="微軟正黑體"/>
+              </a:defRPr>
+            </a:pPr>
+            <a:r>
+              <a:t>🌐 互動課程網頁：https://stjedu.github.io/www/yolo_webcam_course.html   |   主講：簡樹桐 老師</a:t>
+            </a:r>
+          </a:p>
+        </p:txBody>
+      </p:sp>
+      <p:sp>
+        <p:nvSpPr>
+          <p:cNvPr id="9" name="Rounded Rectangle 8"/>
           <p:cNvSpPr/>
           <p:nvPr/>
         </p:nvSpPr>
         <p:spPr>
           <a:xfrm>
-            <a:off x="731520" y="1371600"/>
-            <a:ext cx="5120640" cy="4937760"/>
+            <a:off x="731520" y="1325880"/>
+            <a:ext cx="5120640" cy="4983480"/>
           </a:xfrm>
           <a:prstGeom prst="roundRect">
             <a:avLst/>
@@ -3400,14 +3616,57 @@
       </p:sp>
       <p:sp>
         <p:nvSpPr>
-          <p:cNvPr id="6" name="TextBox 5"/>
+          <p:cNvPr id="10" name="Rounded Rectangle 9"/>
+          <p:cNvSpPr/>
+          <p:nvPr/>
+        </p:nvSpPr>
+        <p:spPr>
+          <a:xfrm>
+            <a:off x="731520" y="1325880"/>
+            <a:ext cx="5120640" cy="91440"/>
+          </a:xfrm>
+          <a:prstGeom prst="roundRect">
+            <a:avLst/>
+          </a:prstGeom>
+          <a:solidFill>
+            <a:srgbClr val="008CA0"/>
+          </a:solidFill>
+          <a:ln>
+            <a:noFill/>
+          </a:ln>
+        </p:spPr>
+        <p:style>
+          <a:lnRef idx="1">
+            <a:schemeClr val="accent1"/>
+          </a:lnRef>
+          <a:fillRef idx="3">
+            <a:schemeClr val="accent1"/>
+          </a:fillRef>
+          <a:effectRef idx="2">
+            <a:schemeClr val="accent1"/>
+          </a:effectRef>
+          <a:fontRef idx="minor">
+            <a:schemeClr val="lt1"/>
+          </a:fontRef>
+        </p:style>
+        <p:txBody>
+          <a:bodyPr rtlCol="0" anchor="ctr"/>
+          <a:lstStyle/>
+          <a:p>
+            <a:pPr algn="ctr"/>
+          </a:p>
+        </p:txBody>
+      </p:sp>
+      <p:sp>
+        <p:nvSpPr>
+          <p:cNvPr id="11" name="TextBox 10"/>
           <p:cNvSpPr txBox="1"/>
           <p:nvPr/>
         </p:nvSpPr>
         <p:spPr>
           <a:xfrm>
-            <a:off x="914400" y="1508760"/>
-            <a:ext cx="4754880" cy="4663440"/>
+            <a:off x="960120" y="1508760"/>
+            <a:ext cx="4663440" cy="4663440"/>
           </a:xfrm>
           <a:prstGeom prst="rect">
             <a:avLst/>
@@ -3424,7 +3683,7 @@
               <a:spcAft>
                 <a:spcPts val="1000"/>
               </a:spcAft>
-              <a:defRPr sz="1600" b="1">
+              <a:defRPr sz="1750" b="1">
                 <a:solidFill>
                   <a:srgbClr val="14233C"/>
                 </a:solidFill>
@@ -3437,12 +3696,15 @@
           </a:p>
           <a:p>
             <a:pPr>
+              <a:lnSpc>
+                <a:spcPct val="125000"/>
+              </a:lnSpc>
               <a:spcAft>
-                <a:spcPts val="600"/>
+                <a:spcPts val="700"/>
               </a:spcAft>
             </a:pPr>
             <a:r>
-              <a:rPr b="1" sz="1300">
+              <a:rPr b="1" sz="1350">
                 <a:solidFill>
                   <a:srgbClr val="1E293B"/>
                 </a:solidFill>
@@ -3451,7 +3713,7 @@
               <a:t>17 個人體關鍵點 (Keypoints)： </a:t>
             </a:r>
             <a:r>
-              <a:rPr b="0" sz="1300">
+              <a:rPr b="0" sz="1350">
                 <a:solidFill>
                   <a:srgbClr val="64748B"/>
                 </a:solidFill>
@@ -3462,12 +3724,15 @@
           </a:p>
           <a:p>
             <a:pPr>
+              <a:lnSpc>
+                <a:spcPct val="125000"/>
+              </a:lnSpc>
               <a:spcAft>
-                <a:spcPts val="600"/>
+                <a:spcPts val="700"/>
               </a:spcAft>
             </a:pPr>
             <a:r>
-              <a:rPr b="1" sz="1300">
+              <a:rPr b="1" sz="1350">
                 <a:solidFill>
                   <a:srgbClr val="1E293B"/>
                 </a:solidFill>
@@ -3476,7 +3741,7 @@
               <a:t>坐標幾何分析： </a:t>
             </a:r>
             <a:r>
-              <a:rPr b="0" sz="1300">
+              <a:rPr b="0" sz="1350">
                 <a:solidFill>
                   <a:srgbClr val="64748B"/>
                 </a:solidFill>
@@ -3487,12 +3752,15 @@
           </a:p>
           <a:p>
             <a:pPr>
+              <a:lnSpc>
+                <a:spcPct val="125000"/>
+              </a:lnSpc>
               <a:spcAft>
-                <a:spcPts val="600"/>
+                <a:spcPts val="700"/>
               </a:spcAft>
             </a:pPr>
             <a:r>
-              <a:rPr b="1" sz="1300">
+              <a:rPr b="1" sz="1350">
                 <a:solidFill>
                   <a:srgbClr val="1E293B"/>
                 </a:solidFill>
@@ -3501,7 +3769,7 @@
               <a:t>手勢拍照判定邏輯： </a:t>
             </a:r>
             <a:r>
-              <a:rPr b="0" sz="1300">
+              <a:rPr b="0" sz="1350">
                 <a:solidFill>
                   <a:srgbClr val="64748B"/>
                 </a:solidFill>
@@ -3512,12 +3780,15 @@
           </a:p>
           <a:p>
             <a:pPr>
+              <a:lnSpc>
+                <a:spcPct val="125000"/>
+              </a:lnSpc>
               <a:spcAft>
-                <a:spcPts val="600"/>
+                <a:spcPts val="700"/>
               </a:spcAft>
             </a:pPr>
             <a:r>
-              <a:rPr b="1" sz="1300">
+              <a:rPr b="1" sz="1350">
                 <a:solidFill>
                   <a:srgbClr val="1E293B"/>
                 </a:solidFill>
@@ -3526,7 +3797,7 @@
               <a:t>雙手平舉錄影邏輯： </a:t>
             </a:r>
             <a:r>
-              <a:rPr b="0" sz="1300">
+              <a:rPr b="0" sz="1350">
                 <a:solidFill>
                   <a:srgbClr val="64748B"/>
                 </a:solidFill>
@@ -3539,14 +3810,14 @@
       </p:sp>
       <p:sp>
         <p:nvSpPr>
-          <p:cNvPr id="7" name="Rounded Rectangle 6"/>
+          <p:cNvPr id="12" name="Rounded Rectangle 11"/>
           <p:cNvSpPr/>
           <p:nvPr/>
         </p:nvSpPr>
         <p:spPr>
           <a:xfrm>
-            <a:off x="6309360" y="1371600"/>
-            <a:ext cx="5120640" cy="4937760"/>
+            <a:off x="6309360" y="1325880"/>
+            <a:ext cx="5120640" cy="4983480"/>
           </a:xfrm>
           <a:prstGeom prst="roundRect">
             <a:avLst/>
@@ -3584,14 +3855,57 @@
       </p:sp>
       <p:sp>
         <p:nvSpPr>
-          <p:cNvPr id="8" name="TextBox 7"/>
+          <p:cNvPr id="13" name="Rounded Rectangle 12"/>
+          <p:cNvSpPr/>
+          <p:nvPr/>
+        </p:nvSpPr>
+        <p:spPr>
+          <a:xfrm>
+            <a:off x="6309360" y="1325880"/>
+            <a:ext cx="5120640" cy="91440"/>
+          </a:xfrm>
+          <a:prstGeom prst="roundRect">
+            <a:avLst/>
+          </a:prstGeom>
+          <a:solidFill>
+            <a:srgbClr val="EB6E28"/>
+          </a:solidFill>
+          <a:ln>
+            <a:noFill/>
+          </a:ln>
+        </p:spPr>
+        <p:style>
+          <a:lnRef idx="1">
+            <a:schemeClr val="accent1"/>
+          </a:lnRef>
+          <a:fillRef idx="3">
+            <a:schemeClr val="accent1"/>
+          </a:fillRef>
+          <a:effectRef idx="2">
+            <a:schemeClr val="accent1"/>
+          </a:effectRef>
+          <a:fontRef idx="minor">
+            <a:schemeClr val="lt1"/>
+          </a:fontRef>
+        </p:style>
+        <p:txBody>
+          <a:bodyPr rtlCol="0" anchor="ctr"/>
+          <a:lstStyle/>
+          <a:p>
+            <a:pPr algn="ctr"/>
+          </a:p>
+        </p:txBody>
+      </p:sp>
+      <p:sp>
+        <p:nvSpPr>
+          <p:cNvPr id="14" name="TextBox 13"/>
           <p:cNvSpPr txBox="1"/>
           <p:nvPr/>
         </p:nvSpPr>
         <p:spPr>
           <a:xfrm>
-            <a:off x="6492240" y="1508760"/>
-            <a:ext cx="4754880" cy="4663440"/>
+            <a:off x="6537960" y="1508760"/>
+            <a:ext cx="4663440" cy="4663440"/>
           </a:xfrm>
           <a:prstGeom prst="rect">
             <a:avLst/>
@@ -3608,7 +3922,7 @@
               <a:spcAft>
                 <a:spcPts val="1000"/>
               </a:spcAft>
-              <a:defRPr sz="1600" b="1">
+              <a:defRPr sz="1750" b="1">
                 <a:solidFill>
                   <a:srgbClr val="14233C"/>
                 </a:solidFill>
@@ -3621,12 +3935,15 @@
           </a:p>
           <a:p>
             <a:pPr>
+              <a:lnSpc>
+                <a:spcPct val="125000"/>
+              </a:lnSpc>
               <a:spcAft>
-                <a:spcPts val="600"/>
+                <a:spcPts val="700"/>
               </a:spcAft>
             </a:pPr>
             <a:r>
-              <a:rPr b="1" sz="1300">
+              <a:rPr b="1" sz="1350">
                 <a:solidFill>
                   <a:srgbClr val="1E293B"/>
                 </a:solidFill>
@@ -3635,7 +3952,7 @@
               <a:t>多人鎖定挑戰： </a:t>
             </a:r>
             <a:r>
-              <a:rPr b="0" sz="1300">
+              <a:rPr b="0" sz="1350">
                 <a:solidFill>
                   <a:srgbClr val="64748B"/>
                 </a:solidFill>
@@ -3646,12 +3963,15 @@
           </a:p>
           <a:p>
             <a:pPr>
+              <a:lnSpc>
+                <a:spcPct val="125000"/>
+              </a:lnSpc>
               <a:spcAft>
-                <a:spcPts val="600"/>
+                <a:spcPts val="700"/>
               </a:spcAft>
             </a:pPr>
             <a:r>
-              <a:rPr b="1" sz="1300">
+              <a:rPr b="1" sz="1350">
                 <a:solidFill>
                   <a:srgbClr val="1E293B"/>
                 </a:solidFill>
@@ -3660,7 +3980,7 @@
               <a:t>主控者 (Commander) 機制： </a:t>
             </a:r>
             <a:r>
-              <a:rPr b="0" sz="1300">
+              <a:rPr b="0" sz="1350">
                 <a:solidFill>
                   <a:srgbClr val="64748B"/>
                 </a:solidFill>
@@ -3671,12 +3991,15 @@
           </a:p>
           <a:p>
             <a:pPr>
+              <a:lnSpc>
+                <a:spcPct val="125000"/>
+              </a:lnSpc>
               <a:spcAft>
-                <a:spcPts val="600"/>
+                <a:spcPts val="700"/>
               </a:spcAft>
             </a:pPr>
             <a:r>
-              <a:rPr b="1" sz="1300">
+              <a:rPr b="1" sz="1350">
                 <a:solidFill>
                   <a:srgbClr val="1E293B"/>
                 </a:solidFill>
@@ -3685,7 +4008,7 @@
               <a:t>多人跌倒警示 (Fall Detection)： </a:t>
             </a:r>
             <a:r>
-              <a:rPr b="0" sz="1300">
+              <a:rPr b="0" sz="1350">
                 <a:solidFill>
                   <a:srgbClr val="64748B"/>
                 </a:solidFill>
@@ -3696,12 +4019,15 @@
           </a:p>
           <a:p>
             <a:pPr>
+              <a:lnSpc>
+                <a:spcPct val="125000"/>
+              </a:lnSpc>
               <a:spcAft>
-                <a:spcPts val="600"/>
+                <a:spcPts val="700"/>
               </a:spcAft>
             </a:pPr>
             <a:r>
-              <a:rPr b="1" sz="1300">
+              <a:rPr b="1" sz="1350">
                 <a:solidFill>
                   <a:srgbClr val="1E293B"/>
                 </a:solidFill>
@@ -3710,7 +4036,7 @@
               <a:t>視覺警報回饋： </a:t>
             </a:r>
             <a:r>
-              <a:rPr b="0" sz="1300">
+              <a:rPr b="0" sz="1350">
                 <a:solidFill>
                   <a:srgbClr val="64748B"/>
                 </a:solidFill>
@@ -3726,6 +4052,9 @@
   <p:clrMapOvr>
     <a:masterClrMapping/>
   </p:clrMapOvr>
+  <p:transition spd="med">
+    <p:fade/>
+  </p:transition>
 </p:sld>
 </file>
 
@@ -3748,18 +4077,16 @@
         <p:spPr>
           <a:xfrm>
             <a:off x="0" y="0"/>
-            <a:ext cx="12191695" cy="1005840"/>
+            <a:ext cx="12191695" cy="6858000"/>
           </a:xfrm>
           <a:prstGeom prst="rect">
             <a:avLst/>
           </a:prstGeom>
           <a:solidFill>
-            <a:srgbClr val="14233C"/>
+            <a:srgbClr val="F8FAFC"/>
           </a:solidFill>
           <a:ln>
-            <a:solidFill>
-              <a:srgbClr val="14233C"/>
-            </a:solidFill>
+            <a:noFill/>
           </a:ln>
         </p:spPr>
         <p:style>
@@ -3786,14 +4113,100 @@
       </p:sp>
       <p:sp>
         <p:nvSpPr>
-          <p:cNvPr id="3" name="TextBox 2"/>
+          <p:cNvPr id="3" name="Rectangle 2"/>
+          <p:cNvSpPr/>
+          <p:nvPr/>
+        </p:nvSpPr>
+        <p:spPr>
+          <a:xfrm>
+            <a:off x="0" y="0"/>
+            <a:ext cx="12191695" cy="1051560"/>
+          </a:xfrm>
+          <a:prstGeom prst="rect">
+            <a:avLst/>
+          </a:prstGeom>
+          <a:solidFill>
+            <a:srgbClr val="14233C"/>
+          </a:solidFill>
+          <a:ln>
+            <a:noFill/>
+          </a:ln>
+        </p:spPr>
+        <p:style>
+          <a:lnRef idx="1">
+            <a:schemeClr val="accent1"/>
+          </a:lnRef>
+          <a:fillRef idx="3">
+            <a:schemeClr val="accent1"/>
+          </a:fillRef>
+          <a:effectRef idx="2">
+            <a:schemeClr val="accent1"/>
+          </a:effectRef>
+          <a:fontRef idx="minor">
+            <a:schemeClr val="lt1"/>
+          </a:fontRef>
+        </p:style>
+        <p:txBody>
+          <a:bodyPr rtlCol="0" anchor="ctr"/>
+          <a:lstStyle/>
+          <a:p>
+            <a:pPr algn="ctr"/>
+          </a:p>
+        </p:txBody>
+      </p:sp>
+      <p:sp>
+        <p:nvSpPr>
+          <p:cNvPr id="4" name="Rectangle 3"/>
+          <p:cNvSpPr/>
+          <p:nvPr/>
+        </p:nvSpPr>
+        <p:spPr>
+          <a:xfrm>
+            <a:off x="0" y="1051560"/>
+            <a:ext cx="4114800" cy="45720"/>
+          </a:xfrm>
+          <a:prstGeom prst="rect">
+            <a:avLst/>
+          </a:prstGeom>
+          <a:solidFill>
+            <a:srgbClr val="008CA0"/>
+          </a:solidFill>
+          <a:ln>
+            <a:noFill/>
+          </a:ln>
+        </p:spPr>
+        <p:style>
+          <a:lnRef idx="1">
+            <a:schemeClr val="accent1"/>
+          </a:lnRef>
+          <a:fillRef idx="3">
+            <a:schemeClr val="accent1"/>
+          </a:fillRef>
+          <a:effectRef idx="2">
+            <a:schemeClr val="accent1"/>
+          </a:effectRef>
+          <a:fontRef idx="minor">
+            <a:schemeClr val="lt1"/>
+          </a:fontRef>
+        </p:style>
+        <p:txBody>
+          <a:bodyPr rtlCol="0" anchor="ctr"/>
+          <a:lstStyle/>
+          <a:p>
+            <a:pPr algn="ctr"/>
+          </a:p>
+        </p:txBody>
+      </p:sp>
+      <p:sp>
+        <p:nvSpPr>
+          <p:cNvPr id="5" name="TextBox 4"/>
           <p:cNvSpPr txBox="1"/>
           <p:nvPr/>
         </p:nvSpPr>
         <p:spPr>
           <a:xfrm>
             <a:off x="731520" y="109728"/>
-            <a:ext cx="10698480" cy="274320"/>
+            <a:ext cx="7772400" cy="274320"/>
           </a:xfrm>
           <a:prstGeom prst="rect">
             <a:avLst/>
@@ -3807,7 +4220,7 @@
           <a:lstStyle/>
           <a:p>
             <a:pPr>
-              <a:defRPr sz="1100" b="1">
+              <a:defRPr sz="1150" b="1">
                 <a:solidFill>
                   <a:srgbClr val="008CA0"/>
                 </a:solidFill>
@@ -3815,20 +4228,56 @@
               </a:defRPr>
             </a:pPr>
             <a:r>
-              <a:t>專題製作與教師研習課程</a:t>
-            </a:r>
-          </a:p>
-        </p:txBody>
-      </p:sp>
-      <p:sp>
-        <p:nvSpPr>
-          <p:cNvPr id="4" name="TextBox 3"/>
+              <a:t>📷 WEBCAM AI 視覺與 YOLO 專題實作課程</a:t>
+            </a:r>
+          </a:p>
+        </p:txBody>
+      </p:sp>
+      <p:sp>
+        <p:nvSpPr>
+          <p:cNvPr id="6" name="TextBox 5"/>
           <p:cNvSpPr txBox="1"/>
           <p:nvPr/>
         </p:nvSpPr>
         <p:spPr>
           <a:xfrm>
-            <a:off x="731520" y="320040"/>
+            <a:off x="9144000" y="109728"/>
+            <a:ext cx="2286000" cy="274320"/>
+          </a:xfrm>
+          <a:prstGeom prst="rect">
+            <a:avLst/>
+          </a:prstGeom>
+          <a:noFill/>
+        </p:spPr>
+        <p:txBody>
+          <a:bodyPr wrap="none">
+            <a:spAutoFit/>
+          </a:bodyPr>
+          <a:lstStyle/>
+          <a:p>
+            <a:pPr algn="r">
+              <a:defRPr sz="1200" b="1">
+                <a:solidFill>
+                  <a:srgbClr val="B4C8E1"/>
+                </a:solidFill>
+                <a:latin typeface="微軟正黑體"/>
+              </a:defRPr>
+            </a:pPr>
+            <a:r>
+              <a:t>第 11 / 14 頁</a:t>
+            </a:r>
+          </a:p>
+        </p:txBody>
+      </p:sp>
+      <p:sp>
+        <p:nvSpPr>
+          <p:cNvPr id="7" name="TextBox 6"/>
+          <p:cNvSpPr txBox="1"/>
+          <p:nvPr/>
+        </p:nvSpPr>
+        <p:spPr>
+          <a:xfrm>
+            <a:off x="731520" y="365760"/>
             <a:ext cx="10698480" cy="594360"/>
           </a:xfrm>
           <a:prstGeom prst="rect">
@@ -3843,7 +4292,7 @@
           <a:lstStyle/>
           <a:p>
             <a:pPr>
-              <a:defRPr sz="2200" b="1">
+              <a:defRPr sz="2400" b="1">
                 <a:solidFill>
                   <a:srgbClr val="FFFFFF"/>
                 </a:solidFill>
@@ -3858,14 +4307,50 @@
       </p:sp>
       <p:sp>
         <p:nvSpPr>
-          <p:cNvPr id="5" name="Rounded Rectangle 4"/>
+          <p:cNvPr id="8" name="TextBox 7"/>
+          <p:cNvSpPr txBox="1"/>
+          <p:nvPr/>
+        </p:nvSpPr>
+        <p:spPr>
+          <a:xfrm>
+            <a:off x="731520" y="6510528"/>
+            <a:ext cx="10698480" cy="274320"/>
+          </a:xfrm>
+          <a:prstGeom prst="rect">
+            <a:avLst/>
+          </a:prstGeom>
+          <a:noFill/>
+        </p:spPr>
+        <p:txBody>
+          <a:bodyPr wrap="none">
+            <a:spAutoFit/>
+          </a:bodyPr>
+          <a:lstStyle/>
+          <a:p>
+            <a:pPr>
+              <a:defRPr sz="1050">
+                <a:solidFill>
+                  <a:srgbClr val="64748B"/>
+                </a:solidFill>
+                <a:latin typeface="微軟正黑體"/>
+              </a:defRPr>
+            </a:pPr>
+            <a:r>
+              <a:t>🌐 互動課程網頁：https://stjedu.github.io/www/yolo_webcam_course.html   |   主講：簡樹桐 老師</a:t>
+            </a:r>
+          </a:p>
+        </p:txBody>
+      </p:sp>
+      <p:sp>
+        <p:nvSpPr>
+          <p:cNvPr id="9" name="Rounded Rectangle 8"/>
           <p:cNvSpPr/>
           <p:nvPr/>
         </p:nvSpPr>
         <p:spPr>
           <a:xfrm>
-            <a:off x="731520" y="1371600"/>
-            <a:ext cx="10698480" cy="2377440"/>
+            <a:off x="731520" y="1325880"/>
+            <a:ext cx="10698480" cy="2423160"/>
           </a:xfrm>
           <a:prstGeom prst="roundRect">
             <a:avLst/>
@@ -3903,14 +4388,14 @@
       </p:sp>
       <p:sp>
         <p:nvSpPr>
-          <p:cNvPr id="6" name="TextBox 5"/>
+          <p:cNvPr id="10" name="TextBox 9"/>
           <p:cNvSpPr txBox="1"/>
           <p:nvPr/>
         </p:nvSpPr>
         <p:spPr>
           <a:xfrm>
-            <a:off x="960120" y="1536192"/>
-            <a:ext cx="10241280" cy="2048256"/>
+            <a:off x="960120" y="1472184"/>
+            <a:ext cx="10241280" cy="2130552"/>
           </a:xfrm>
           <a:prstGeom prst="rect">
             <a:avLst/>
@@ -3925,7 +4410,7 @@
           <a:p>
             <a:pPr>
               <a:spcAft>
-                <a:spcPts val="800"/>
+                <a:spcPts val="600"/>
               </a:spcAft>
               <a:defRPr sz="1500" b="1">
                 <a:solidFill>
@@ -3935,17 +4420,20 @@
               </a:defRPr>
             </a:pPr>
             <a:r>
-              <a:t>💡 實戰提示詞 (Prompt)：YOLO Pose 骨架手勢控制：舉手拍照與平舉錄影</a:t>
-            </a:r>
-          </a:p>
-          <a:p>
-            <a:pPr>
+              <a:t>💡 實戰提示詞 (Prompt)：YOLO Pose 骨架手勢控制：舉手拍照與平舉錄影   [可直接反白複製]</a:t>
+            </a:r>
+          </a:p>
+          <a:p>
+            <a:pPr>
+              <a:lnSpc>
+                <a:spcPct val="120000"/>
+              </a:lnSpc>
               <a:spcAft>
-                <a:spcPts val="800"/>
+                <a:spcPts val="600"/>
               </a:spcAft>
             </a:pPr>
             <a:r>
-              <a:rPr sz="1200">
+              <a:rPr sz="1250">
                 <a:solidFill>
                   <a:srgbClr val="0F172A"/>
                 </a:solidFill>
@@ -3960,9 +4448,9 @@
           </a:p>
           <a:p>
             <a:r>
-              <a:rPr sz="1100" i="1">
-                <a:solidFill>
-                  <a:srgbClr val="64748B"/>
+              <a:rPr sz="1150" b="1">
+                <a:solidFill>
+                  <a:srgbClr val="008CA0"/>
                 </a:solidFill>
                 <a:latin typeface="微軟正黑體"/>
               </a:rPr>
@@ -3973,14 +4461,14 @@
       </p:sp>
       <p:sp>
         <p:nvSpPr>
-          <p:cNvPr id="7" name="Rounded Rectangle 6"/>
+          <p:cNvPr id="11" name="Rounded Rectangle 10"/>
           <p:cNvSpPr/>
           <p:nvPr/>
         </p:nvSpPr>
         <p:spPr>
           <a:xfrm>
-            <a:off x="731520" y="4023360"/>
-            <a:ext cx="10698480" cy="2377440"/>
+            <a:off x="731520" y="3931920"/>
+            <a:ext cx="10698480" cy="2423160"/>
           </a:xfrm>
           <a:prstGeom prst="roundRect">
             <a:avLst/>
@@ -4018,14 +4506,14 @@
       </p:sp>
       <p:sp>
         <p:nvSpPr>
-          <p:cNvPr id="8" name="TextBox 7"/>
+          <p:cNvPr id="12" name="TextBox 11"/>
           <p:cNvSpPr txBox="1"/>
           <p:nvPr/>
         </p:nvSpPr>
         <p:spPr>
           <a:xfrm>
-            <a:off x="960120" y="4187952"/>
-            <a:ext cx="10241280" cy="2048256"/>
+            <a:off x="960120" y="4078224"/>
+            <a:ext cx="10241280" cy="2130552"/>
           </a:xfrm>
           <a:prstGeom prst="rect">
             <a:avLst/>
@@ -4040,7 +4528,7 @@
           <a:p>
             <a:pPr>
               <a:spcAft>
-                <a:spcPts val="800"/>
+                <a:spcPts val="600"/>
               </a:spcAft>
               <a:defRPr sz="1500" b="1">
                 <a:solidFill>
@@ -4050,17 +4538,20 @@
               </a:defRPr>
             </a:pPr>
             <a:r>
-              <a:t>💡 實戰提示詞 (Prompt)：中央主控者模式 ＆ 多人跌倒全螢幕紅框警示</a:t>
-            </a:r>
-          </a:p>
-          <a:p>
-            <a:pPr>
+              <a:t>💡 實戰提示詞 (Prompt)：中央主控者模式 ＆ 多人跌倒全螢幕紅框警示   [可直接反白複製]</a:t>
+            </a:r>
+          </a:p>
+          <a:p>
+            <a:pPr>
+              <a:lnSpc>
+                <a:spcPct val="120000"/>
+              </a:lnSpc>
               <a:spcAft>
-                <a:spcPts val="800"/>
+                <a:spcPts val="600"/>
               </a:spcAft>
             </a:pPr>
             <a:r>
-              <a:rPr sz="1200">
+              <a:rPr sz="1250">
                 <a:solidFill>
                   <a:srgbClr val="0F172A"/>
                 </a:solidFill>
@@ -4074,9 +4565,9 @@
           </a:p>
           <a:p>
             <a:r>
-              <a:rPr sz="1100" i="1">
-                <a:solidFill>
-                  <a:srgbClr val="64748B"/>
+              <a:rPr sz="1150" b="1">
+                <a:solidFill>
+                  <a:srgbClr val="008CA0"/>
                 </a:solidFill>
                 <a:latin typeface="微軟正黑體"/>
               </a:rPr>
@@ -4090,6 +4581,9 @@
   <p:clrMapOvr>
     <a:masterClrMapping/>
   </p:clrMapOvr>
+  <p:transition spd="med">
+    <p:fade/>
+  </p:transition>
 </p:sld>
 </file>
 
@@ -4112,18 +4606,16 @@
         <p:spPr>
           <a:xfrm>
             <a:off x="0" y="0"/>
-            <a:ext cx="12191695" cy="1005840"/>
+            <a:ext cx="12191695" cy="6858000"/>
           </a:xfrm>
           <a:prstGeom prst="rect">
             <a:avLst/>
           </a:prstGeom>
           <a:solidFill>
-            <a:srgbClr val="14233C"/>
+            <a:srgbClr val="F8FAFC"/>
           </a:solidFill>
           <a:ln>
-            <a:solidFill>
-              <a:srgbClr val="14233C"/>
-            </a:solidFill>
+            <a:noFill/>
           </a:ln>
         </p:spPr>
         <p:style>
@@ -4150,14 +4642,100 @@
       </p:sp>
       <p:sp>
         <p:nvSpPr>
-          <p:cNvPr id="3" name="TextBox 2"/>
+          <p:cNvPr id="3" name="Rectangle 2"/>
+          <p:cNvSpPr/>
+          <p:nvPr/>
+        </p:nvSpPr>
+        <p:spPr>
+          <a:xfrm>
+            <a:off x="0" y="0"/>
+            <a:ext cx="12191695" cy="1051560"/>
+          </a:xfrm>
+          <a:prstGeom prst="rect">
+            <a:avLst/>
+          </a:prstGeom>
+          <a:solidFill>
+            <a:srgbClr val="14233C"/>
+          </a:solidFill>
+          <a:ln>
+            <a:noFill/>
+          </a:ln>
+        </p:spPr>
+        <p:style>
+          <a:lnRef idx="1">
+            <a:schemeClr val="accent1"/>
+          </a:lnRef>
+          <a:fillRef idx="3">
+            <a:schemeClr val="accent1"/>
+          </a:fillRef>
+          <a:effectRef idx="2">
+            <a:schemeClr val="accent1"/>
+          </a:effectRef>
+          <a:fontRef idx="minor">
+            <a:schemeClr val="lt1"/>
+          </a:fontRef>
+        </p:style>
+        <p:txBody>
+          <a:bodyPr rtlCol="0" anchor="ctr"/>
+          <a:lstStyle/>
+          <a:p>
+            <a:pPr algn="ctr"/>
+          </a:p>
+        </p:txBody>
+      </p:sp>
+      <p:sp>
+        <p:nvSpPr>
+          <p:cNvPr id="4" name="Rectangle 3"/>
+          <p:cNvSpPr/>
+          <p:nvPr/>
+        </p:nvSpPr>
+        <p:spPr>
+          <a:xfrm>
+            <a:off x="0" y="1051560"/>
+            <a:ext cx="4114800" cy="45720"/>
+          </a:xfrm>
+          <a:prstGeom prst="rect">
+            <a:avLst/>
+          </a:prstGeom>
+          <a:solidFill>
+            <a:srgbClr val="008CA0"/>
+          </a:solidFill>
+          <a:ln>
+            <a:noFill/>
+          </a:ln>
+        </p:spPr>
+        <p:style>
+          <a:lnRef idx="1">
+            <a:schemeClr val="accent1"/>
+          </a:lnRef>
+          <a:fillRef idx="3">
+            <a:schemeClr val="accent1"/>
+          </a:fillRef>
+          <a:effectRef idx="2">
+            <a:schemeClr val="accent1"/>
+          </a:effectRef>
+          <a:fontRef idx="minor">
+            <a:schemeClr val="lt1"/>
+          </a:fontRef>
+        </p:style>
+        <p:txBody>
+          <a:bodyPr rtlCol="0" anchor="ctr"/>
+          <a:lstStyle/>
+          <a:p>
+            <a:pPr algn="ctr"/>
+          </a:p>
+        </p:txBody>
+      </p:sp>
+      <p:sp>
+        <p:nvSpPr>
+          <p:cNvPr id="5" name="TextBox 4"/>
           <p:cNvSpPr txBox="1"/>
           <p:nvPr/>
         </p:nvSpPr>
         <p:spPr>
           <a:xfrm>
             <a:off x="731520" y="109728"/>
-            <a:ext cx="10698480" cy="274320"/>
+            <a:ext cx="7772400" cy="274320"/>
           </a:xfrm>
           <a:prstGeom prst="rect">
             <a:avLst/>
@@ -4171,7 +4749,7 @@
           <a:lstStyle/>
           <a:p>
             <a:pPr>
-              <a:defRPr sz="1100" b="1">
+              <a:defRPr sz="1150" b="1">
                 <a:solidFill>
                   <a:srgbClr val="008CA0"/>
                 </a:solidFill>
@@ -4179,20 +4757,56 @@
               </a:defRPr>
             </a:pPr>
             <a:r>
-              <a:t>專題製作與教師研習課程</a:t>
-            </a:r>
-          </a:p>
-        </p:txBody>
-      </p:sp>
-      <p:sp>
-        <p:nvSpPr>
-          <p:cNvPr id="4" name="TextBox 3"/>
+              <a:t>📷 WEBCAM AI 視覺與 YOLO 專題實作課程</a:t>
+            </a:r>
+          </a:p>
+        </p:txBody>
+      </p:sp>
+      <p:sp>
+        <p:nvSpPr>
+          <p:cNvPr id="6" name="TextBox 5"/>
           <p:cNvSpPr txBox="1"/>
           <p:nvPr/>
         </p:nvSpPr>
         <p:spPr>
           <a:xfrm>
-            <a:off x="731520" y="320040"/>
+            <a:off x="9144000" y="109728"/>
+            <a:ext cx="2286000" cy="274320"/>
+          </a:xfrm>
+          <a:prstGeom prst="rect">
+            <a:avLst/>
+          </a:prstGeom>
+          <a:noFill/>
+        </p:spPr>
+        <p:txBody>
+          <a:bodyPr wrap="none">
+            <a:spAutoFit/>
+          </a:bodyPr>
+          <a:lstStyle/>
+          <a:p>
+            <a:pPr algn="r">
+              <a:defRPr sz="1200" b="1">
+                <a:solidFill>
+                  <a:srgbClr val="B4C8E1"/>
+                </a:solidFill>
+                <a:latin typeface="微軟正黑體"/>
+              </a:defRPr>
+            </a:pPr>
+            <a:r>
+              <a:t>第 12 / 14 頁</a:t>
+            </a:r>
+          </a:p>
+        </p:txBody>
+      </p:sp>
+      <p:sp>
+        <p:nvSpPr>
+          <p:cNvPr id="7" name="TextBox 6"/>
+          <p:cNvSpPr txBox="1"/>
+          <p:nvPr/>
+        </p:nvSpPr>
+        <p:spPr>
+          <a:xfrm>
+            <a:off x="731520" y="365760"/>
             <a:ext cx="10698480" cy="594360"/>
           </a:xfrm>
           <a:prstGeom prst="rect">
@@ -4207,7 +4821,7 @@
           <a:lstStyle/>
           <a:p>
             <a:pPr>
-              <a:defRPr sz="2200" b="1">
+              <a:defRPr sz="2400" b="1">
                 <a:solidFill>
                   <a:srgbClr val="FFFFFF"/>
                 </a:solidFill>
@@ -4222,14 +4836,50 @@
       </p:sp>
       <p:sp>
         <p:nvSpPr>
-          <p:cNvPr id="5" name="Rounded Rectangle 4"/>
+          <p:cNvPr id="8" name="TextBox 7"/>
+          <p:cNvSpPr txBox="1"/>
+          <p:nvPr/>
+        </p:nvSpPr>
+        <p:spPr>
+          <a:xfrm>
+            <a:off x="731520" y="6510528"/>
+            <a:ext cx="10698480" cy="274320"/>
+          </a:xfrm>
+          <a:prstGeom prst="rect">
+            <a:avLst/>
+          </a:prstGeom>
+          <a:noFill/>
+        </p:spPr>
+        <p:txBody>
+          <a:bodyPr wrap="none">
+            <a:spAutoFit/>
+          </a:bodyPr>
+          <a:lstStyle/>
+          <a:p>
+            <a:pPr>
+              <a:defRPr sz="1050">
+                <a:solidFill>
+                  <a:srgbClr val="64748B"/>
+                </a:solidFill>
+                <a:latin typeface="微軟正黑體"/>
+              </a:defRPr>
+            </a:pPr>
+            <a:r>
+              <a:t>🌐 互動課程網頁：https://stjedu.github.io/www/yolo_webcam_course.html   |   主講：簡樹桐 老師</a:t>
+            </a:r>
+          </a:p>
+        </p:txBody>
+      </p:sp>
+      <p:sp>
+        <p:nvSpPr>
+          <p:cNvPr id="9" name="Rounded Rectangle 8"/>
           <p:cNvSpPr/>
           <p:nvPr/>
         </p:nvSpPr>
         <p:spPr>
           <a:xfrm>
-            <a:off x="731520" y="1371600"/>
-            <a:ext cx="5120640" cy="4937760"/>
+            <a:off x="731520" y="1325880"/>
+            <a:ext cx="5120640" cy="4983480"/>
           </a:xfrm>
           <a:prstGeom prst="roundRect">
             <a:avLst/>
@@ -4267,14 +4917,57 @@
       </p:sp>
       <p:sp>
         <p:nvSpPr>
-          <p:cNvPr id="6" name="TextBox 5"/>
+          <p:cNvPr id="10" name="Rounded Rectangle 9"/>
+          <p:cNvSpPr/>
+          <p:nvPr/>
+        </p:nvSpPr>
+        <p:spPr>
+          <a:xfrm>
+            <a:off x="731520" y="1325880"/>
+            <a:ext cx="5120640" cy="91440"/>
+          </a:xfrm>
+          <a:prstGeom prst="roundRect">
+            <a:avLst/>
+          </a:prstGeom>
+          <a:solidFill>
+            <a:srgbClr val="008CA0"/>
+          </a:solidFill>
+          <a:ln>
+            <a:noFill/>
+          </a:ln>
+        </p:spPr>
+        <p:style>
+          <a:lnRef idx="1">
+            <a:schemeClr val="accent1"/>
+          </a:lnRef>
+          <a:fillRef idx="3">
+            <a:schemeClr val="accent1"/>
+          </a:fillRef>
+          <a:effectRef idx="2">
+            <a:schemeClr val="accent1"/>
+          </a:effectRef>
+          <a:fontRef idx="minor">
+            <a:schemeClr val="lt1"/>
+          </a:fontRef>
+        </p:style>
+        <p:txBody>
+          <a:bodyPr rtlCol="0" anchor="ctr"/>
+          <a:lstStyle/>
+          <a:p>
+            <a:pPr algn="ctr"/>
+          </a:p>
+        </p:txBody>
+      </p:sp>
+      <p:sp>
+        <p:nvSpPr>
+          <p:cNvPr id="11" name="TextBox 10"/>
           <p:cNvSpPr txBox="1"/>
           <p:nvPr/>
         </p:nvSpPr>
         <p:spPr>
           <a:xfrm>
-            <a:off x="914400" y="1508760"/>
-            <a:ext cx="4754880" cy="4663440"/>
+            <a:off x="960120" y="1508760"/>
+            <a:ext cx="4663440" cy="4663440"/>
           </a:xfrm>
           <a:prstGeom prst="rect">
             <a:avLst/>
@@ -4291,7 +4984,7 @@
               <a:spcAft>
                 <a:spcPts val="1000"/>
               </a:spcAft>
-              <a:defRPr sz="1600" b="1">
+              <a:defRPr sz="1750" b="1">
                 <a:solidFill>
                   <a:srgbClr val="14233C"/>
                 </a:solidFill>
@@ -4304,12 +4997,15 @@
           </a:p>
           <a:p>
             <a:pPr>
+              <a:lnSpc>
+                <a:spcPct val="125000"/>
+              </a:lnSpc>
               <a:spcAft>
-                <a:spcPts val="600"/>
+                <a:spcPts val="700"/>
               </a:spcAft>
             </a:pPr>
             <a:r>
-              <a:rPr b="1" sz="1300">
+              <a:rPr b="1" sz="1350">
                 <a:solidFill>
                   <a:srgbClr val="1E293B"/>
                 </a:solidFill>
@@ -4318,7 +5014,7 @@
               <a:t>1. 功能完整性 (40%)： </a:t>
             </a:r>
             <a:r>
-              <a:rPr b="0" sz="1300">
+              <a:rPr b="0" sz="1350">
                 <a:solidFill>
                   <a:srgbClr val="64748B"/>
                 </a:solidFill>
@@ -4329,12 +5025,15 @@
           </a:p>
           <a:p>
             <a:pPr>
+              <a:lnSpc>
+                <a:spcPct val="125000"/>
+              </a:lnSpc>
               <a:spcAft>
-                <a:spcPts val="600"/>
+                <a:spcPts val="700"/>
               </a:spcAft>
             </a:pPr>
             <a:r>
-              <a:rPr b="1" sz="1300">
+              <a:rPr b="1" sz="1350">
                 <a:solidFill>
                   <a:srgbClr val="1E293B"/>
                 </a:solidFill>
@@ -4343,7 +5042,7 @@
               <a:t>2. 程式抗崩潰度 (20%)： </a:t>
             </a:r>
             <a:r>
-              <a:rPr b="0" sz="1300">
+              <a:rPr b="0" sz="1350">
                 <a:solidFill>
                   <a:srgbClr val="64748B"/>
                 </a:solidFill>
@@ -4354,12 +5053,15 @@
           </a:p>
           <a:p>
             <a:pPr>
+              <a:lnSpc>
+                <a:spcPct val="125000"/>
+              </a:lnSpc>
               <a:spcAft>
-                <a:spcPts val="600"/>
+                <a:spcPts val="700"/>
               </a:spcAft>
             </a:pPr>
             <a:r>
-              <a:rPr b="1" sz="1300">
+              <a:rPr b="1" sz="1350">
                 <a:solidFill>
                   <a:srgbClr val="1E293B"/>
                 </a:solidFill>
@@ -4368,7 +5070,7 @@
               <a:t>3. Prompt 工程素養 (20%)： </a:t>
             </a:r>
             <a:r>
-              <a:rPr b="0" sz="1300">
+              <a:rPr b="0" sz="1350">
                 <a:solidFill>
                   <a:srgbClr val="64748B"/>
                 </a:solidFill>
@@ -4379,12 +5081,15 @@
           </a:p>
           <a:p>
             <a:pPr>
+              <a:lnSpc>
+                <a:spcPct val="125000"/>
+              </a:lnSpc>
               <a:spcAft>
-                <a:spcPts val="600"/>
+                <a:spcPts val="700"/>
               </a:spcAft>
             </a:pPr>
             <a:r>
-              <a:rPr b="1" sz="1300">
+              <a:rPr b="1" sz="1350">
                 <a:solidFill>
                   <a:srgbClr val="1E293B"/>
                 </a:solidFill>
@@ -4393,7 +5098,7 @@
               <a:t>4. 畫面互動體驗 (20%)： </a:t>
             </a:r>
             <a:r>
-              <a:rPr b="0" sz="1300">
+              <a:rPr b="0" sz="1350">
                 <a:solidFill>
                   <a:srgbClr val="64748B"/>
                 </a:solidFill>
@@ -4406,14 +5111,14 @@
       </p:sp>
       <p:sp>
         <p:nvSpPr>
-          <p:cNvPr id="7" name="Rounded Rectangle 6"/>
+          <p:cNvPr id="12" name="Rounded Rectangle 11"/>
           <p:cNvSpPr/>
           <p:nvPr/>
         </p:nvSpPr>
         <p:spPr>
           <a:xfrm>
-            <a:off x="6309360" y="1371600"/>
-            <a:ext cx="5120640" cy="4937760"/>
+            <a:off x="6309360" y="1325880"/>
+            <a:ext cx="5120640" cy="4983480"/>
           </a:xfrm>
           <a:prstGeom prst="roundRect">
             <a:avLst/>
@@ -4451,14 +5156,57 @@
       </p:sp>
       <p:sp>
         <p:nvSpPr>
-          <p:cNvPr id="8" name="TextBox 7"/>
+          <p:cNvPr id="13" name="Rounded Rectangle 12"/>
+          <p:cNvSpPr/>
+          <p:nvPr/>
+        </p:nvSpPr>
+        <p:spPr>
+          <a:xfrm>
+            <a:off x="6309360" y="1325880"/>
+            <a:ext cx="5120640" cy="91440"/>
+          </a:xfrm>
+          <a:prstGeom prst="roundRect">
+            <a:avLst/>
+          </a:prstGeom>
+          <a:solidFill>
+            <a:srgbClr val="EB6E28"/>
+          </a:solidFill>
+          <a:ln>
+            <a:noFill/>
+          </a:ln>
+        </p:spPr>
+        <p:style>
+          <a:lnRef idx="1">
+            <a:schemeClr val="accent1"/>
+          </a:lnRef>
+          <a:fillRef idx="3">
+            <a:schemeClr val="accent1"/>
+          </a:fillRef>
+          <a:effectRef idx="2">
+            <a:schemeClr val="accent1"/>
+          </a:effectRef>
+          <a:fontRef idx="minor">
+            <a:schemeClr val="lt1"/>
+          </a:fontRef>
+        </p:style>
+        <p:txBody>
+          <a:bodyPr rtlCol="0" anchor="ctr"/>
+          <a:lstStyle/>
+          <a:p>
+            <a:pPr algn="ctr"/>
+          </a:p>
+        </p:txBody>
+      </p:sp>
+      <p:sp>
+        <p:nvSpPr>
+          <p:cNvPr id="14" name="TextBox 13"/>
           <p:cNvSpPr txBox="1"/>
           <p:nvPr/>
         </p:nvSpPr>
         <p:spPr>
           <a:xfrm>
-            <a:off x="6492240" y="1508760"/>
-            <a:ext cx="4754880" cy="4663440"/>
+            <a:off x="6537960" y="1508760"/>
+            <a:ext cx="4663440" cy="4663440"/>
           </a:xfrm>
           <a:prstGeom prst="rect">
             <a:avLst/>
@@ -4475,7 +5223,7 @@
               <a:spcAft>
                 <a:spcPts val="1000"/>
               </a:spcAft>
-              <a:defRPr sz="1600" b="1">
+              <a:defRPr sz="1750" b="1">
                 <a:solidFill>
                   <a:srgbClr val="14233C"/>
                 </a:solidFill>
@@ -4488,12 +5236,15 @@
           </a:p>
           <a:p>
             <a:pPr>
+              <a:lnSpc>
+                <a:spcPct val="125000"/>
+              </a:lnSpc>
               <a:spcAft>
-                <a:spcPts val="600"/>
+                <a:spcPts val="700"/>
               </a:spcAft>
             </a:pPr>
             <a:r>
-              <a:rPr b="1" sz="1300">
+              <a:rPr b="1" sz="1350">
                 <a:solidFill>
                   <a:srgbClr val="1E293B"/>
                 </a:solidFill>
@@ -4502,7 +5253,7 @@
               <a:t>攝影機絕對要架固定架： </a:t>
             </a:r>
             <a:r>
-              <a:rPr b="0" sz="1300">
+              <a:rPr b="0" sz="1350">
                 <a:solidFill>
                   <a:srgbClr val="64748B"/>
                 </a:solidFill>
@@ -4513,12 +5264,15 @@
           </a:p>
           <a:p>
             <a:pPr>
+              <a:lnSpc>
+                <a:spcPct val="125000"/>
+              </a:lnSpc>
               <a:spcAft>
-                <a:spcPts val="600"/>
+                <a:spcPts val="700"/>
               </a:spcAft>
             </a:pPr>
             <a:r>
-              <a:rPr b="1" sz="1300">
+              <a:rPr b="1" sz="1350">
                 <a:solidFill>
                   <a:srgbClr val="1E293B"/>
                 </a:solidFill>
@@ -4527,7 +5281,7 @@
               <a:t>距離與視野掌控： </a:t>
             </a:r>
             <a:r>
-              <a:rPr b="0" sz="1300">
+              <a:rPr b="0" sz="1350">
                 <a:solidFill>
                   <a:srgbClr val="64748B"/>
                 </a:solidFill>
@@ -4538,12 +5292,15 @@
           </a:p>
           <a:p>
             <a:pPr>
+              <a:lnSpc>
+                <a:spcPct val="125000"/>
+              </a:lnSpc>
               <a:spcAft>
-                <a:spcPts val="600"/>
+                <a:spcPts val="700"/>
               </a:spcAft>
             </a:pPr>
             <a:r>
-              <a:rPr b="1" sz="1300">
+              <a:rPr b="1" sz="1350">
                 <a:solidFill>
                   <a:srgbClr val="1E293B"/>
                 </a:solidFill>
@@ -4552,7 +5309,7 @@
               <a:t>防連拍機制 (Cooldown)： </a:t>
             </a:r>
             <a:r>
-              <a:rPr b="0" sz="1300">
+              <a:rPr b="0" sz="1350">
                 <a:solidFill>
                   <a:srgbClr val="64748B"/>
                 </a:solidFill>
@@ -4563,12 +5320,15 @@
           </a:p>
           <a:p>
             <a:pPr>
+              <a:lnSpc>
+                <a:spcPct val="125000"/>
+              </a:lnSpc>
               <a:spcAft>
-                <a:spcPts val="600"/>
+                <a:spcPts val="700"/>
               </a:spcAft>
             </a:pPr>
             <a:r>
-              <a:rPr b="1" sz="1300">
+              <a:rPr b="1" sz="1350">
                 <a:solidFill>
                   <a:srgbClr val="1E293B"/>
                 </a:solidFill>
@@ -4577,7 +5337,7 @@
               <a:t>USB 頻寬與接口： </a:t>
             </a:r>
             <a:r>
-              <a:rPr b="0" sz="1300">
+              <a:rPr b="0" sz="1350">
                 <a:solidFill>
                   <a:srgbClr val="64748B"/>
                 </a:solidFill>
@@ -4593,6 +5353,9 @@
   <p:clrMapOvr>
     <a:masterClrMapping/>
   </p:clrMapOvr>
+  <p:transition spd="med">
+    <p:fade/>
+  </p:transition>
 </p:sld>
 </file>
 
@@ -4615,18 +5378,16 @@
         <p:spPr>
           <a:xfrm>
             <a:off x="0" y="0"/>
-            <a:ext cx="12191695" cy="1005840"/>
+            <a:ext cx="12191695" cy="6858000"/>
           </a:xfrm>
           <a:prstGeom prst="rect">
             <a:avLst/>
           </a:prstGeom>
           <a:solidFill>
-            <a:srgbClr val="14233C"/>
+            <a:srgbClr val="F8FAFC"/>
           </a:solidFill>
           <a:ln>
-            <a:solidFill>
-              <a:srgbClr val="14233C"/>
-            </a:solidFill>
+            <a:noFill/>
           </a:ln>
         </p:spPr>
         <p:style>
@@ -4653,14 +5414,100 @@
       </p:sp>
       <p:sp>
         <p:nvSpPr>
-          <p:cNvPr id="3" name="TextBox 2"/>
+          <p:cNvPr id="3" name="Rectangle 2"/>
+          <p:cNvSpPr/>
+          <p:nvPr/>
+        </p:nvSpPr>
+        <p:spPr>
+          <a:xfrm>
+            <a:off x="0" y="0"/>
+            <a:ext cx="12191695" cy="1051560"/>
+          </a:xfrm>
+          <a:prstGeom prst="rect">
+            <a:avLst/>
+          </a:prstGeom>
+          <a:solidFill>
+            <a:srgbClr val="14233C"/>
+          </a:solidFill>
+          <a:ln>
+            <a:noFill/>
+          </a:ln>
+        </p:spPr>
+        <p:style>
+          <a:lnRef idx="1">
+            <a:schemeClr val="accent1"/>
+          </a:lnRef>
+          <a:fillRef idx="3">
+            <a:schemeClr val="accent1"/>
+          </a:fillRef>
+          <a:effectRef idx="2">
+            <a:schemeClr val="accent1"/>
+          </a:effectRef>
+          <a:fontRef idx="minor">
+            <a:schemeClr val="lt1"/>
+          </a:fontRef>
+        </p:style>
+        <p:txBody>
+          <a:bodyPr rtlCol="0" anchor="ctr"/>
+          <a:lstStyle/>
+          <a:p>
+            <a:pPr algn="ctr"/>
+          </a:p>
+        </p:txBody>
+      </p:sp>
+      <p:sp>
+        <p:nvSpPr>
+          <p:cNvPr id="4" name="Rectangle 3"/>
+          <p:cNvSpPr/>
+          <p:nvPr/>
+        </p:nvSpPr>
+        <p:spPr>
+          <a:xfrm>
+            <a:off x="0" y="1051560"/>
+            <a:ext cx="4114800" cy="45720"/>
+          </a:xfrm>
+          <a:prstGeom prst="rect">
+            <a:avLst/>
+          </a:prstGeom>
+          <a:solidFill>
+            <a:srgbClr val="008CA0"/>
+          </a:solidFill>
+          <a:ln>
+            <a:noFill/>
+          </a:ln>
+        </p:spPr>
+        <p:style>
+          <a:lnRef idx="1">
+            <a:schemeClr val="accent1"/>
+          </a:lnRef>
+          <a:fillRef idx="3">
+            <a:schemeClr val="accent1"/>
+          </a:fillRef>
+          <a:effectRef idx="2">
+            <a:schemeClr val="accent1"/>
+          </a:effectRef>
+          <a:fontRef idx="minor">
+            <a:schemeClr val="lt1"/>
+          </a:fontRef>
+        </p:style>
+        <p:txBody>
+          <a:bodyPr rtlCol="0" anchor="ctr"/>
+          <a:lstStyle/>
+          <a:p>
+            <a:pPr algn="ctr"/>
+          </a:p>
+        </p:txBody>
+      </p:sp>
+      <p:sp>
+        <p:nvSpPr>
+          <p:cNvPr id="5" name="TextBox 4"/>
           <p:cNvSpPr txBox="1"/>
           <p:nvPr/>
         </p:nvSpPr>
         <p:spPr>
           <a:xfrm>
             <a:off x="731520" y="109728"/>
-            <a:ext cx="10698480" cy="274320"/>
+            <a:ext cx="7772400" cy="274320"/>
           </a:xfrm>
           <a:prstGeom prst="rect">
             <a:avLst/>
@@ -4674,7 +5521,7 @@
           <a:lstStyle/>
           <a:p>
             <a:pPr>
-              <a:defRPr sz="1100" b="1">
+              <a:defRPr sz="1150" b="1">
                 <a:solidFill>
                   <a:srgbClr val="008CA0"/>
                 </a:solidFill>
@@ -4682,20 +5529,56 @@
               </a:defRPr>
             </a:pPr>
             <a:r>
-              <a:t>專題製作與教師研習課程</a:t>
-            </a:r>
-          </a:p>
-        </p:txBody>
-      </p:sp>
-      <p:sp>
-        <p:nvSpPr>
-          <p:cNvPr id="4" name="TextBox 3"/>
+              <a:t>📷 WEBCAM AI 視覺與 YOLO 專題實作課程</a:t>
+            </a:r>
+          </a:p>
+        </p:txBody>
+      </p:sp>
+      <p:sp>
+        <p:nvSpPr>
+          <p:cNvPr id="6" name="TextBox 5"/>
           <p:cNvSpPr txBox="1"/>
           <p:nvPr/>
         </p:nvSpPr>
         <p:spPr>
           <a:xfrm>
-            <a:off x="731520" y="320040"/>
+            <a:off x="9144000" y="109728"/>
+            <a:ext cx="2286000" cy="274320"/>
+          </a:xfrm>
+          <a:prstGeom prst="rect">
+            <a:avLst/>
+          </a:prstGeom>
+          <a:noFill/>
+        </p:spPr>
+        <p:txBody>
+          <a:bodyPr wrap="none">
+            <a:spAutoFit/>
+          </a:bodyPr>
+          <a:lstStyle/>
+          <a:p>
+            <a:pPr algn="r">
+              <a:defRPr sz="1200" b="1">
+                <a:solidFill>
+                  <a:srgbClr val="B4C8E1"/>
+                </a:solidFill>
+                <a:latin typeface="微軟正黑體"/>
+              </a:defRPr>
+            </a:pPr>
+            <a:r>
+              <a:t>第 13 / 14 頁</a:t>
+            </a:r>
+          </a:p>
+        </p:txBody>
+      </p:sp>
+      <p:sp>
+        <p:nvSpPr>
+          <p:cNvPr id="7" name="TextBox 6"/>
+          <p:cNvSpPr txBox="1"/>
+          <p:nvPr/>
+        </p:nvSpPr>
+        <p:spPr>
+          <a:xfrm>
+            <a:off x="731520" y="365760"/>
             <a:ext cx="10698480" cy="594360"/>
           </a:xfrm>
           <a:prstGeom prst="rect">
@@ -4710,7 +5593,7 @@
           <a:lstStyle/>
           <a:p>
             <a:pPr>
-              <a:defRPr sz="2200" b="1">
+              <a:defRPr sz="2400" b="1">
                 <a:solidFill>
                   <a:srgbClr val="FFFFFF"/>
                 </a:solidFill>
@@ -4725,14 +5608,50 @@
       </p:sp>
       <p:sp>
         <p:nvSpPr>
-          <p:cNvPr id="5" name="Rounded Rectangle 4"/>
+          <p:cNvPr id="8" name="TextBox 7"/>
+          <p:cNvSpPr txBox="1"/>
+          <p:nvPr/>
+        </p:nvSpPr>
+        <p:spPr>
+          <a:xfrm>
+            <a:off x="731520" y="6510528"/>
+            <a:ext cx="10698480" cy="274320"/>
+          </a:xfrm>
+          <a:prstGeom prst="rect">
+            <a:avLst/>
+          </a:prstGeom>
+          <a:noFill/>
+        </p:spPr>
+        <p:txBody>
+          <a:bodyPr wrap="none">
+            <a:spAutoFit/>
+          </a:bodyPr>
+          <a:lstStyle/>
+          <a:p>
+            <a:pPr>
+              <a:defRPr sz="1050">
+                <a:solidFill>
+                  <a:srgbClr val="64748B"/>
+                </a:solidFill>
+                <a:latin typeface="微軟正黑體"/>
+              </a:defRPr>
+            </a:pPr>
+            <a:r>
+              <a:t>🌐 互動課程網頁：https://stjedu.github.io/www/yolo_webcam_course.html   |   主講：簡樹桐 老師</a:t>
+            </a:r>
+          </a:p>
+        </p:txBody>
+      </p:sp>
+      <p:sp>
+        <p:nvSpPr>
+          <p:cNvPr id="9" name="Rounded Rectangle 8"/>
           <p:cNvSpPr/>
           <p:nvPr/>
         </p:nvSpPr>
         <p:spPr>
           <a:xfrm>
-            <a:off x="731520" y="1371600"/>
-            <a:ext cx="10698480" cy="4937760"/>
+            <a:off x="731520" y="1325880"/>
+            <a:ext cx="10698480" cy="4983480"/>
           </a:xfrm>
           <a:prstGeom prst="roundRect">
             <a:avLst/>
@@ -4770,14 +5689,57 @@
       </p:sp>
       <p:sp>
         <p:nvSpPr>
-          <p:cNvPr id="6" name="TextBox 5"/>
+          <p:cNvPr id="10" name="Rounded Rectangle 9"/>
+          <p:cNvSpPr/>
+          <p:nvPr/>
+        </p:nvSpPr>
+        <p:spPr>
+          <a:xfrm>
+            <a:off x="731520" y="1325880"/>
+            <a:ext cx="10698480" cy="91440"/>
+          </a:xfrm>
+          <a:prstGeom prst="roundRect">
+            <a:avLst/>
+          </a:prstGeom>
+          <a:solidFill>
+            <a:srgbClr val="008CA0"/>
+          </a:solidFill>
+          <a:ln>
+            <a:noFill/>
+          </a:ln>
+        </p:spPr>
+        <p:style>
+          <a:lnRef idx="1">
+            <a:schemeClr val="accent1"/>
+          </a:lnRef>
+          <a:fillRef idx="3">
+            <a:schemeClr val="accent1"/>
+          </a:fillRef>
+          <a:effectRef idx="2">
+            <a:schemeClr val="accent1"/>
+          </a:effectRef>
+          <a:fontRef idx="minor">
+            <a:schemeClr val="lt1"/>
+          </a:fontRef>
+        </p:style>
+        <p:txBody>
+          <a:bodyPr rtlCol="0" anchor="ctr"/>
+          <a:lstStyle/>
+          <a:p>
+            <a:pPr algn="ctr"/>
+          </a:p>
+        </p:txBody>
+      </p:sp>
+      <p:sp>
+        <p:nvSpPr>
+          <p:cNvPr id="11" name="TextBox 10"/>
           <p:cNvSpPr txBox="1"/>
           <p:nvPr/>
         </p:nvSpPr>
         <p:spPr>
           <a:xfrm>
-            <a:off x="914400" y="1508760"/>
-            <a:ext cx="10332720" cy="4663440"/>
+            <a:off x="960120" y="1508760"/>
+            <a:ext cx="10241280" cy="4663440"/>
           </a:xfrm>
           <a:prstGeom prst="rect">
             <a:avLst/>
@@ -4794,7 +5756,7 @@
               <a:spcAft>
                 <a:spcPts val="1000"/>
               </a:spcAft>
-              <a:defRPr sz="1600" b="1">
+              <a:defRPr sz="1750" b="1">
                 <a:solidFill>
                   <a:srgbClr val="14233C"/>
                 </a:solidFill>
@@ -4807,12 +5769,15 @@
           </a:p>
           <a:p>
             <a:pPr>
+              <a:lnSpc>
+                <a:spcPct val="125000"/>
+              </a:lnSpc>
               <a:spcAft>
-                <a:spcPts val="600"/>
+                <a:spcPts val="700"/>
               </a:spcAft>
             </a:pPr>
             <a:r>
-              <a:rPr b="1" sz="1300">
+              <a:rPr b="1" sz="1350">
                 <a:solidFill>
                   <a:srgbClr val="1E293B"/>
                 </a:solidFill>
@@ -4821,7 +5786,7 @@
               <a:t>階段一【起手式】： </a:t>
             </a:r>
             <a:r>
-              <a:rPr b="0" sz="1300">
+              <a:rPr b="0" sz="1350">
                 <a:solidFill>
                   <a:srgbClr val="64748B"/>
                 </a:solidFill>
@@ -4832,12 +5797,15 @@
           </a:p>
           <a:p>
             <a:pPr>
+              <a:lnSpc>
+                <a:spcPct val="125000"/>
+              </a:lnSpc>
               <a:spcAft>
-                <a:spcPts val="600"/>
+                <a:spcPts val="700"/>
               </a:spcAft>
             </a:pPr>
             <a:r>
-              <a:rPr b="1" sz="1300">
+              <a:rPr b="1" sz="1350">
                 <a:solidFill>
                   <a:srgbClr val="1E293B"/>
                 </a:solidFill>
@@ -4846,7 +5814,7 @@
               <a:t>階段二【防變形與品質】： </a:t>
             </a:r>
             <a:r>
-              <a:rPr b="0" sz="1300">
+              <a:rPr b="0" sz="1350">
                 <a:solidFill>
                   <a:srgbClr val="64748B"/>
                 </a:solidFill>
@@ -4857,12 +5825,15 @@
           </a:p>
           <a:p>
             <a:pPr>
+              <a:lnSpc>
+                <a:spcPct val="125000"/>
+              </a:lnSpc>
               <a:spcAft>
-                <a:spcPts val="600"/>
+                <a:spcPts val="700"/>
               </a:spcAft>
             </a:pPr>
             <a:r>
-              <a:rPr b="1" sz="1300">
+              <a:rPr b="1" sz="1350">
                 <a:solidFill>
                   <a:srgbClr val="1E293B"/>
                 </a:solidFill>
@@ -4871,7 +5842,7 @@
               <a:t>階段三【多分割與效能】： </a:t>
             </a:r>
             <a:r>
-              <a:rPr b="0" sz="1300">
+              <a:rPr b="0" sz="1350">
                 <a:solidFill>
                   <a:srgbClr val="64748B"/>
                 </a:solidFill>
@@ -4882,12 +5853,15 @@
           </a:p>
           <a:p>
             <a:pPr>
+              <a:lnSpc>
+                <a:spcPct val="125000"/>
+              </a:lnSpc>
               <a:spcAft>
-                <a:spcPts val="600"/>
+                <a:spcPts val="700"/>
               </a:spcAft>
             </a:pPr>
             <a:r>
-              <a:rPr b="1" sz="1300">
+              <a:rPr b="1" sz="1350">
                 <a:solidFill>
                   <a:srgbClr val="1E293B"/>
                 </a:solidFill>
@@ -4896,7 +5870,7 @@
               <a:t>階段四【AI 智慧辨識】： </a:t>
             </a:r>
             <a:r>
-              <a:rPr b="0" sz="1300">
+              <a:rPr b="0" sz="1350">
                 <a:solidFill>
                   <a:srgbClr val="64748B"/>
                 </a:solidFill>
@@ -4907,12 +5881,15 @@
           </a:p>
           <a:p>
             <a:pPr>
+              <a:lnSpc>
+                <a:spcPct val="125000"/>
+              </a:lnSpc>
               <a:spcAft>
-                <a:spcPts val="600"/>
+                <a:spcPts val="700"/>
               </a:spcAft>
             </a:pPr>
             <a:r>
-              <a:rPr b="1" sz="1300">
+              <a:rPr b="1" sz="1350">
                 <a:solidFill>
                   <a:srgbClr val="1E293B"/>
                 </a:solidFill>
@@ -4921,7 +5898,7 @@
               <a:t>通用【自動修復黃金指令】： </a:t>
             </a:r>
             <a:r>
-              <a:rPr b="0" sz="1300">
+              <a:rPr b="0" sz="1350">
                 <a:solidFill>
                   <a:srgbClr val="64748B"/>
                 </a:solidFill>
@@ -4937,6 +5914,9 @@
   <p:clrMapOvr>
     <a:masterClrMapping/>
   </p:clrMapOvr>
+  <p:transition spd="med">
+    <p:fade/>
+  </p:transition>
 </p:sld>
 </file>
 
@@ -4968,9 +5948,7 @@
             <a:srgbClr val="14233C"/>
           </a:solidFill>
           <a:ln>
-            <a:solidFill>
-              <a:srgbClr val="14233C"/>
-            </a:solidFill>
+            <a:noFill/>
           </a:ln>
         </p:spPr>
         <p:style>
@@ -5004,7 +5982,7 @@
         <p:spPr>
           <a:xfrm>
             <a:off x="1371600" y="1645920"/>
-            <a:ext cx="9418320" cy="3657600"/>
+            <a:ext cx="9418320" cy="3840480"/>
           </a:xfrm>
           <a:prstGeom prst="rect">
             <a:avLst/>
@@ -5021,7 +5999,7 @@
               <a:spcAft>
                 <a:spcPts val="2000"/>
               </a:spcAft>
-              <a:defRPr sz="2800" b="1">
+              <a:defRPr sz="3000" b="1">
                 <a:solidFill>
                   <a:srgbClr val="FFFFFF"/>
                 </a:solidFill>
@@ -5034,10 +6012,13 @@
           </a:p>
           <a:p>
             <a:pPr>
+              <a:lnSpc>
+                <a:spcPct val="135000"/>
+              </a:lnSpc>
               <a:spcAft>
                 <a:spcPts val="3000"/>
               </a:spcAft>
-              <a:defRPr sz="1600">
+              <a:defRPr sz="1700">
                 <a:solidFill>
                   <a:srgbClr val="008CA0"/>
                 </a:solidFill>
@@ -5058,7 +6039,7 @@
           </a:p>
           <a:p>
             <a:pPr>
-              <a:defRPr sz="1400" i="1">
+              <a:defRPr sz="1500" b="1">
                 <a:solidFill>
                   <a:srgbClr val="F5B400"/>
                 </a:solidFill>
@@ -5066,7 +6047,7 @@
               </a:defRPr>
             </a:pPr>
             <a:r>
-              <a:t>💡 完整課程講義 Markdown 檔案已同步生成於本資料夾，可直接匯出列印或提供學生下載！</a:t>
+              <a:t>🌐 線上課程與可複製 Prompt 講義：https://stjedu.github.io/www/yolo_webcam_course.html</a:t>
             </a:r>
           </a:p>
         </p:txBody>
@@ -5076,6 +6057,9 @@
   <p:clrMapOvr>
     <a:masterClrMapping/>
   </p:clrMapOvr>
+  <p:transition spd="med">
+    <p:fade/>
+  </p:transition>
 </p:sld>
 </file>
 
@@ -5098,18 +6082,16 @@
         <p:spPr>
           <a:xfrm>
             <a:off x="0" y="0"/>
-            <a:ext cx="12191695" cy="1005840"/>
+            <a:ext cx="12191695" cy="6858000"/>
           </a:xfrm>
           <a:prstGeom prst="rect">
             <a:avLst/>
           </a:prstGeom>
           <a:solidFill>
-            <a:srgbClr val="14233C"/>
+            <a:srgbClr val="F8FAFC"/>
           </a:solidFill>
           <a:ln>
-            <a:solidFill>
-              <a:srgbClr val="14233C"/>
-            </a:solidFill>
+            <a:noFill/>
           </a:ln>
         </p:spPr>
         <p:style>
@@ -5136,14 +6118,100 @@
       </p:sp>
       <p:sp>
         <p:nvSpPr>
-          <p:cNvPr id="3" name="TextBox 2"/>
+          <p:cNvPr id="3" name="Rectangle 2"/>
+          <p:cNvSpPr/>
+          <p:nvPr/>
+        </p:nvSpPr>
+        <p:spPr>
+          <a:xfrm>
+            <a:off x="0" y="0"/>
+            <a:ext cx="12191695" cy="1051560"/>
+          </a:xfrm>
+          <a:prstGeom prst="rect">
+            <a:avLst/>
+          </a:prstGeom>
+          <a:solidFill>
+            <a:srgbClr val="14233C"/>
+          </a:solidFill>
+          <a:ln>
+            <a:noFill/>
+          </a:ln>
+        </p:spPr>
+        <p:style>
+          <a:lnRef idx="1">
+            <a:schemeClr val="accent1"/>
+          </a:lnRef>
+          <a:fillRef idx="3">
+            <a:schemeClr val="accent1"/>
+          </a:fillRef>
+          <a:effectRef idx="2">
+            <a:schemeClr val="accent1"/>
+          </a:effectRef>
+          <a:fontRef idx="minor">
+            <a:schemeClr val="lt1"/>
+          </a:fontRef>
+        </p:style>
+        <p:txBody>
+          <a:bodyPr rtlCol="0" anchor="ctr"/>
+          <a:lstStyle/>
+          <a:p>
+            <a:pPr algn="ctr"/>
+          </a:p>
+        </p:txBody>
+      </p:sp>
+      <p:sp>
+        <p:nvSpPr>
+          <p:cNvPr id="4" name="Rectangle 3"/>
+          <p:cNvSpPr/>
+          <p:nvPr/>
+        </p:nvSpPr>
+        <p:spPr>
+          <a:xfrm>
+            <a:off x="0" y="1051560"/>
+            <a:ext cx="4114800" cy="45720"/>
+          </a:xfrm>
+          <a:prstGeom prst="rect">
+            <a:avLst/>
+          </a:prstGeom>
+          <a:solidFill>
+            <a:srgbClr val="008CA0"/>
+          </a:solidFill>
+          <a:ln>
+            <a:noFill/>
+          </a:ln>
+        </p:spPr>
+        <p:style>
+          <a:lnRef idx="1">
+            <a:schemeClr val="accent1"/>
+          </a:lnRef>
+          <a:fillRef idx="3">
+            <a:schemeClr val="accent1"/>
+          </a:fillRef>
+          <a:effectRef idx="2">
+            <a:schemeClr val="accent1"/>
+          </a:effectRef>
+          <a:fontRef idx="minor">
+            <a:schemeClr val="lt1"/>
+          </a:fontRef>
+        </p:style>
+        <p:txBody>
+          <a:bodyPr rtlCol="0" anchor="ctr"/>
+          <a:lstStyle/>
+          <a:p>
+            <a:pPr algn="ctr"/>
+          </a:p>
+        </p:txBody>
+      </p:sp>
+      <p:sp>
+        <p:nvSpPr>
+          <p:cNvPr id="5" name="TextBox 4"/>
           <p:cNvSpPr txBox="1"/>
           <p:nvPr/>
         </p:nvSpPr>
         <p:spPr>
           <a:xfrm>
             <a:off x="731520" y="109728"/>
-            <a:ext cx="10698480" cy="274320"/>
+            <a:ext cx="7772400" cy="274320"/>
           </a:xfrm>
           <a:prstGeom prst="rect">
             <a:avLst/>
@@ -5157,7 +6225,7 @@
           <a:lstStyle/>
           <a:p>
             <a:pPr>
-              <a:defRPr sz="1100" b="1">
+              <a:defRPr sz="1150" b="1">
                 <a:solidFill>
                   <a:srgbClr val="008CA0"/>
                 </a:solidFill>
@@ -5165,20 +6233,56 @@
               </a:defRPr>
             </a:pPr>
             <a:r>
-              <a:t>專題製作與教師研習課程</a:t>
-            </a:r>
-          </a:p>
-        </p:txBody>
-      </p:sp>
-      <p:sp>
-        <p:nvSpPr>
-          <p:cNvPr id="4" name="TextBox 3"/>
+              <a:t>📷 WEBCAM AI 視覺與 YOLO 專題實作課程</a:t>
+            </a:r>
+          </a:p>
+        </p:txBody>
+      </p:sp>
+      <p:sp>
+        <p:nvSpPr>
+          <p:cNvPr id="6" name="TextBox 5"/>
           <p:cNvSpPr txBox="1"/>
           <p:nvPr/>
         </p:nvSpPr>
         <p:spPr>
           <a:xfrm>
-            <a:off x="731520" y="320040"/>
+            <a:off x="9144000" y="109728"/>
+            <a:ext cx="2286000" cy="274320"/>
+          </a:xfrm>
+          <a:prstGeom prst="rect">
+            <a:avLst/>
+          </a:prstGeom>
+          <a:noFill/>
+        </p:spPr>
+        <p:txBody>
+          <a:bodyPr wrap="none">
+            <a:spAutoFit/>
+          </a:bodyPr>
+          <a:lstStyle/>
+          <a:p>
+            <a:pPr algn="r">
+              <a:defRPr sz="1200" b="1">
+                <a:solidFill>
+                  <a:srgbClr val="B4C8E1"/>
+                </a:solidFill>
+                <a:latin typeface="微軟正黑體"/>
+              </a:defRPr>
+            </a:pPr>
+            <a:r>
+              <a:t>第 02 / 14 頁</a:t>
+            </a:r>
+          </a:p>
+        </p:txBody>
+      </p:sp>
+      <p:sp>
+        <p:nvSpPr>
+          <p:cNvPr id="7" name="TextBox 6"/>
+          <p:cNvSpPr txBox="1"/>
+          <p:nvPr/>
+        </p:nvSpPr>
+        <p:spPr>
+          <a:xfrm>
+            <a:off x="731520" y="365760"/>
             <a:ext cx="10698480" cy="594360"/>
           </a:xfrm>
           <a:prstGeom prst="rect">
@@ -5193,7 +6297,7 @@
           <a:lstStyle/>
           <a:p>
             <a:pPr>
-              <a:defRPr sz="2200" b="1">
+              <a:defRPr sz="2400" b="1">
                 <a:solidFill>
                   <a:srgbClr val="FFFFFF"/>
                 </a:solidFill>
@@ -5208,14 +6312,50 @@
       </p:sp>
       <p:sp>
         <p:nvSpPr>
-          <p:cNvPr id="5" name="Rounded Rectangle 4"/>
+          <p:cNvPr id="8" name="TextBox 7"/>
+          <p:cNvSpPr txBox="1"/>
+          <p:nvPr/>
+        </p:nvSpPr>
+        <p:spPr>
+          <a:xfrm>
+            <a:off x="731520" y="6510528"/>
+            <a:ext cx="10698480" cy="274320"/>
+          </a:xfrm>
+          <a:prstGeom prst="rect">
+            <a:avLst/>
+          </a:prstGeom>
+          <a:noFill/>
+        </p:spPr>
+        <p:txBody>
+          <a:bodyPr wrap="none">
+            <a:spAutoFit/>
+          </a:bodyPr>
+          <a:lstStyle/>
+          <a:p>
+            <a:pPr>
+              <a:defRPr sz="1050">
+                <a:solidFill>
+                  <a:srgbClr val="64748B"/>
+                </a:solidFill>
+                <a:latin typeface="微軟正黑體"/>
+              </a:defRPr>
+            </a:pPr>
+            <a:r>
+              <a:t>🌐 互動課程網頁：https://stjedu.github.io/www/yolo_webcam_course.html   |   主講：簡樹桐 老師</a:t>
+            </a:r>
+          </a:p>
+        </p:txBody>
+      </p:sp>
+      <p:sp>
+        <p:nvSpPr>
+          <p:cNvPr id="9" name="Rounded Rectangle 8"/>
           <p:cNvSpPr/>
           <p:nvPr/>
         </p:nvSpPr>
         <p:spPr>
           <a:xfrm>
-            <a:off x="731520" y="1371600"/>
-            <a:ext cx="5120640" cy="4937760"/>
+            <a:off x="731520" y="1325880"/>
+            <a:ext cx="5120640" cy="4983480"/>
           </a:xfrm>
           <a:prstGeom prst="roundRect">
             <a:avLst/>
@@ -5253,14 +6393,57 @@
       </p:sp>
       <p:sp>
         <p:nvSpPr>
-          <p:cNvPr id="6" name="TextBox 5"/>
+          <p:cNvPr id="10" name="Rounded Rectangle 9"/>
+          <p:cNvSpPr/>
+          <p:nvPr/>
+        </p:nvSpPr>
+        <p:spPr>
+          <a:xfrm>
+            <a:off x="731520" y="1325880"/>
+            <a:ext cx="5120640" cy="91440"/>
+          </a:xfrm>
+          <a:prstGeom prst="roundRect">
+            <a:avLst/>
+          </a:prstGeom>
+          <a:solidFill>
+            <a:srgbClr val="008CA0"/>
+          </a:solidFill>
+          <a:ln>
+            <a:noFill/>
+          </a:ln>
+        </p:spPr>
+        <p:style>
+          <a:lnRef idx="1">
+            <a:schemeClr val="accent1"/>
+          </a:lnRef>
+          <a:fillRef idx="3">
+            <a:schemeClr val="accent1"/>
+          </a:fillRef>
+          <a:effectRef idx="2">
+            <a:schemeClr val="accent1"/>
+          </a:effectRef>
+          <a:fontRef idx="minor">
+            <a:schemeClr val="lt1"/>
+          </a:fontRef>
+        </p:style>
+        <p:txBody>
+          <a:bodyPr rtlCol="0" anchor="ctr"/>
+          <a:lstStyle/>
+          <a:p>
+            <a:pPr algn="ctr"/>
+          </a:p>
+        </p:txBody>
+      </p:sp>
+      <p:sp>
+        <p:nvSpPr>
+          <p:cNvPr id="11" name="TextBox 10"/>
           <p:cNvSpPr txBox="1"/>
           <p:nvPr/>
         </p:nvSpPr>
         <p:spPr>
           <a:xfrm>
-            <a:off x="914400" y="1508760"/>
-            <a:ext cx="4754880" cy="4663440"/>
+            <a:off x="960120" y="1508760"/>
+            <a:ext cx="4663440" cy="4663440"/>
           </a:xfrm>
           <a:prstGeom prst="rect">
             <a:avLst/>
@@ -5277,7 +6460,7 @@
               <a:spcAft>
                 <a:spcPts val="1000"/>
               </a:spcAft>
-              <a:defRPr sz="1600" b="1">
+              <a:defRPr sz="1750" b="1">
                 <a:solidFill>
                   <a:srgbClr val="14233C"/>
                 </a:solidFill>
@@ -5290,12 +6473,15 @@
           </a:p>
           <a:p>
             <a:pPr>
+              <a:lnSpc>
+                <a:spcPct val="125000"/>
+              </a:lnSpc>
               <a:spcAft>
-                <a:spcPts val="600"/>
+                <a:spcPts val="700"/>
               </a:spcAft>
             </a:pPr>
             <a:r>
-              <a:rPr b="1" sz="1300">
+              <a:rPr b="1" sz="1350">
                 <a:solidFill>
                   <a:srgbClr val="1E293B"/>
                 </a:solidFill>
@@ -5304,7 +6490,7 @@
               <a:t>告別一行行刻語法： </a:t>
             </a:r>
             <a:r>
-              <a:rPr b="0" sz="1300">
+              <a:rPr b="0" sz="1350">
                 <a:solidFill>
                   <a:srgbClr val="64748B"/>
                 </a:solidFill>
@@ -5315,12 +6501,15 @@
           </a:p>
           <a:p>
             <a:pPr>
+              <a:lnSpc>
+                <a:spcPct val="125000"/>
+              </a:lnSpc>
               <a:spcAft>
-                <a:spcPts val="600"/>
+                <a:spcPts val="700"/>
               </a:spcAft>
             </a:pPr>
             <a:r>
-              <a:rPr b="1" sz="1300">
+              <a:rPr b="1" sz="1350">
                 <a:solidFill>
                   <a:srgbClr val="1E293B"/>
                 </a:solidFill>
@@ -5329,7 +6518,7 @@
               <a:t>提問與規格能力才是核心： </a:t>
             </a:r>
             <a:r>
-              <a:rPr b="0" sz="1300">
+              <a:rPr b="0" sz="1350">
                 <a:solidFill>
                   <a:srgbClr val="64748B"/>
                 </a:solidFill>
@@ -5340,12 +6529,15 @@
           </a:p>
           <a:p>
             <a:pPr>
+              <a:lnSpc>
+                <a:spcPct val="125000"/>
+              </a:lnSpc>
               <a:spcAft>
-                <a:spcPts val="600"/>
+                <a:spcPts val="700"/>
               </a:spcAft>
             </a:pPr>
             <a:r>
-              <a:rPr b="1" sz="1300">
+              <a:rPr b="1" sz="1350">
                 <a:solidFill>
                   <a:srgbClr val="1E293B"/>
                 </a:solidFill>
@@ -5354,7 +6546,7 @@
               <a:t>反覆對話與微調： </a:t>
             </a:r>
             <a:r>
-              <a:rPr b="0" sz="1300">
+              <a:rPr b="0" sz="1350">
                 <a:solidFill>
                   <a:srgbClr val="64748B"/>
                 </a:solidFill>
@@ -5365,12 +6557,15 @@
           </a:p>
           <a:p>
             <a:pPr>
+              <a:lnSpc>
+                <a:spcPct val="125000"/>
+              </a:lnSpc>
               <a:spcAft>
-                <a:spcPts val="600"/>
+                <a:spcPts val="700"/>
               </a:spcAft>
             </a:pPr>
             <a:r>
-              <a:rPr b="1" sz="1300">
+              <a:rPr b="1" sz="1350">
                 <a:solidFill>
                   <a:srgbClr val="1E293B"/>
                 </a:solidFill>
@@ -5379,7 +6574,7 @@
               <a:t>商品化實作體驗： </a:t>
             </a:r>
             <a:r>
-              <a:rPr b="0" sz="1300">
+              <a:rPr b="0" sz="1350">
                 <a:solidFill>
                   <a:srgbClr val="64748B"/>
                 </a:solidFill>
@@ -5392,14 +6587,14 @@
       </p:sp>
       <p:sp>
         <p:nvSpPr>
-          <p:cNvPr id="7" name="Rounded Rectangle 6"/>
+          <p:cNvPr id="12" name="Rounded Rectangle 11"/>
           <p:cNvSpPr/>
           <p:nvPr/>
         </p:nvSpPr>
         <p:spPr>
           <a:xfrm>
-            <a:off x="6309360" y="1371600"/>
-            <a:ext cx="5120640" cy="4937760"/>
+            <a:off x="6309360" y="1325880"/>
+            <a:ext cx="5120640" cy="4983480"/>
           </a:xfrm>
           <a:prstGeom prst="roundRect">
             <a:avLst/>
@@ -5437,14 +6632,57 @@
       </p:sp>
       <p:sp>
         <p:nvSpPr>
-          <p:cNvPr id="8" name="TextBox 7"/>
+          <p:cNvPr id="13" name="Rounded Rectangle 12"/>
+          <p:cNvSpPr/>
+          <p:nvPr/>
+        </p:nvSpPr>
+        <p:spPr>
+          <a:xfrm>
+            <a:off x="6309360" y="1325880"/>
+            <a:ext cx="5120640" cy="91440"/>
+          </a:xfrm>
+          <a:prstGeom prst="roundRect">
+            <a:avLst/>
+          </a:prstGeom>
+          <a:solidFill>
+            <a:srgbClr val="EB6E28"/>
+          </a:solidFill>
+          <a:ln>
+            <a:noFill/>
+          </a:ln>
+        </p:spPr>
+        <p:style>
+          <a:lnRef idx="1">
+            <a:schemeClr val="accent1"/>
+          </a:lnRef>
+          <a:fillRef idx="3">
+            <a:schemeClr val="accent1"/>
+          </a:fillRef>
+          <a:effectRef idx="2">
+            <a:schemeClr val="accent1"/>
+          </a:effectRef>
+          <a:fontRef idx="minor">
+            <a:schemeClr val="lt1"/>
+          </a:fontRef>
+        </p:style>
+        <p:txBody>
+          <a:bodyPr rtlCol="0" anchor="ctr"/>
+          <a:lstStyle/>
+          <a:p>
+            <a:pPr algn="ctr"/>
+          </a:p>
+        </p:txBody>
+      </p:sp>
+      <p:sp>
+        <p:nvSpPr>
+          <p:cNvPr id="14" name="TextBox 13"/>
           <p:cNvSpPr txBox="1"/>
           <p:nvPr/>
         </p:nvSpPr>
         <p:spPr>
           <a:xfrm>
-            <a:off x="6492240" y="1508760"/>
-            <a:ext cx="4754880" cy="4663440"/>
+            <a:off x="6537960" y="1508760"/>
+            <a:ext cx="4663440" cy="4663440"/>
           </a:xfrm>
           <a:prstGeom prst="rect">
             <a:avLst/>
@@ -5461,7 +6699,7 @@
               <a:spcAft>
                 <a:spcPts val="1000"/>
               </a:spcAft>
-              <a:defRPr sz="1600" b="1">
+              <a:defRPr sz="1750" b="1">
                 <a:solidFill>
                   <a:srgbClr val="14233C"/>
                 </a:solidFill>
@@ -5474,12 +6712,15 @@
           </a:p>
           <a:p>
             <a:pPr>
+              <a:lnSpc>
+                <a:spcPct val="125000"/>
+              </a:lnSpc>
               <a:spcAft>
-                <a:spcPts val="600"/>
+                <a:spcPts val="700"/>
               </a:spcAft>
             </a:pPr>
             <a:r>
-              <a:rPr b="1" sz="1300">
+              <a:rPr b="1" sz="1350">
                 <a:solidFill>
                   <a:srgbClr val="1E293B"/>
                 </a:solidFill>
@@ -5488,7 +6729,7 @@
               <a:t>第 01 節課：基礎測試與串流控制 </a:t>
             </a:r>
             <a:r>
-              <a:rPr b="0" sz="1300">
+              <a:rPr b="0" sz="1350">
                 <a:solidFill>
                   <a:srgbClr val="64748B"/>
                 </a:solidFill>
@@ -5499,12 +6740,15 @@
           </a:p>
           <a:p>
             <a:pPr>
+              <a:lnSpc>
+                <a:spcPct val="125000"/>
+              </a:lnSpc>
               <a:spcAft>
-                <a:spcPts val="600"/>
+                <a:spcPts val="700"/>
               </a:spcAft>
             </a:pPr>
             <a:r>
-              <a:rPr b="1" sz="1300">
+              <a:rPr b="1" sz="1350">
                 <a:solidFill>
                   <a:srgbClr val="1E293B"/>
                 </a:solidFill>
@@ -5513,7 +6757,7 @@
               <a:t>第 02 節課：Prompt 工程與畫面校正 </a:t>
             </a:r>
             <a:r>
-              <a:rPr b="0" sz="1300">
+              <a:rPr b="0" sz="1350">
                 <a:solidFill>
                   <a:srgbClr val="64748B"/>
                 </a:solidFill>
@@ -5524,12 +6768,15 @@
           </a:p>
           <a:p>
             <a:pPr>
+              <a:lnSpc>
+                <a:spcPct val="125000"/>
+              </a:lnSpc>
               <a:spcAft>
-                <a:spcPts val="600"/>
+                <a:spcPts val="700"/>
               </a:spcAft>
             </a:pPr>
             <a:r>
-              <a:rPr b="1" sz="1300">
+              <a:rPr b="1" sz="1350">
                 <a:solidFill>
                   <a:srgbClr val="1E293B"/>
                 </a:solidFill>
@@ -5538,7 +6785,7 @@
               <a:t>第 03 節課：多格分割視窗與縮放演算法 </a:t>
             </a:r>
             <a:r>
-              <a:rPr b="0" sz="1300">
+              <a:rPr b="0" sz="1350">
                 <a:solidFill>
                   <a:srgbClr val="64748B"/>
                 </a:solidFill>
@@ -5549,12 +6796,15 @@
           </a:p>
           <a:p>
             <a:pPr>
+              <a:lnSpc>
+                <a:spcPct val="125000"/>
+              </a:lnSpc>
               <a:spcAft>
-                <a:spcPts val="600"/>
+                <a:spcPts val="700"/>
               </a:spcAft>
             </a:pPr>
             <a:r>
-              <a:rPr b="1" sz="1300">
+              <a:rPr b="1" sz="1350">
                 <a:solidFill>
                   <a:srgbClr val="1E293B"/>
                 </a:solidFill>
@@ -5563,7 +6813,7 @@
               <a:t>第 04 節課：YOLO 骨架追蹤與智慧應用 </a:t>
             </a:r>
             <a:r>
-              <a:rPr b="0" sz="1300">
+              <a:rPr b="0" sz="1350">
                 <a:solidFill>
                   <a:srgbClr val="64748B"/>
                 </a:solidFill>
@@ -5579,6 +6829,9 @@
   <p:clrMapOvr>
     <a:masterClrMapping/>
   </p:clrMapOvr>
+  <p:transition spd="med">
+    <p:fade/>
+  </p:transition>
 </p:sld>
 </file>
 
@@ -5601,18 +6854,16 @@
         <p:spPr>
           <a:xfrm>
             <a:off x="0" y="0"/>
-            <a:ext cx="12191695" cy="1005840"/>
+            <a:ext cx="12191695" cy="6858000"/>
           </a:xfrm>
           <a:prstGeom prst="rect">
             <a:avLst/>
           </a:prstGeom>
           <a:solidFill>
-            <a:srgbClr val="14233C"/>
+            <a:srgbClr val="F8FAFC"/>
           </a:solidFill>
           <a:ln>
-            <a:solidFill>
-              <a:srgbClr val="14233C"/>
-            </a:solidFill>
+            <a:noFill/>
           </a:ln>
         </p:spPr>
         <p:style>
@@ -5639,14 +6890,100 @@
       </p:sp>
       <p:sp>
         <p:nvSpPr>
-          <p:cNvPr id="3" name="TextBox 2"/>
+          <p:cNvPr id="3" name="Rectangle 2"/>
+          <p:cNvSpPr/>
+          <p:nvPr/>
+        </p:nvSpPr>
+        <p:spPr>
+          <a:xfrm>
+            <a:off x="0" y="0"/>
+            <a:ext cx="12191695" cy="1051560"/>
+          </a:xfrm>
+          <a:prstGeom prst="rect">
+            <a:avLst/>
+          </a:prstGeom>
+          <a:solidFill>
+            <a:srgbClr val="14233C"/>
+          </a:solidFill>
+          <a:ln>
+            <a:noFill/>
+          </a:ln>
+        </p:spPr>
+        <p:style>
+          <a:lnRef idx="1">
+            <a:schemeClr val="accent1"/>
+          </a:lnRef>
+          <a:fillRef idx="3">
+            <a:schemeClr val="accent1"/>
+          </a:fillRef>
+          <a:effectRef idx="2">
+            <a:schemeClr val="accent1"/>
+          </a:effectRef>
+          <a:fontRef idx="minor">
+            <a:schemeClr val="lt1"/>
+          </a:fontRef>
+        </p:style>
+        <p:txBody>
+          <a:bodyPr rtlCol="0" anchor="ctr"/>
+          <a:lstStyle/>
+          <a:p>
+            <a:pPr algn="ctr"/>
+          </a:p>
+        </p:txBody>
+      </p:sp>
+      <p:sp>
+        <p:nvSpPr>
+          <p:cNvPr id="4" name="Rectangle 3"/>
+          <p:cNvSpPr/>
+          <p:nvPr/>
+        </p:nvSpPr>
+        <p:spPr>
+          <a:xfrm>
+            <a:off x="0" y="1051560"/>
+            <a:ext cx="4114800" cy="45720"/>
+          </a:xfrm>
+          <a:prstGeom prst="rect">
+            <a:avLst/>
+          </a:prstGeom>
+          <a:solidFill>
+            <a:srgbClr val="008CA0"/>
+          </a:solidFill>
+          <a:ln>
+            <a:noFill/>
+          </a:ln>
+        </p:spPr>
+        <p:style>
+          <a:lnRef idx="1">
+            <a:schemeClr val="accent1"/>
+          </a:lnRef>
+          <a:fillRef idx="3">
+            <a:schemeClr val="accent1"/>
+          </a:fillRef>
+          <a:effectRef idx="2">
+            <a:schemeClr val="accent1"/>
+          </a:effectRef>
+          <a:fontRef idx="minor">
+            <a:schemeClr val="lt1"/>
+          </a:fontRef>
+        </p:style>
+        <p:txBody>
+          <a:bodyPr rtlCol="0" anchor="ctr"/>
+          <a:lstStyle/>
+          <a:p>
+            <a:pPr algn="ctr"/>
+          </a:p>
+        </p:txBody>
+      </p:sp>
+      <p:sp>
+        <p:nvSpPr>
+          <p:cNvPr id="5" name="TextBox 4"/>
           <p:cNvSpPr txBox="1"/>
           <p:nvPr/>
         </p:nvSpPr>
         <p:spPr>
           <a:xfrm>
             <a:off x="731520" y="109728"/>
-            <a:ext cx="10698480" cy="274320"/>
+            <a:ext cx="7772400" cy="274320"/>
           </a:xfrm>
           <a:prstGeom prst="rect">
             <a:avLst/>
@@ -5660,7 +6997,7 @@
           <a:lstStyle/>
           <a:p>
             <a:pPr>
-              <a:defRPr sz="1100" b="1">
+              <a:defRPr sz="1150" b="1">
                 <a:solidFill>
                   <a:srgbClr val="008CA0"/>
                 </a:solidFill>
@@ -5668,20 +7005,56 @@
               </a:defRPr>
             </a:pPr>
             <a:r>
-              <a:t>專題製作與教師研習課程</a:t>
-            </a:r>
-          </a:p>
-        </p:txBody>
-      </p:sp>
-      <p:sp>
-        <p:nvSpPr>
-          <p:cNvPr id="4" name="TextBox 3"/>
+              <a:t>📷 WEBCAM AI 視覺與 YOLO 專題實作課程</a:t>
+            </a:r>
+          </a:p>
+        </p:txBody>
+      </p:sp>
+      <p:sp>
+        <p:nvSpPr>
+          <p:cNvPr id="6" name="TextBox 5"/>
           <p:cNvSpPr txBox="1"/>
           <p:nvPr/>
         </p:nvSpPr>
         <p:spPr>
           <a:xfrm>
-            <a:off x="731520" y="320040"/>
+            <a:off x="9144000" y="109728"/>
+            <a:ext cx="2286000" cy="274320"/>
+          </a:xfrm>
+          <a:prstGeom prst="rect">
+            <a:avLst/>
+          </a:prstGeom>
+          <a:noFill/>
+        </p:spPr>
+        <p:txBody>
+          <a:bodyPr wrap="none">
+            <a:spAutoFit/>
+          </a:bodyPr>
+          <a:lstStyle/>
+          <a:p>
+            <a:pPr algn="r">
+              <a:defRPr sz="1200" b="1">
+                <a:solidFill>
+                  <a:srgbClr val="B4C8E1"/>
+                </a:solidFill>
+                <a:latin typeface="微軟正黑體"/>
+              </a:defRPr>
+            </a:pPr>
+            <a:r>
+              <a:t>第 03 / 14 頁</a:t>
+            </a:r>
+          </a:p>
+        </p:txBody>
+      </p:sp>
+      <p:sp>
+        <p:nvSpPr>
+          <p:cNvPr id="7" name="TextBox 6"/>
+          <p:cNvSpPr txBox="1"/>
+          <p:nvPr/>
+        </p:nvSpPr>
+        <p:spPr>
+          <a:xfrm>
+            <a:off x="731520" y="365760"/>
             <a:ext cx="10698480" cy="594360"/>
           </a:xfrm>
           <a:prstGeom prst="rect">
@@ -5696,7 +7069,7 @@
           <a:lstStyle/>
           <a:p>
             <a:pPr>
-              <a:defRPr sz="2200" b="1">
+              <a:defRPr sz="2400" b="1">
                 <a:solidFill>
                   <a:srgbClr val="FFFFFF"/>
                 </a:solidFill>
@@ -5711,14 +7084,50 @@
       </p:sp>
       <p:sp>
         <p:nvSpPr>
-          <p:cNvPr id="5" name="Rounded Rectangle 4"/>
+          <p:cNvPr id="8" name="TextBox 7"/>
+          <p:cNvSpPr txBox="1"/>
+          <p:nvPr/>
+        </p:nvSpPr>
+        <p:spPr>
+          <a:xfrm>
+            <a:off x="731520" y="6510528"/>
+            <a:ext cx="10698480" cy="274320"/>
+          </a:xfrm>
+          <a:prstGeom prst="rect">
+            <a:avLst/>
+          </a:prstGeom>
+          <a:noFill/>
+        </p:spPr>
+        <p:txBody>
+          <a:bodyPr wrap="none">
+            <a:spAutoFit/>
+          </a:bodyPr>
+          <a:lstStyle/>
+          <a:p>
+            <a:pPr>
+              <a:defRPr sz="1050">
+                <a:solidFill>
+                  <a:srgbClr val="64748B"/>
+                </a:solidFill>
+                <a:latin typeface="微軟正黑體"/>
+              </a:defRPr>
+            </a:pPr>
+            <a:r>
+              <a:t>🌐 互動課程網頁：https://stjedu.github.io/www/yolo_webcam_course.html   |   主講：簡樹桐 老師</a:t>
+            </a:r>
+          </a:p>
+        </p:txBody>
+      </p:sp>
+      <p:sp>
+        <p:nvSpPr>
+          <p:cNvPr id="9" name="Rounded Rectangle 8"/>
           <p:cNvSpPr/>
           <p:nvPr/>
         </p:nvSpPr>
         <p:spPr>
           <a:xfrm>
-            <a:off x="731520" y="1371600"/>
-            <a:ext cx="5120640" cy="4937760"/>
+            <a:off x="731520" y="1325880"/>
+            <a:ext cx="5120640" cy="4983480"/>
           </a:xfrm>
           <a:prstGeom prst="roundRect">
             <a:avLst/>
@@ -5756,14 +7165,57 @@
       </p:sp>
       <p:sp>
         <p:nvSpPr>
-          <p:cNvPr id="6" name="TextBox 5"/>
+          <p:cNvPr id="10" name="Rounded Rectangle 9"/>
+          <p:cNvSpPr/>
+          <p:nvPr/>
+        </p:nvSpPr>
+        <p:spPr>
+          <a:xfrm>
+            <a:off x="731520" y="1325880"/>
+            <a:ext cx="5120640" cy="91440"/>
+          </a:xfrm>
+          <a:prstGeom prst="roundRect">
+            <a:avLst/>
+          </a:prstGeom>
+          <a:solidFill>
+            <a:srgbClr val="008CA0"/>
+          </a:solidFill>
+          <a:ln>
+            <a:noFill/>
+          </a:ln>
+        </p:spPr>
+        <p:style>
+          <a:lnRef idx="1">
+            <a:schemeClr val="accent1"/>
+          </a:lnRef>
+          <a:fillRef idx="3">
+            <a:schemeClr val="accent1"/>
+          </a:fillRef>
+          <a:effectRef idx="2">
+            <a:schemeClr val="accent1"/>
+          </a:effectRef>
+          <a:fontRef idx="minor">
+            <a:schemeClr val="lt1"/>
+          </a:fontRef>
+        </p:style>
+        <p:txBody>
+          <a:bodyPr rtlCol="0" anchor="ctr"/>
+          <a:lstStyle/>
+          <a:p>
+            <a:pPr algn="ctr"/>
+          </a:p>
+        </p:txBody>
+      </p:sp>
+      <p:sp>
+        <p:nvSpPr>
+          <p:cNvPr id="11" name="TextBox 10"/>
           <p:cNvSpPr txBox="1"/>
           <p:nvPr/>
         </p:nvSpPr>
         <p:spPr>
           <a:xfrm>
-            <a:off x="914400" y="1508760"/>
-            <a:ext cx="4754880" cy="4663440"/>
+            <a:off x="960120" y="1508760"/>
+            <a:ext cx="4663440" cy="4663440"/>
           </a:xfrm>
           <a:prstGeom prst="rect">
             <a:avLst/>
@@ -5780,7 +7232,7 @@
               <a:spcAft>
                 <a:spcPts val="1000"/>
               </a:spcAft>
-              <a:defRPr sz="1600" b="1">
+              <a:defRPr sz="1750" b="1">
                 <a:solidFill>
                   <a:srgbClr val="14233C"/>
                 </a:solidFill>
@@ -5793,12 +7245,15 @@
           </a:p>
           <a:p>
             <a:pPr>
+              <a:lnSpc>
+                <a:spcPct val="125000"/>
+              </a:lnSpc>
               <a:spcAft>
-                <a:spcPts val="600"/>
+                <a:spcPts val="700"/>
               </a:spcAft>
             </a:pPr>
             <a:r>
-              <a:rPr b="1" sz="1300">
+              <a:rPr b="1" sz="1350">
                 <a:solidFill>
                   <a:srgbClr val="1E293B"/>
                 </a:solidFill>
@@ -5807,7 +7262,7 @@
               <a:t>影像串流捕獲： </a:t>
             </a:r>
             <a:r>
-              <a:rPr b="0" sz="1300">
+              <a:rPr b="0" sz="1350">
                 <a:solidFill>
                   <a:srgbClr val="64748B"/>
                 </a:solidFill>
@@ -5818,12 +7273,15 @@
           </a:p>
           <a:p>
             <a:pPr>
+              <a:lnSpc>
+                <a:spcPct val="125000"/>
+              </a:lnSpc>
               <a:spcAft>
-                <a:spcPts val="600"/>
+                <a:spcPts val="700"/>
               </a:spcAft>
             </a:pPr>
             <a:r>
-              <a:rPr b="1" sz="1300">
+              <a:rPr b="1" sz="1350">
                 <a:solidFill>
                   <a:srgbClr val="1E293B"/>
                 </a:solidFill>
@@ -5832,7 +7290,7 @@
               <a:t>事件驅動與鍵盤監聽： </a:t>
             </a:r>
             <a:r>
-              <a:rPr b="0" sz="1300">
+              <a:rPr b="0" sz="1350">
                 <a:solidFill>
                   <a:srgbClr val="64748B"/>
                 </a:solidFill>
@@ -5843,12 +7301,15 @@
           </a:p>
           <a:p>
             <a:pPr>
+              <a:lnSpc>
+                <a:spcPct val="125000"/>
+              </a:lnSpc>
               <a:spcAft>
-                <a:spcPts val="600"/>
+                <a:spcPts val="700"/>
               </a:spcAft>
             </a:pPr>
             <a:r>
-              <a:rPr b="1" sz="1300">
+              <a:rPr b="1" sz="1350">
                 <a:solidFill>
                   <a:srgbClr val="1E293B"/>
                 </a:solidFill>
@@ -5857,7 +7318,7 @@
               <a:t>影像格式與存檔機制： </a:t>
             </a:r>
             <a:r>
-              <a:rPr b="0" sz="1300">
+              <a:rPr b="0" sz="1350">
                 <a:solidFill>
                   <a:srgbClr val="64748B"/>
                 </a:solidFill>
@@ -5868,12 +7329,15 @@
           </a:p>
           <a:p>
             <a:pPr>
+              <a:lnSpc>
+                <a:spcPct val="125000"/>
+              </a:lnSpc>
               <a:spcAft>
-                <a:spcPts val="600"/>
+                <a:spcPts val="700"/>
               </a:spcAft>
             </a:pPr>
             <a:r>
-              <a:rPr b="1" sz="1300">
+              <a:rPr b="1" sz="1350">
                 <a:solidFill>
                   <a:srgbClr val="1E293B"/>
                 </a:solidFill>
@@ -5882,7 +7346,7 @@
               <a:t>自主探索與進度分流： </a:t>
             </a:r>
             <a:r>
-              <a:rPr b="0" sz="1300">
+              <a:rPr b="0" sz="1350">
                 <a:solidFill>
                   <a:srgbClr val="64748B"/>
                 </a:solidFill>
@@ -5895,14 +7359,14 @@
       </p:sp>
       <p:sp>
         <p:nvSpPr>
-          <p:cNvPr id="7" name="Rounded Rectangle 6"/>
+          <p:cNvPr id="12" name="Rounded Rectangle 11"/>
           <p:cNvSpPr/>
           <p:nvPr/>
         </p:nvSpPr>
         <p:spPr>
           <a:xfrm>
-            <a:off x="6309360" y="1371600"/>
-            <a:ext cx="5120640" cy="4937760"/>
+            <a:off x="6309360" y="1325880"/>
+            <a:ext cx="5120640" cy="4983480"/>
           </a:xfrm>
           <a:prstGeom prst="roundRect">
             <a:avLst/>
@@ -5940,14 +7404,57 @@
       </p:sp>
       <p:sp>
         <p:nvSpPr>
-          <p:cNvPr id="8" name="TextBox 7"/>
+          <p:cNvPr id="13" name="Rounded Rectangle 12"/>
+          <p:cNvSpPr/>
+          <p:nvPr/>
+        </p:nvSpPr>
+        <p:spPr>
+          <a:xfrm>
+            <a:off x="6309360" y="1325880"/>
+            <a:ext cx="5120640" cy="91440"/>
+          </a:xfrm>
+          <a:prstGeom prst="roundRect">
+            <a:avLst/>
+          </a:prstGeom>
+          <a:solidFill>
+            <a:srgbClr val="EB6E28"/>
+          </a:solidFill>
+          <a:ln>
+            <a:noFill/>
+          </a:ln>
+        </p:spPr>
+        <p:style>
+          <a:lnRef idx="1">
+            <a:schemeClr val="accent1"/>
+          </a:lnRef>
+          <a:fillRef idx="3">
+            <a:schemeClr val="accent1"/>
+          </a:fillRef>
+          <a:effectRef idx="2">
+            <a:schemeClr val="accent1"/>
+          </a:effectRef>
+          <a:fontRef idx="minor">
+            <a:schemeClr val="lt1"/>
+          </a:fontRef>
+        </p:style>
+        <p:txBody>
+          <a:bodyPr rtlCol="0" anchor="ctr"/>
+          <a:lstStyle/>
+          <a:p>
+            <a:pPr algn="ctr"/>
+          </a:p>
+        </p:txBody>
+      </p:sp>
+      <p:sp>
+        <p:nvSpPr>
+          <p:cNvPr id="14" name="TextBox 13"/>
           <p:cNvSpPr txBox="1"/>
           <p:nvPr/>
         </p:nvSpPr>
         <p:spPr>
           <a:xfrm>
-            <a:off x="6492240" y="1508760"/>
-            <a:ext cx="4754880" cy="4663440"/>
+            <a:off x="6537960" y="1508760"/>
+            <a:ext cx="4663440" cy="4663440"/>
           </a:xfrm>
           <a:prstGeom prst="rect">
             <a:avLst/>
@@ -5964,7 +7471,7 @@
               <a:spcAft>
                 <a:spcPts val="1000"/>
               </a:spcAft>
-              <a:defRPr sz="1600" b="1">
+              <a:defRPr sz="1750" b="1">
                 <a:solidFill>
                   <a:srgbClr val="14233C"/>
                 </a:solidFill>
@@ -5977,12 +7484,15 @@
           </a:p>
           <a:p>
             <a:pPr>
+              <a:lnSpc>
+                <a:spcPct val="125000"/>
+              </a:lnSpc>
               <a:spcAft>
-                <a:spcPts val="600"/>
+                <a:spcPts val="700"/>
               </a:spcAft>
             </a:pPr>
             <a:r>
-              <a:rPr b="1" sz="1300">
+              <a:rPr b="1" sz="1350">
                 <a:solidFill>
                   <a:srgbClr val="1E293B"/>
                 </a:solidFill>
@@ -5991,7 +7501,7 @@
               <a:t>1. 攝影機開啟與串流監聽： </a:t>
             </a:r>
             <a:r>
-              <a:rPr b="0" sz="1300">
+              <a:rPr b="0" sz="1350">
                 <a:solidFill>
                   <a:srgbClr val="64748B"/>
                 </a:solidFill>
@@ -6002,12 +7512,15 @@
           </a:p>
           <a:p>
             <a:pPr>
+              <a:lnSpc>
+                <a:spcPct val="125000"/>
+              </a:lnSpc>
               <a:spcAft>
-                <a:spcPts val="600"/>
+                <a:spcPts val="700"/>
               </a:spcAft>
             </a:pPr>
             <a:r>
-              <a:rPr b="1" sz="1300">
+              <a:rPr b="1" sz="1350">
                 <a:solidFill>
                   <a:srgbClr val="1E293B"/>
                 </a:solidFill>
@@ -6016,7 +7529,7 @@
               <a:t>2. 拍照熱鍵 (s / Space)： </a:t>
             </a:r>
             <a:r>
-              <a:rPr b="0" sz="1300">
+              <a:rPr b="0" sz="1350">
                 <a:solidFill>
                   <a:srgbClr val="64748B"/>
                 </a:solidFill>
@@ -6027,12 +7540,15 @@
           </a:p>
           <a:p>
             <a:pPr>
+              <a:lnSpc>
+                <a:spcPct val="125000"/>
+              </a:lnSpc>
               <a:spcAft>
-                <a:spcPts val="600"/>
+                <a:spcPts val="700"/>
               </a:spcAft>
             </a:pPr>
             <a:r>
-              <a:rPr b="1" sz="1300">
+              <a:rPr b="1" sz="1350">
                 <a:solidFill>
                   <a:srgbClr val="1E293B"/>
                 </a:solidFill>
@@ -6041,7 +7557,7 @@
               <a:t>3. 結束熱鍵 (q / ESC)： </a:t>
             </a:r>
             <a:r>
-              <a:rPr b="0" sz="1300">
+              <a:rPr b="0" sz="1350">
                 <a:solidFill>
                   <a:srgbClr val="64748B"/>
                 </a:solidFill>
@@ -6052,12 +7568,15 @@
           </a:p>
           <a:p>
             <a:pPr>
+              <a:lnSpc>
+                <a:spcPct val="125000"/>
+              </a:lnSpc>
               <a:spcAft>
-                <a:spcPts val="600"/>
+                <a:spcPts val="700"/>
               </a:spcAft>
             </a:pPr>
             <a:r>
-              <a:rPr b="1" sz="1300">
+              <a:rPr b="1" sz="1350">
                 <a:solidFill>
                   <a:srgbClr val="1E293B"/>
                 </a:solidFill>
@@ -6066,7 +7585,7 @@
               <a:t>4. 自動定時拍攝 (Timelapse)： </a:t>
             </a:r>
             <a:r>
-              <a:rPr b="0" sz="1300">
+              <a:rPr b="0" sz="1350">
                 <a:solidFill>
                   <a:srgbClr val="64748B"/>
                 </a:solidFill>
@@ -6077,12 +7596,15 @@
           </a:p>
           <a:p>
             <a:pPr>
+              <a:lnSpc>
+                <a:spcPct val="125000"/>
+              </a:lnSpc>
               <a:spcAft>
-                <a:spcPts val="600"/>
+                <a:spcPts val="700"/>
               </a:spcAft>
             </a:pPr>
             <a:r>
-              <a:rPr b="1" sz="1300">
+              <a:rPr b="1" sz="1350">
                 <a:solidFill>
                   <a:srgbClr val="1E293B"/>
                 </a:solidFill>
@@ -6091,7 +7613,7 @@
               <a:t>5. 延遲除錯： </a:t>
             </a:r>
             <a:r>
-              <a:rPr b="0" sz="1300">
+              <a:rPr b="0" sz="1350">
                 <a:solidFill>
                   <a:srgbClr val="64748B"/>
                 </a:solidFill>
@@ -6107,6 +7629,9 @@
   <p:clrMapOvr>
     <a:masterClrMapping/>
   </p:clrMapOvr>
+  <p:transition spd="med">
+    <p:fade/>
+  </p:transition>
 </p:sld>
 </file>
 
@@ -6129,18 +7654,16 @@
         <p:spPr>
           <a:xfrm>
             <a:off x="0" y="0"/>
-            <a:ext cx="12191695" cy="1005840"/>
+            <a:ext cx="12191695" cy="6858000"/>
           </a:xfrm>
           <a:prstGeom prst="rect">
             <a:avLst/>
           </a:prstGeom>
           <a:solidFill>
-            <a:srgbClr val="14233C"/>
+            <a:srgbClr val="F8FAFC"/>
           </a:solidFill>
           <a:ln>
-            <a:solidFill>
-              <a:srgbClr val="14233C"/>
-            </a:solidFill>
+            <a:noFill/>
           </a:ln>
         </p:spPr>
         <p:style>
@@ -6167,14 +7690,100 @@
       </p:sp>
       <p:sp>
         <p:nvSpPr>
-          <p:cNvPr id="3" name="TextBox 2"/>
+          <p:cNvPr id="3" name="Rectangle 2"/>
+          <p:cNvSpPr/>
+          <p:nvPr/>
+        </p:nvSpPr>
+        <p:spPr>
+          <a:xfrm>
+            <a:off x="0" y="0"/>
+            <a:ext cx="12191695" cy="1051560"/>
+          </a:xfrm>
+          <a:prstGeom prst="rect">
+            <a:avLst/>
+          </a:prstGeom>
+          <a:solidFill>
+            <a:srgbClr val="14233C"/>
+          </a:solidFill>
+          <a:ln>
+            <a:noFill/>
+          </a:ln>
+        </p:spPr>
+        <p:style>
+          <a:lnRef idx="1">
+            <a:schemeClr val="accent1"/>
+          </a:lnRef>
+          <a:fillRef idx="3">
+            <a:schemeClr val="accent1"/>
+          </a:fillRef>
+          <a:effectRef idx="2">
+            <a:schemeClr val="accent1"/>
+          </a:effectRef>
+          <a:fontRef idx="minor">
+            <a:schemeClr val="lt1"/>
+          </a:fontRef>
+        </p:style>
+        <p:txBody>
+          <a:bodyPr rtlCol="0" anchor="ctr"/>
+          <a:lstStyle/>
+          <a:p>
+            <a:pPr algn="ctr"/>
+          </a:p>
+        </p:txBody>
+      </p:sp>
+      <p:sp>
+        <p:nvSpPr>
+          <p:cNvPr id="4" name="Rectangle 3"/>
+          <p:cNvSpPr/>
+          <p:nvPr/>
+        </p:nvSpPr>
+        <p:spPr>
+          <a:xfrm>
+            <a:off x="0" y="1051560"/>
+            <a:ext cx="4114800" cy="45720"/>
+          </a:xfrm>
+          <a:prstGeom prst="rect">
+            <a:avLst/>
+          </a:prstGeom>
+          <a:solidFill>
+            <a:srgbClr val="008CA0"/>
+          </a:solidFill>
+          <a:ln>
+            <a:noFill/>
+          </a:ln>
+        </p:spPr>
+        <p:style>
+          <a:lnRef idx="1">
+            <a:schemeClr val="accent1"/>
+          </a:lnRef>
+          <a:fillRef idx="3">
+            <a:schemeClr val="accent1"/>
+          </a:fillRef>
+          <a:effectRef idx="2">
+            <a:schemeClr val="accent1"/>
+          </a:effectRef>
+          <a:fontRef idx="minor">
+            <a:schemeClr val="lt1"/>
+          </a:fontRef>
+        </p:style>
+        <p:txBody>
+          <a:bodyPr rtlCol="0" anchor="ctr"/>
+          <a:lstStyle/>
+          <a:p>
+            <a:pPr algn="ctr"/>
+          </a:p>
+        </p:txBody>
+      </p:sp>
+      <p:sp>
+        <p:nvSpPr>
+          <p:cNvPr id="5" name="TextBox 4"/>
           <p:cNvSpPr txBox="1"/>
           <p:nvPr/>
         </p:nvSpPr>
         <p:spPr>
           <a:xfrm>
             <a:off x="731520" y="109728"/>
-            <a:ext cx="10698480" cy="274320"/>
+            <a:ext cx="7772400" cy="274320"/>
           </a:xfrm>
           <a:prstGeom prst="rect">
             <a:avLst/>
@@ -6188,7 +7797,7 @@
           <a:lstStyle/>
           <a:p>
             <a:pPr>
-              <a:defRPr sz="1100" b="1">
+              <a:defRPr sz="1150" b="1">
                 <a:solidFill>
                   <a:srgbClr val="008CA0"/>
                 </a:solidFill>
@@ -6196,20 +7805,56 @@
               </a:defRPr>
             </a:pPr>
             <a:r>
-              <a:t>專題製作與教師研習課程</a:t>
-            </a:r>
-          </a:p>
-        </p:txBody>
-      </p:sp>
-      <p:sp>
-        <p:nvSpPr>
-          <p:cNvPr id="4" name="TextBox 3"/>
+              <a:t>📷 WEBCAM AI 視覺與 YOLO 專題實作課程</a:t>
+            </a:r>
+          </a:p>
+        </p:txBody>
+      </p:sp>
+      <p:sp>
+        <p:nvSpPr>
+          <p:cNvPr id="6" name="TextBox 5"/>
           <p:cNvSpPr txBox="1"/>
           <p:nvPr/>
         </p:nvSpPr>
         <p:spPr>
           <a:xfrm>
-            <a:off x="731520" y="320040"/>
+            <a:off x="9144000" y="109728"/>
+            <a:ext cx="2286000" cy="274320"/>
+          </a:xfrm>
+          <a:prstGeom prst="rect">
+            <a:avLst/>
+          </a:prstGeom>
+          <a:noFill/>
+        </p:spPr>
+        <p:txBody>
+          <a:bodyPr wrap="none">
+            <a:spAutoFit/>
+          </a:bodyPr>
+          <a:lstStyle/>
+          <a:p>
+            <a:pPr algn="r">
+              <a:defRPr sz="1200" b="1">
+                <a:solidFill>
+                  <a:srgbClr val="B4C8E1"/>
+                </a:solidFill>
+                <a:latin typeface="微軟正黑體"/>
+              </a:defRPr>
+            </a:pPr>
+            <a:r>
+              <a:t>第 04 / 14 頁</a:t>
+            </a:r>
+          </a:p>
+        </p:txBody>
+      </p:sp>
+      <p:sp>
+        <p:nvSpPr>
+          <p:cNvPr id="7" name="TextBox 6"/>
+          <p:cNvSpPr txBox="1"/>
+          <p:nvPr/>
+        </p:nvSpPr>
+        <p:spPr>
+          <a:xfrm>
+            <a:off x="731520" y="365760"/>
             <a:ext cx="10698480" cy="594360"/>
           </a:xfrm>
           <a:prstGeom prst="rect">
@@ -6224,7 +7869,7 @@
           <a:lstStyle/>
           <a:p>
             <a:pPr>
-              <a:defRPr sz="2200" b="1">
+              <a:defRPr sz="2400" b="1">
                 <a:solidFill>
                   <a:srgbClr val="FFFFFF"/>
                 </a:solidFill>
@@ -6239,14 +7884,50 @@
       </p:sp>
       <p:sp>
         <p:nvSpPr>
-          <p:cNvPr id="5" name="Rounded Rectangle 4"/>
+          <p:cNvPr id="8" name="TextBox 7"/>
+          <p:cNvSpPr txBox="1"/>
+          <p:nvPr/>
+        </p:nvSpPr>
+        <p:spPr>
+          <a:xfrm>
+            <a:off x="731520" y="6510528"/>
+            <a:ext cx="10698480" cy="274320"/>
+          </a:xfrm>
+          <a:prstGeom prst="rect">
+            <a:avLst/>
+          </a:prstGeom>
+          <a:noFill/>
+        </p:spPr>
+        <p:txBody>
+          <a:bodyPr wrap="none">
+            <a:spAutoFit/>
+          </a:bodyPr>
+          <a:lstStyle/>
+          <a:p>
+            <a:pPr>
+              <a:defRPr sz="1050">
+                <a:solidFill>
+                  <a:srgbClr val="64748B"/>
+                </a:solidFill>
+                <a:latin typeface="微軟正黑體"/>
+              </a:defRPr>
+            </a:pPr>
+            <a:r>
+              <a:t>🌐 互動課程網頁：https://stjedu.github.io/www/yolo_webcam_course.html   |   主講：簡樹桐 老師</a:t>
+            </a:r>
+          </a:p>
+        </p:txBody>
+      </p:sp>
+      <p:sp>
+        <p:nvSpPr>
+          <p:cNvPr id="9" name="Rounded Rectangle 8"/>
           <p:cNvSpPr/>
           <p:nvPr/>
         </p:nvSpPr>
         <p:spPr>
           <a:xfrm>
-            <a:off x="731520" y="1371600"/>
-            <a:ext cx="10698480" cy="2377440"/>
+            <a:off x="731520" y="1325880"/>
+            <a:ext cx="10698480" cy="2423160"/>
           </a:xfrm>
           <a:prstGeom prst="roundRect">
             <a:avLst/>
@@ -6284,14 +7965,14 @@
       </p:sp>
       <p:sp>
         <p:nvSpPr>
-          <p:cNvPr id="6" name="TextBox 5"/>
+          <p:cNvPr id="10" name="TextBox 9"/>
           <p:cNvSpPr txBox="1"/>
           <p:nvPr/>
         </p:nvSpPr>
         <p:spPr>
           <a:xfrm>
-            <a:off x="960120" y="1536192"/>
-            <a:ext cx="10241280" cy="2048256"/>
+            <a:off x="960120" y="1472184"/>
+            <a:ext cx="10241280" cy="2130552"/>
           </a:xfrm>
           <a:prstGeom prst="rect">
             <a:avLst/>
@@ -6306,7 +7987,7 @@
           <a:p>
             <a:pPr>
               <a:spcAft>
-                <a:spcPts val="800"/>
+                <a:spcPts val="600"/>
               </a:spcAft>
               <a:defRPr sz="1500" b="1">
                 <a:solidFill>
@@ -6316,17 +7997,20 @@
               </a:defRPr>
             </a:pPr>
             <a:r>
-              <a:t>💡 實戰提示詞 (Prompt)：基礎 WebCam 串流與熱鍵拍照控制</a:t>
-            </a:r>
-          </a:p>
-          <a:p>
-            <a:pPr>
+              <a:t>💡 實戰提示詞 (Prompt)：基礎 WebCam 串流與熱鍵拍照控制   [可直接反白複製]</a:t>
+            </a:r>
+          </a:p>
+          <a:p>
+            <a:pPr>
+              <a:lnSpc>
+                <a:spcPct val="120000"/>
+              </a:lnSpc>
               <a:spcAft>
-                <a:spcPts val="800"/>
+                <a:spcPts val="600"/>
               </a:spcAft>
             </a:pPr>
             <a:r>
-              <a:rPr sz="1200">
+              <a:rPr sz="1250">
                 <a:solidFill>
                   <a:srgbClr val="0F172A"/>
                 </a:solidFill>
@@ -6342,9 +8026,9 @@
           </a:p>
           <a:p>
             <a:r>
-              <a:rPr sz="1100" i="1">
-                <a:solidFill>
-                  <a:srgbClr val="64748B"/>
+              <a:rPr sz="1150" b="1">
+                <a:solidFill>
+                  <a:srgbClr val="008CA0"/>
                 </a:solidFill>
                 <a:latin typeface="微軟正黑體"/>
               </a:rPr>
@@ -6355,14 +8039,14 @@
       </p:sp>
       <p:sp>
         <p:nvSpPr>
-          <p:cNvPr id="7" name="Rounded Rectangle 6"/>
+          <p:cNvPr id="11" name="Rounded Rectangle 10"/>
           <p:cNvSpPr/>
           <p:nvPr/>
         </p:nvSpPr>
         <p:spPr>
           <a:xfrm>
-            <a:off x="731520" y="4023360"/>
-            <a:ext cx="10698480" cy="2377440"/>
+            <a:off x="731520" y="3931920"/>
+            <a:ext cx="10698480" cy="2423160"/>
           </a:xfrm>
           <a:prstGeom prst="roundRect">
             <a:avLst/>
@@ -6400,14 +8084,14 @@
       </p:sp>
       <p:sp>
         <p:nvSpPr>
-          <p:cNvPr id="8" name="TextBox 7"/>
+          <p:cNvPr id="12" name="TextBox 11"/>
           <p:cNvSpPr txBox="1"/>
           <p:nvPr/>
         </p:nvSpPr>
         <p:spPr>
           <a:xfrm>
-            <a:off x="960120" y="4187952"/>
-            <a:ext cx="10241280" cy="2048256"/>
+            <a:off x="960120" y="4078224"/>
+            <a:ext cx="10241280" cy="2130552"/>
           </a:xfrm>
           <a:prstGeom prst="rect">
             <a:avLst/>
@@ -6422,7 +8106,7 @@
           <a:p>
             <a:pPr>
               <a:spcAft>
-                <a:spcPts val="800"/>
+                <a:spcPts val="600"/>
               </a:spcAft>
               <a:defRPr sz="1500" b="1">
                 <a:solidFill>
@@ -6432,17 +8116,20 @@
               </a:defRPr>
             </a:pPr>
             <a:r>
-              <a:t>💡 實戰提示詞 (Prompt)：自動定時拍照（縮時攝影）與異常處理擴充</a:t>
-            </a:r>
-          </a:p>
-          <a:p>
-            <a:pPr>
+              <a:t>💡 實戰提示詞 (Prompt)：自動定時拍照（縮時攝影）與異常處理擴充   [可直接反白複製]</a:t>
+            </a:r>
+          </a:p>
+          <a:p>
+            <a:pPr>
+              <a:lnSpc>
+                <a:spcPct val="120000"/>
+              </a:lnSpc>
               <a:spcAft>
-                <a:spcPts val="800"/>
+                <a:spcPts val="600"/>
               </a:spcAft>
             </a:pPr>
             <a:r>
-              <a:rPr sz="1200">
+              <a:rPr sz="1250">
                 <a:solidFill>
                   <a:srgbClr val="0F172A"/>
                 </a:solidFill>
@@ -6457,9 +8144,9 @@
           </a:p>
           <a:p>
             <a:r>
-              <a:rPr sz="1100" i="1">
-                <a:solidFill>
-                  <a:srgbClr val="64748B"/>
+              <a:rPr sz="1150" b="1">
+                <a:solidFill>
+                  <a:srgbClr val="008CA0"/>
                 </a:solidFill>
                 <a:latin typeface="微軟正黑體"/>
               </a:rPr>
@@ -6473,6 +8160,9 @@
   <p:clrMapOvr>
     <a:masterClrMapping/>
   </p:clrMapOvr>
+  <p:transition spd="med">
+    <p:fade/>
+  </p:transition>
 </p:sld>
 </file>
 
@@ -6495,18 +8185,16 @@
         <p:spPr>
           <a:xfrm>
             <a:off x="0" y="0"/>
-            <a:ext cx="12191695" cy="1005840"/>
+            <a:ext cx="12191695" cy="6858000"/>
           </a:xfrm>
           <a:prstGeom prst="rect">
             <a:avLst/>
           </a:prstGeom>
           <a:solidFill>
-            <a:srgbClr val="14233C"/>
+            <a:srgbClr val="F8FAFC"/>
           </a:solidFill>
           <a:ln>
-            <a:solidFill>
-              <a:srgbClr val="14233C"/>
-            </a:solidFill>
+            <a:noFill/>
           </a:ln>
         </p:spPr>
         <p:style>
@@ -6533,14 +8221,100 @@
       </p:sp>
       <p:sp>
         <p:nvSpPr>
-          <p:cNvPr id="3" name="TextBox 2"/>
+          <p:cNvPr id="3" name="Rectangle 2"/>
+          <p:cNvSpPr/>
+          <p:nvPr/>
+        </p:nvSpPr>
+        <p:spPr>
+          <a:xfrm>
+            <a:off x="0" y="0"/>
+            <a:ext cx="12191695" cy="1051560"/>
+          </a:xfrm>
+          <a:prstGeom prst="rect">
+            <a:avLst/>
+          </a:prstGeom>
+          <a:solidFill>
+            <a:srgbClr val="14233C"/>
+          </a:solidFill>
+          <a:ln>
+            <a:noFill/>
+          </a:ln>
+        </p:spPr>
+        <p:style>
+          <a:lnRef idx="1">
+            <a:schemeClr val="accent1"/>
+          </a:lnRef>
+          <a:fillRef idx="3">
+            <a:schemeClr val="accent1"/>
+          </a:fillRef>
+          <a:effectRef idx="2">
+            <a:schemeClr val="accent1"/>
+          </a:effectRef>
+          <a:fontRef idx="minor">
+            <a:schemeClr val="lt1"/>
+          </a:fontRef>
+        </p:style>
+        <p:txBody>
+          <a:bodyPr rtlCol="0" anchor="ctr"/>
+          <a:lstStyle/>
+          <a:p>
+            <a:pPr algn="ctr"/>
+          </a:p>
+        </p:txBody>
+      </p:sp>
+      <p:sp>
+        <p:nvSpPr>
+          <p:cNvPr id="4" name="Rectangle 3"/>
+          <p:cNvSpPr/>
+          <p:nvPr/>
+        </p:nvSpPr>
+        <p:spPr>
+          <a:xfrm>
+            <a:off x="0" y="1051560"/>
+            <a:ext cx="4114800" cy="45720"/>
+          </a:xfrm>
+          <a:prstGeom prst="rect">
+            <a:avLst/>
+          </a:prstGeom>
+          <a:solidFill>
+            <a:srgbClr val="008CA0"/>
+          </a:solidFill>
+          <a:ln>
+            <a:noFill/>
+          </a:ln>
+        </p:spPr>
+        <p:style>
+          <a:lnRef idx="1">
+            <a:schemeClr val="accent1"/>
+          </a:lnRef>
+          <a:fillRef idx="3">
+            <a:schemeClr val="accent1"/>
+          </a:fillRef>
+          <a:effectRef idx="2">
+            <a:schemeClr val="accent1"/>
+          </a:effectRef>
+          <a:fontRef idx="minor">
+            <a:schemeClr val="lt1"/>
+          </a:fontRef>
+        </p:style>
+        <p:txBody>
+          <a:bodyPr rtlCol="0" anchor="ctr"/>
+          <a:lstStyle/>
+          <a:p>
+            <a:pPr algn="ctr"/>
+          </a:p>
+        </p:txBody>
+      </p:sp>
+      <p:sp>
+        <p:nvSpPr>
+          <p:cNvPr id="5" name="TextBox 4"/>
           <p:cNvSpPr txBox="1"/>
           <p:nvPr/>
         </p:nvSpPr>
         <p:spPr>
           <a:xfrm>
             <a:off x="731520" y="109728"/>
-            <a:ext cx="10698480" cy="274320"/>
+            <a:ext cx="7772400" cy="274320"/>
           </a:xfrm>
           <a:prstGeom prst="rect">
             <a:avLst/>
@@ -6554,7 +8328,7 @@
           <a:lstStyle/>
           <a:p>
             <a:pPr>
-              <a:defRPr sz="1100" b="1">
+              <a:defRPr sz="1150" b="1">
                 <a:solidFill>
                   <a:srgbClr val="008CA0"/>
                 </a:solidFill>
@@ -6562,20 +8336,56 @@
               </a:defRPr>
             </a:pPr>
             <a:r>
-              <a:t>專題製作與教師研習課程</a:t>
-            </a:r>
-          </a:p>
-        </p:txBody>
-      </p:sp>
-      <p:sp>
-        <p:nvSpPr>
-          <p:cNvPr id="4" name="TextBox 3"/>
+              <a:t>📷 WEBCAM AI 視覺與 YOLO 專題實作課程</a:t>
+            </a:r>
+          </a:p>
+        </p:txBody>
+      </p:sp>
+      <p:sp>
+        <p:nvSpPr>
+          <p:cNvPr id="6" name="TextBox 5"/>
           <p:cNvSpPr txBox="1"/>
           <p:nvPr/>
         </p:nvSpPr>
         <p:spPr>
           <a:xfrm>
-            <a:off x="731520" y="320040"/>
+            <a:off x="9144000" y="109728"/>
+            <a:ext cx="2286000" cy="274320"/>
+          </a:xfrm>
+          <a:prstGeom prst="rect">
+            <a:avLst/>
+          </a:prstGeom>
+          <a:noFill/>
+        </p:spPr>
+        <p:txBody>
+          <a:bodyPr wrap="none">
+            <a:spAutoFit/>
+          </a:bodyPr>
+          <a:lstStyle/>
+          <a:p>
+            <a:pPr algn="r">
+              <a:defRPr sz="1200" b="1">
+                <a:solidFill>
+                  <a:srgbClr val="B4C8E1"/>
+                </a:solidFill>
+                <a:latin typeface="微軟正黑體"/>
+              </a:defRPr>
+            </a:pPr>
+            <a:r>
+              <a:t>第 05 / 14 頁</a:t>
+            </a:r>
+          </a:p>
+        </p:txBody>
+      </p:sp>
+      <p:sp>
+        <p:nvSpPr>
+          <p:cNvPr id="7" name="TextBox 6"/>
+          <p:cNvSpPr txBox="1"/>
+          <p:nvPr/>
+        </p:nvSpPr>
+        <p:spPr>
+          <a:xfrm>
+            <a:off x="731520" y="365760"/>
             <a:ext cx="10698480" cy="594360"/>
           </a:xfrm>
           <a:prstGeom prst="rect">
@@ -6590,7 +8400,7 @@
           <a:lstStyle/>
           <a:p>
             <a:pPr>
-              <a:defRPr sz="2200" b="1">
+              <a:defRPr sz="2400" b="1">
                 <a:solidFill>
                   <a:srgbClr val="FFFFFF"/>
                 </a:solidFill>
@@ -6605,14 +8415,50 @@
       </p:sp>
       <p:sp>
         <p:nvSpPr>
-          <p:cNvPr id="5" name="Rounded Rectangle 4"/>
+          <p:cNvPr id="8" name="TextBox 7"/>
+          <p:cNvSpPr txBox="1"/>
+          <p:nvPr/>
+        </p:nvSpPr>
+        <p:spPr>
+          <a:xfrm>
+            <a:off x="731520" y="6510528"/>
+            <a:ext cx="10698480" cy="274320"/>
+          </a:xfrm>
+          <a:prstGeom prst="rect">
+            <a:avLst/>
+          </a:prstGeom>
+          <a:noFill/>
+        </p:spPr>
+        <p:txBody>
+          <a:bodyPr wrap="none">
+            <a:spAutoFit/>
+          </a:bodyPr>
+          <a:lstStyle/>
+          <a:p>
+            <a:pPr>
+              <a:defRPr sz="1050">
+                <a:solidFill>
+                  <a:srgbClr val="64748B"/>
+                </a:solidFill>
+                <a:latin typeface="微軟正黑體"/>
+              </a:defRPr>
+            </a:pPr>
+            <a:r>
+              <a:t>🌐 互動課程網頁：https://stjedu.github.io/www/yolo_webcam_course.html   |   主講：簡樹桐 老師</a:t>
+            </a:r>
+          </a:p>
+        </p:txBody>
+      </p:sp>
+      <p:sp>
+        <p:nvSpPr>
+          <p:cNvPr id="9" name="Rounded Rectangle 8"/>
           <p:cNvSpPr/>
           <p:nvPr/>
         </p:nvSpPr>
         <p:spPr>
           <a:xfrm>
-            <a:off x="731520" y="1371600"/>
-            <a:ext cx="5120640" cy="4937760"/>
+            <a:off x="731520" y="1325880"/>
+            <a:ext cx="5120640" cy="4983480"/>
           </a:xfrm>
           <a:prstGeom prst="roundRect">
             <a:avLst/>
@@ -6650,14 +8496,57 @@
       </p:sp>
       <p:sp>
         <p:nvSpPr>
-          <p:cNvPr id="6" name="TextBox 5"/>
+          <p:cNvPr id="10" name="Rounded Rectangle 9"/>
+          <p:cNvSpPr/>
+          <p:nvPr/>
+        </p:nvSpPr>
+        <p:spPr>
+          <a:xfrm>
+            <a:off x="731520" y="1325880"/>
+            <a:ext cx="5120640" cy="91440"/>
+          </a:xfrm>
+          <a:prstGeom prst="roundRect">
+            <a:avLst/>
+          </a:prstGeom>
+          <a:solidFill>
+            <a:srgbClr val="EB6E28"/>
+          </a:solidFill>
+          <a:ln>
+            <a:noFill/>
+          </a:ln>
+        </p:spPr>
+        <p:style>
+          <a:lnRef idx="1">
+            <a:schemeClr val="accent1"/>
+          </a:lnRef>
+          <a:fillRef idx="3">
+            <a:schemeClr val="accent1"/>
+          </a:fillRef>
+          <a:effectRef idx="2">
+            <a:schemeClr val="accent1"/>
+          </a:effectRef>
+          <a:fontRef idx="minor">
+            <a:schemeClr val="lt1"/>
+          </a:fontRef>
+        </p:style>
+        <p:txBody>
+          <a:bodyPr rtlCol="0" anchor="ctr"/>
+          <a:lstStyle/>
+          <a:p>
+            <a:pPr algn="ctr"/>
+          </a:p>
+        </p:txBody>
+      </p:sp>
+      <p:sp>
+        <p:nvSpPr>
+          <p:cNvPr id="11" name="TextBox 10"/>
           <p:cNvSpPr txBox="1"/>
           <p:nvPr/>
         </p:nvSpPr>
         <p:spPr>
           <a:xfrm>
-            <a:off x="914400" y="1508760"/>
-            <a:ext cx="4754880" cy="4663440"/>
+            <a:off x="960120" y="1508760"/>
+            <a:ext cx="4663440" cy="4663440"/>
           </a:xfrm>
           <a:prstGeom prst="rect">
             <a:avLst/>
@@ -6674,7 +8563,7 @@
               <a:spcAft>
                 <a:spcPts val="1000"/>
               </a:spcAft>
-              <a:defRPr sz="1600" b="1">
+              <a:defRPr sz="1750" b="1">
                 <a:solidFill>
                   <a:srgbClr val="14233C"/>
                 </a:solidFill>
@@ -6687,12 +8576,15 @@
           </a:p>
           <a:p>
             <a:pPr>
+              <a:lnSpc>
+                <a:spcPct val="125000"/>
+              </a:lnSpc>
               <a:spcAft>
-                <a:spcPts val="600"/>
+                <a:spcPts val="700"/>
               </a:spcAft>
             </a:pPr>
             <a:r>
-              <a:rPr b="1" sz="1300">
+              <a:rPr b="1" sz="1350">
                 <a:solidFill>
                   <a:srgbClr val="1E293B"/>
                 </a:solidFill>
@@ -6701,7 +8593,7 @@
               <a:t>專業詞彙不足： </a:t>
             </a:r>
             <a:r>
-              <a:rPr b="0" sz="1300">
+              <a:rPr b="0" sz="1350">
                 <a:solidFill>
                   <a:srgbClr val="64748B"/>
                 </a:solidFill>
@@ -6712,12 +8604,15 @@
           </a:p>
           <a:p>
             <a:pPr>
+              <a:lnSpc>
+                <a:spcPct val="125000"/>
+              </a:lnSpc>
               <a:spcAft>
-                <a:spcPts val="600"/>
+                <a:spcPts val="700"/>
               </a:spcAft>
             </a:pPr>
             <a:r>
-              <a:rPr b="1" sz="1300">
+              <a:rPr b="1" sz="1350">
                 <a:solidFill>
                   <a:srgbClr val="1E293B"/>
                 </a:solidFill>
@@ -6726,7 +8621,7 @@
               <a:t>缺乏情境與角色定義： </a:t>
             </a:r>
             <a:r>
-              <a:rPr b="0" sz="1300">
+              <a:rPr b="0" sz="1350">
                 <a:solidFill>
                   <a:srgbClr val="64748B"/>
                 </a:solidFill>
@@ -6737,12 +8632,15 @@
           </a:p>
           <a:p>
             <a:pPr>
+              <a:lnSpc>
+                <a:spcPct val="125000"/>
+              </a:lnSpc>
               <a:spcAft>
-                <a:spcPts val="600"/>
+                <a:spcPts val="700"/>
               </a:spcAft>
             </a:pPr>
             <a:r>
-              <a:rPr b="1" sz="1300">
+              <a:rPr b="1" sz="1350">
                 <a:solidFill>
                   <a:srgbClr val="1E293B"/>
                 </a:solidFill>
@@ -6751,7 +8649,7 @@
               <a:t>忽略輸入與邊界條件： </a:t>
             </a:r>
             <a:r>
-              <a:rPr b="0" sz="1300">
+              <a:rPr b="0" sz="1350">
                 <a:solidFill>
                   <a:srgbClr val="64748B"/>
                 </a:solidFill>
@@ -6762,12 +8660,15 @@
           </a:p>
           <a:p>
             <a:pPr>
+              <a:lnSpc>
+                <a:spcPct val="125000"/>
+              </a:lnSpc>
               <a:spcAft>
-                <a:spcPts val="600"/>
+                <a:spcPts val="700"/>
               </a:spcAft>
             </a:pPr>
             <a:r>
-              <a:rPr b="1" sz="1300">
+              <a:rPr b="1" sz="1350">
                 <a:solidFill>
                   <a:srgbClr val="1E293B"/>
                 </a:solidFill>
@@ -6776,7 +8677,7 @@
               <a:t>不會追問與反饋： </a:t>
             </a:r>
             <a:r>
-              <a:rPr b="0" sz="1300">
+              <a:rPr b="0" sz="1350">
                 <a:solidFill>
                   <a:srgbClr val="64748B"/>
                 </a:solidFill>
@@ -6789,14 +8690,14 @@
       </p:sp>
       <p:sp>
         <p:nvSpPr>
-          <p:cNvPr id="7" name="Rounded Rectangle 6"/>
+          <p:cNvPr id="12" name="Rounded Rectangle 11"/>
           <p:cNvSpPr/>
           <p:nvPr/>
         </p:nvSpPr>
         <p:spPr>
           <a:xfrm>
-            <a:off x="6309360" y="1371600"/>
-            <a:ext cx="5120640" cy="4937760"/>
+            <a:off x="6309360" y="1325880"/>
+            <a:ext cx="5120640" cy="4983480"/>
           </a:xfrm>
           <a:prstGeom prst="roundRect">
             <a:avLst/>
@@ -6834,14 +8735,57 @@
       </p:sp>
       <p:sp>
         <p:nvSpPr>
-          <p:cNvPr id="8" name="TextBox 7"/>
+          <p:cNvPr id="13" name="Rounded Rectangle 12"/>
+          <p:cNvSpPr/>
+          <p:nvPr/>
+        </p:nvSpPr>
+        <p:spPr>
+          <a:xfrm>
+            <a:off x="6309360" y="1325880"/>
+            <a:ext cx="5120640" cy="91440"/>
+          </a:xfrm>
+          <a:prstGeom prst="roundRect">
+            <a:avLst/>
+          </a:prstGeom>
+          <a:solidFill>
+            <a:srgbClr val="008CA0"/>
+          </a:solidFill>
+          <a:ln>
+            <a:noFill/>
+          </a:ln>
+        </p:spPr>
+        <p:style>
+          <a:lnRef idx="1">
+            <a:schemeClr val="accent1"/>
+          </a:lnRef>
+          <a:fillRef idx="3">
+            <a:schemeClr val="accent1"/>
+          </a:fillRef>
+          <a:effectRef idx="2">
+            <a:schemeClr val="accent1"/>
+          </a:effectRef>
+          <a:fontRef idx="minor">
+            <a:schemeClr val="lt1"/>
+          </a:fontRef>
+        </p:style>
+        <p:txBody>
+          <a:bodyPr rtlCol="0" anchor="ctr"/>
+          <a:lstStyle/>
+          <a:p>
+            <a:pPr algn="ctr"/>
+          </a:p>
+        </p:txBody>
+      </p:sp>
+      <p:sp>
+        <p:nvSpPr>
+          <p:cNvPr id="14" name="TextBox 13"/>
           <p:cNvSpPr txBox="1"/>
           <p:nvPr/>
         </p:nvSpPr>
         <p:spPr>
           <a:xfrm>
-            <a:off x="6492240" y="1508760"/>
-            <a:ext cx="4754880" cy="4663440"/>
+            <a:off x="6537960" y="1508760"/>
+            <a:ext cx="4663440" cy="4663440"/>
           </a:xfrm>
           <a:prstGeom prst="rect">
             <a:avLst/>
@@ -6858,7 +8802,7 @@
               <a:spcAft>
                 <a:spcPts val="1000"/>
               </a:spcAft>
-              <a:defRPr sz="1600" b="1">
+              <a:defRPr sz="1750" b="1">
                 <a:solidFill>
                   <a:srgbClr val="14233C"/>
                 </a:solidFill>
@@ -6871,12 +8815,15 @@
           </a:p>
           <a:p>
             <a:pPr>
+              <a:lnSpc>
+                <a:spcPct val="125000"/>
+              </a:lnSpc>
               <a:spcAft>
-                <a:spcPts val="600"/>
+                <a:spcPts val="700"/>
               </a:spcAft>
             </a:pPr>
             <a:r>
-              <a:rPr b="1" sz="1300">
+              <a:rPr b="1" sz="1350">
                 <a:solidFill>
                   <a:srgbClr val="1E293B"/>
                 </a:solidFill>
@@ -6885,7 +8832,7 @@
               <a:t>畫面變形痛點： </a:t>
             </a:r>
             <a:r>
-              <a:rPr b="0" sz="1300">
+              <a:rPr b="0" sz="1350">
                 <a:solidFill>
                   <a:srgbClr val="64748B"/>
                 </a:solidFill>
@@ -6896,12 +8843,15 @@
           </a:p>
           <a:p>
             <a:pPr>
+              <a:lnSpc>
+                <a:spcPct val="125000"/>
+              </a:lnSpc>
               <a:spcAft>
-                <a:spcPts val="600"/>
+                <a:spcPts val="700"/>
               </a:spcAft>
             </a:pPr>
             <a:r>
-              <a:rPr b="1" sz="1300">
+              <a:rPr b="1" sz="1350">
                 <a:solidFill>
                   <a:srgbClr val="1E293B"/>
                 </a:solidFill>
@@ -6910,7 +8860,7 @@
               <a:t>1:1 等比例校正： </a:t>
             </a:r>
             <a:r>
-              <a:rPr b="0" sz="1300">
+              <a:rPr b="0" sz="1350">
                 <a:solidFill>
                   <a:srgbClr val="64748B"/>
                 </a:solidFill>
@@ -6921,12 +8871,15 @@
           </a:p>
           <a:p>
             <a:pPr>
+              <a:lnSpc>
+                <a:spcPct val="125000"/>
+              </a:lnSpc>
               <a:spcAft>
-                <a:spcPts val="600"/>
+                <a:spcPts val="700"/>
               </a:spcAft>
             </a:pPr>
             <a:r>
-              <a:rPr b="1" sz="1300">
+              <a:rPr b="1" sz="1350">
                 <a:solidFill>
                   <a:srgbClr val="1E293B"/>
                 </a:solidFill>
@@ -6935,7 +8888,7 @@
               <a:t>高解析度迷思： </a:t>
             </a:r>
             <a:r>
-              <a:rPr b="0" sz="1300">
+              <a:rPr b="0" sz="1350">
                 <a:solidFill>
                   <a:srgbClr val="64748B"/>
                 </a:solidFill>
@@ -6946,12 +8899,15 @@
           </a:p>
           <a:p>
             <a:pPr>
+              <a:lnSpc>
+                <a:spcPct val="125000"/>
+              </a:lnSpc>
               <a:spcAft>
-                <a:spcPts val="600"/>
+                <a:spcPts val="700"/>
               </a:spcAft>
             </a:pPr>
             <a:r>
-              <a:rPr b="1" sz="1300">
+              <a:rPr b="1" sz="1350">
                 <a:solidFill>
                   <a:srgbClr val="1E293B"/>
                 </a:solidFill>
@@ -6960,7 +8916,7 @@
               <a:t>AI 模型的算力原則： </a:t>
             </a:r>
             <a:r>
-              <a:rPr b="0" sz="1300">
+              <a:rPr b="0" sz="1350">
                 <a:solidFill>
                   <a:srgbClr val="64748B"/>
                 </a:solidFill>
@@ -6976,6 +8932,9 @@
   <p:clrMapOvr>
     <a:masterClrMapping/>
   </p:clrMapOvr>
+  <p:transition spd="med">
+    <p:fade/>
+  </p:transition>
 </p:sld>
 </file>
 
@@ -6998,18 +8957,16 @@
         <p:spPr>
           <a:xfrm>
             <a:off x="0" y="0"/>
-            <a:ext cx="12191695" cy="1005840"/>
+            <a:ext cx="12191695" cy="6858000"/>
           </a:xfrm>
           <a:prstGeom prst="rect">
             <a:avLst/>
           </a:prstGeom>
           <a:solidFill>
-            <a:srgbClr val="14233C"/>
+            <a:srgbClr val="F8FAFC"/>
           </a:solidFill>
           <a:ln>
-            <a:solidFill>
-              <a:srgbClr val="14233C"/>
-            </a:solidFill>
+            <a:noFill/>
           </a:ln>
         </p:spPr>
         <p:style>
@@ -7036,14 +8993,100 @@
       </p:sp>
       <p:sp>
         <p:nvSpPr>
-          <p:cNvPr id="3" name="TextBox 2"/>
+          <p:cNvPr id="3" name="Rectangle 2"/>
+          <p:cNvSpPr/>
+          <p:nvPr/>
+        </p:nvSpPr>
+        <p:spPr>
+          <a:xfrm>
+            <a:off x="0" y="0"/>
+            <a:ext cx="12191695" cy="1051560"/>
+          </a:xfrm>
+          <a:prstGeom prst="rect">
+            <a:avLst/>
+          </a:prstGeom>
+          <a:solidFill>
+            <a:srgbClr val="14233C"/>
+          </a:solidFill>
+          <a:ln>
+            <a:noFill/>
+          </a:ln>
+        </p:spPr>
+        <p:style>
+          <a:lnRef idx="1">
+            <a:schemeClr val="accent1"/>
+          </a:lnRef>
+          <a:fillRef idx="3">
+            <a:schemeClr val="accent1"/>
+          </a:fillRef>
+          <a:effectRef idx="2">
+            <a:schemeClr val="accent1"/>
+          </a:effectRef>
+          <a:fontRef idx="minor">
+            <a:schemeClr val="lt1"/>
+          </a:fontRef>
+        </p:style>
+        <p:txBody>
+          <a:bodyPr rtlCol="0" anchor="ctr"/>
+          <a:lstStyle/>
+          <a:p>
+            <a:pPr algn="ctr"/>
+          </a:p>
+        </p:txBody>
+      </p:sp>
+      <p:sp>
+        <p:nvSpPr>
+          <p:cNvPr id="4" name="Rectangle 3"/>
+          <p:cNvSpPr/>
+          <p:nvPr/>
+        </p:nvSpPr>
+        <p:spPr>
+          <a:xfrm>
+            <a:off x="0" y="1051560"/>
+            <a:ext cx="4114800" cy="45720"/>
+          </a:xfrm>
+          <a:prstGeom prst="rect">
+            <a:avLst/>
+          </a:prstGeom>
+          <a:solidFill>
+            <a:srgbClr val="008CA0"/>
+          </a:solidFill>
+          <a:ln>
+            <a:noFill/>
+          </a:ln>
+        </p:spPr>
+        <p:style>
+          <a:lnRef idx="1">
+            <a:schemeClr val="accent1"/>
+          </a:lnRef>
+          <a:fillRef idx="3">
+            <a:schemeClr val="accent1"/>
+          </a:fillRef>
+          <a:effectRef idx="2">
+            <a:schemeClr val="accent1"/>
+          </a:effectRef>
+          <a:fontRef idx="minor">
+            <a:schemeClr val="lt1"/>
+          </a:fontRef>
+        </p:style>
+        <p:txBody>
+          <a:bodyPr rtlCol="0" anchor="ctr"/>
+          <a:lstStyle/>
+          <a:p>
+            <a:pPr algn="ctr"/>
+          </a:p>
+        </p:txBody>
+      </p:sp>
+      <p:sp>
+        <p:nvSpPr>
+          <p:cNvPr id="5" name="TextBox 4"/>
           <p:cNvSpPr txBox="1"/>
           <p:nvPr/>
         </p:nvSpPr>
         <p:spPr>
           <a:xfrm>
             <a:off x="731520" y="109728"/>
-            <a:ext cx="10698480" cy="274320"/>
+            <a:ext cx="7772400" cy="274320"/>
           </a:xfrm>
           <a:prstGeom prst="rect">
             <a:avLst/>
@@ -7057,7 +9100,7 @@
           <a:lstStyle/>
           <a:p>
             <a:pPr>
-              <a:defRPr sz="1100" b="1">
+              <a:defRPr sz="1150" b="1">
                 <a:solidFill>
                   <a:srgbClr val="008CA0"/>
                 </a:solidFill>
@@ -7065,20 +9108,56 @@
               </a:defRPr>
             </a:pPr>
             <a:r>
-              <a:t>專題製作與教師研習課程</a:t>
-            </a:r>
-          </a:p>
-        </p:txBody>
-      </p:sp>
-      <p:sp>
-        <p:nvSpPr>
-          <p:cNvPr id="4" name="TextBox 3"/>
+              <a:t>📷 WEBCAM AI 視覺與 YOLO 專題實作課程</a:t>
+            </a:r>
+          </a:p>
+        </p:txBody>
+      </p:sp>
+      <p:sp>
+        <p:nvSpPr>
+          <p:cNvPr id="6" name="TextBox 5"/>
           <p:cNvSpPr txBox="1"/>
           <p:nvPr/>
         </p:nvSpPr>
         <p:spPr>
           <a:xfrm>
-            <a:off x="731520" y="320040"/>
+            <a:off x="9144000" y="109728"/>
+            <a:ext cx="2286000" cy="274320"/>
+          </a:xfrm>
+          <a:prstGeom prst="rect">
+            <a:avLst/>
+          </a:prstGeom>
+          <a:noFill/>
+        </p:spPr>
+        <p:txBody>
+          <a:bodyPr wrap="none">
+            <a:spAutoFit/>
+          </a:bodyPr>
+          <a:lstStyle/>
+          <a:p>
+            <a:pPr algn="r">
+              <a:defRPr sz="1200" b="1">
+                <a:solidFill>
+                  <a:srgbClr val="B4C8E1"/>
+                </a:solidFill>
+                <a:latin typeface="微軟正黑體"/>
+              </a:defRPr>
+            </a:pPr>
+            <a:r>
+              <a:t>第 06 / 14 頁</a:t>
+            </a:r>
+          </a:p>
+        </p:txBody>
+      </p:sp>
+      <p:sp>
+        <p:nvSpPr>
+          <p:cNvPr id="7" name="TextBox 6"/>
+          <p:cNvSpPr txBox="1"/>
+          <p:nvPr/>
+        </p:nvSpPr>
+        <p:spPr>
+          <a:xfrm>
+            <a:off x="731520" y="365760"/>
             <a:ext cx="10698480" cy="594360"/>
           </a:xfrm>
           <a:prstGeom prst="rect">
@@ -7093,7 +9172,7 @@
           <a:lstStyle/>
           <a:p>
             <a:pPr>
-              <a:defRPr sz="2200" b="1">
+              <a:defRPr sz="2400" b="1">
                 <a:solidFill>
                   <a:srgbClr val="FFFFFF"/>
                 </a:solidFill>
@@ -7108,14 +9187,50 @@
       </p:sp>
       <p:sp>
         <p:nvSpPr>
-          <p:cNvPr id="5" name="Rounded Rectangle 4"/>
+          <p:cNvPr id="8" name="TextBox 7"/>
+          <p:cNvSpPr txBox="1"/>
+          <p:nvPr/>
+        </p:nvSpPr>
+        <p:spPr>
+          <a:xfrm>
+            <a:off x="731520" y="6510528"/>
+            <a:ext cx="10698480" cy="274320"/>
+          </a:xfrm>
+          <a:prstGeom prst="rect">
+            <a:avLst/>
+          </a:prstGeom>
+          <a:noFill/>
+        </p:spPr>
+        <p:txBody>
+          <a:bodyPr wrap="none">
+            <a:spAutoFit/>
+          </a:bodyPr>
+          <a:lstStyle/>
+          <a:p>
+            <a:pPr>
+              <a:defRPr sz="1050">
+                <a:solidFill>
+                  <a:srgbClr val="64748B"/>
+                </a:solidFill>
+                <a:latin typeface="微軟正黑體"/>
+              </a:defRPr>
+            </a:pPr>
+            <a:r>
+              <a:t>🌐 互動課程網頁：https://stjedu.github.io/www/yolo_webcam_course.html   |   主講：簡樹桐 老師</a:t>
+            </a:r>
+          </a:p>
+        </p:txBody>
+      </p:sp>
+      <p:sp>
+        <p:nvSpPr>
+          <p:cNvPr id="9" name="Rounded Rectangle 8"/>
           <p:cNvSpPr/>
           <p:nvPr/>
         </p:nvSpPr>
         <p:spPr>
           <a:xfrm>
-            <a:off x="731520" y="1371600"/>
-            <a:ext cx="5120640" cy="2468880"/>
+            <a:off x="731520" y="1325880"/>
+            <a:ext cx="5120640" cy="2423160"/>
           </a:xfrm>
           <a:prstGeom prst="roundRect">
             <a:avLst/>
@@ -7153,14 +9268,57 @@
       </p:sp>
       <p:sp>
         <p:nvSpPr>
-          <p:cNvPr id="6" name="TextBox 5"/>
+          <p:cNvPr id="10" name="Rounded Rectangle 9"/>
+          <p:cNvSpPr/>
+          <p:nvPr/>
+        </p:nvSpPr>
+        <p:spPr>
+          <a:xfrm>
+            <a:off x="731520" y="1325880"/>
+            <a:ext cx="5120640" cy="91440"/>
+          </a:xfrm>
+          <a:prstGeom prst="roundRect">
+            <a:avLst/>
+          </a:prstGeom>
+          <a:solidFill>
+            <a:srgbClr val="008CA0"/>
+          </a:solidFill>
+          <a:ln>
+            <a:noFill/>
+          </a:ln>
+        </p:spPr>
+        <p:style>
+          <a:lnRef idx="1">
+            <a:schemeClr val="accent1"/>
+          </a:lnRef>
+          <a:fillRef idx="3">
+            <a:schemeClr val="accent1"/>
+          </a:fillRef>
+          <a:effectRef idx="2">
+            <a:schemeClr val="accent1"/>
+          </a:effectRef>
+          <a:fontRef idx="minor">
+            <a:schemeClr val="lt1"/>
+          </a:fontRef>
+        </p:style>
+        <p:txBody>
+          <a:bodyPr rtlCol="0" anchor="ctr"/>
+          <a:lstStyle/>
+          <a:p>
+            <a:pPr algn="ctr"/>
+          </a:p>
+        </p:txBody>
+      </p:sp>
+      <p:sp>
+        <p:nvSpPr>
+          <p:cNvPr id="11" name="TextBox 10"/>
           <p:cNvSpPr txBox="1"/>
           <p:nvPr/>
         </p:nvSpPr>
         <p:spPr>
           <a:xfrm>
-            <a:off x="914400" y="1508760"/>
-            <a:ext cx="4754880" cy="2194560"/>
+            <a:off x="960120" y="1508760"/>
+            <a:ext cx="4663440" cy="2103120"/>
           </a:xfrm>
           <a:prstGeom prst="rect">
             <a:avLst/>
@@ -7177,7 +9335,7 @@
               <a:spcAft>
                 <a:spcPts val="1000"/>
               </a:spcAft>
-              <a:defRPr sz="1600" b="1">
+              <a:defRPr sz="1750" b="1">
                 <a:solidFill>
                   <a:srgbClr val="14233C"/>
                 </a:solidFill>
@@ -7190,12 +9348,15 @@
           </a:p>
           <a:p>
             <a:pPr>
+              <a:lnSpc>
+                <a:spcPct val="125000"/>
+              </a:lnSpc>
               <a:spcAft>
-                <a:spcPts val="600"/>
+                <a:spcPts val="700"/>
               </a:spcAft>
             </a:pPr>
             <a:r>
-              <a:rPr b="1" sz="1300">
+              <a:rPr b="1" sz="1350">
                 <a:solidFill>
                   <a:srgbClr val="1E293B"/>
                 </a:solidFill>
@@ -7204,7 +9365,7 @@
               <a:t>1. 角色設定： </a:t>
             </a:r>
             <a:r>
-              <a:rPr b="0" sz="1300">
+              <a:rPr b="0" sz="1350">
                 <a:solidFill>
                   <a:srgbClr val="64748B"/>
                 </a:solidFill>
@@ -7215,12 +9376,15 @@
           </a:p>
           <a:p>
             <a:pPr>
+              <a:lnSpc>
+                <a:spcPct val="125000"/>
+              </a:lnSpc>
               <a:spcAft>
-                <a:spcPts val="600"/>
+                <a:spcPts val="700"/>
               </a:spcAft>
             </a:pPr>
             <a:r>
-              <a:rPr b="1" sz="1300">
+              <a:rPr b="1" sz="1350">
                 <a:solidFill>
                   <a:srgbClr val="1E293B"/>
                 </a:solidFill>
@@ -7229,7 +9393,7 @@
               <a:t>2. 任務與情境： </a:t>
             </a:r>
             <a:r>
-              <a:rPr b="0" sz="1300">
+              <a:rPr b="0" sz="1350">
                 <a:solidFill>
                   <a:srgbClr val="64748B"/>
                 </a:solidFill>
@@ -7240,12 +9404,15 @@
           </a:p>
           <a:p>
             <a:pPr>
+              <a:lnSpc>
+                <a:spcPct val="125000"/>
+              </a:lnSpc>
               <a:spcAft>
-                <a:spcPts val="600"/>
+                <a:spcPts val="700"/>
               </a:spcAft>
             </a:pPr>
             <a:r>
-              <a:rPr b="1" sz="1300">
+              <a:rPr b="1" sz="1350">
                 <a:solidFill>
                   <a:srgbClr val="1E293B"/>
                 </a:solidFill>
@@ -7254,7 +9421,7 @@
               <a:t>3. 輸入/輸出規範： </a:t>
             </a:r>
             <a:r>
-              <a:rPr b="0" sz="1300">
+              <a:rPr b="0" sz="1350">
                 <a:solidFill>
                   <a:srgbClr val="64748B"/>
                 </a:solidFill>
@@ -7265,12 +9432,15 @@
           </a:p>
           <a:p>
             <a:pPr>
+              <a:lnSpc>
+                <a:spcPct val="125000"/>
+              </a:lnSpc>
               <a:spcAft>
-                <a:spcPts val="600"/>
+                <a:spcPts val="700"/>
               </a:spcAft>
             </a:pPr>
             <a:r>
-              <a:rPr b="1" sz="1300">
+              <a:rPr b="1" sz="1350">
                 <a:solidFill>
                   <a:srgbClr val="1E293B"/>
                 </a:solidFill>
@@ -7279,7 +9449,7 @@
               <a:t>4. 限制與異常： </a:t>
             </a:r>
             <a:r>
-              <a:rPr b="0" sz="1300">
+              <a:rPr b="0" sz="1350">
                 <a:solidFill>
                   <a:srgbClr val="64748B"/>
                 </a:solidFill>
@@ -7292,14 +9462,225 @@
       </p:sp>
       <p:sp>
         <p:nvSpPr>
-          <p:cNvPr id="7" name="Rounded Rectangle 6"/>
+          <p:cNvPr id="12" name="Rounded Rectangle 11"/>
           <p:cNvSpPr/>
           <p:nvPr/>
         </p:nvSpPr>
         <p:spPr>
           <a:xfrm>
-            <a:off x="731520" y="4023360"/>
-            <a:ext cx="10698480" cy="2377440"/>
+            <a:off x="6309360" y="1325880"/>
+            <a:ext cx="5120640" cy="2423160"/>
+          </a:xfrm>
+          <a:prstGeom prst="roundRect">
+            <a:avLst/>
+          </a:prstGeom>
+          <a:solidFill>
+            <a:srgbClr val="FFFFFF"/>
+          </a:solidFill>
+          <a:ln w="19050">
+            <a:solidFill>
+              <a:srgbClr val="DCE2EB"/>
+            </a:solidFill>
+          </a:ln>
+        </p:spPr>
+        <p:style>
+          <a:lnRef idx="1">
+            <a:schemeClr val="accent1"/>
+          </a:lnRef>
+          <a:fillRef idx="3">
+            <a:schemeClr val="accent1"/>
+          </a:fillRef>
+          <a:effectRef idx="2">
+            <a:schemeClr val="accent1"/>
+          </a:effectRef>
+          <a:fontRef idx="minor">
+            <a:schemeClr val="lt1"/>
+          </a:fontRef>
+        </p:style>
+        <p:txBody>
+          <a:bodyPr rtlCol="0" anchor="ctr"/>
+          <a:lstStyle/>
+          <a:p>
+            <a:pPr algn="ctr"/>
+          </a:p>
+        </p:txBody>
+      </p:sp>
+      <p:sp>
+        <p:nvSpPr>
+          <p:cNvPr id="13" name="Rounded Rectangle 12"/>
+          <p:cNvSpPr/>
+          <p:nvPr/>
+        </p:nvSpPr>
+        <p:spPr>
+          <a:xfrm>
+            <a:off x="6309360" y="1325880"/>
+            <a:ext cx="5120640" cy="91440"/>
+          </a:xfrm>
+          <a:prstGeom prst="roundRect">
+            <a:avLst/>
+          </a:prstGeom>
+          <a:solidFill>
+            <a:srgbClr val="EB6E28"/>
+          </a:solidFill>
+          <a:ln>
+            <a:noFill/>
+          </a:ln>
+        </p:spPr>
+        <p:style>
+          <a:lnRef idx="1">
+            <a:schemeClr val="accent1"/>
+          </a:lnRef>
+          <a:fillRef idx="3">
+            <a:schemeClr val="accent1"/>
+          </a:fillRef>
+          <a:effectRef idx="2">
+            <a:schemeClr val="accent1"/>
+          </a:effectRef>
+          <a:fontRef idx="minor">
+            <a:schemeClr val="lt1"/>
+          </a:fontRef>
+        </p:style>
+        <p:txBody>
+          <a:bodyPr rtlCol="0" anchor="ctr"/>
+          <a:lstStyle/>
+          <a:p>
+            <a:pPr algn="ctr"/>
+          </a:p>
+        </p:txBody>
+      </p:sp>
+      <p:sp>
+        <p:nvSpPr>
+          <p:cNvPr id="14" name="TextBox 13"/>
+          <p:cNvSpPr txBox="1"/>
+          <p:nvPr/>
+        </p:nvSpPr>
+        <p:spPr>
+          <a:xfrm>
+            <a:off x="6537960" y="1508760"/>
+            <a:ext cx="4663440" cy="2103120"/>
+          </a:xfrm>
+          <a:prstGeom prst="rect">
+            <a:avLst/>
+          </a:prstGeom>
+          <a:noFill/>
+        </p:spPr>
+        <p:txBody>
+          <a:bodyPr wrap="square">
+            <a:spAutoFit/>
+          </a:bodyPr>
+          <a:lstStyle/>
+          <a:p>
+            <a:pPr>
+              <a:spcAft>
+                <a:spcPts val="1000"/>
+              </a:spcAft>
+              <a:defRPr sz="1750" b="1">
+                <a:solidFill>
+                  <a:srgbClr val="14233C"/>
+                </a:solidFill>
+                <a:latin typeface="微軟正黑體"/>
+              </a:defRPr>
+            </a:pPr>
+            <a:r>
+              <a:t>⚡ 影像品質自動檢核概念</a:t>
+            </a:r>
+          </a:p>
+          <a:p>
+            <a:pPr>
+              <a:lnSpc>
+                <a:spcPct val="125000"/>
+              </a:lnSpc>
+              <a:spcAft>
+                <a:spcPts val="700"/>
+              </a:spcAft>
+            </a:pPr>
+            <a:r>
+              <a:rPr b="1" sz="1350">
+                <a:solidFill>
+                  <a:srgbClr val="1E293B"/>
+                </a:solidFill>
+                <a:latin typeface="微軟正黑體"/>
+              </a:rPr>
+              <a:t>亮度灰階計算： </a:t>
+            </a:r>
+            <a:r>
+              <a:rPr b="0" sz="1350">
+                <a:solidFill>
+                  <a:srgbClr val="64748B"/>
+                </a:solidFill>
+                <a:latin typeface="微軟正黑體"/>
+              </a:rPr>
+              <a:t>將 Frame 轉為灰階後計算平均像素強度（Mean Pixel Value 0~255）。</a:t>
+            </a:r>
+          </a:p>
+          <a:p>
+            <a:pPr>
+              <a:lnSpc>
+                <a:spcPct val="125000"/>
+              </a:lnSpc>
+              <a:spcAft>
+                <a:spcPts val="700"/>
+              </a:spcAft>
+            </a:pPr>
+            <a:r>
+              <a:rPr b="1" sz="1350">
+                <a:solidFill>
+                  <a:srgbClr val="1E293B"/>
+                </a:solidFill>
+                <a:latin typeface="微軟正黑體"/>
+              </a:rPr>
+              <a:t>過暗警示 (&lt; 50)： </a:t>
+            </a:r>
+            <a:r>
+              <a:rPr b="0" sz="1350">
+                <a:solidFill>
+                  <a:srgbClr val="64748B"/>
+                </a:solidFill>
+                <a:latin typeface="微軟正黑體"/>
+              </a:rPr>
+              <a:t>畫面上即時顯示黃色警示『環境過暗，請開燈或調整曝光』。</a:t>
+            </a:r>
+          </a:p>
+          <a:p>
+            <a:pPr>
+              <a:lnSpc>
+                <a:spcPct val="125000"/>
+              </a:lnSpc>
+              <a:spcAft>
+                <a:spcPts val="700"/>
+              </a:spcAft>
+            </a:pPr>
+            <a:r>
+              <a:rPr b="1" sz="1350">
+                <a:solidFill>
+                  <a:srgbClr val="1E293B"/>
+                </a:solidFill>
+                <a:latin typeface="微軟正黑體"/>
+              </a:rPr>
+              <a:t>過亮警示 (&gt; 200)： </a:t>
+            </a:r>
+            <a:r>
+              <a:rPr b="0" sz="1350">
+                <a:solidFill>
+                  <a:srgbClr val="64748B"/>
+                </a:solidFill>
+                <a:latin typeface="微軟正黑體"/>
+              </a:rPr>
+              <a:t>畫面顯示紅色警示『畫面過曝，請避開背光光源』。</a:t>
+            </a:r>
+          </a:p>
+        </p:txBody>
+      </p:sp>
+      <p:sp>
+        <p:nvSpPr>
+          <p:cNvPr id="15" name="Rounded Rectangle 14"/>
+          <p:cNvSpPr/>
+          <p:nvPr/>
+        </p:nvSpPr>
+        <p:spPr>
+          <a:xfrm>
+            <a:off x="731520" y="3931920"/>
+            <a:ext cx="10698480" cy="2423160"/>
           </a:xfrm>
           <a:prstGeom prst="roundRect">
             <a:avLst/>
@@ -7337,14 +9718,14 @@
       </p:sp>
       <p:sp>
         <p:nvSpPr>
-          <p:cNvPr id="8" name="TextBox 7"/>
+          <p:cNvPr id="16" name="TextBox 15"/>
           <p:cNvSpPr txBox="1"/>
           <p:nvPr/>
         </p:nvSpPr>
         <p:spPr>
           <a:xfrm>
-            <a:off x="960120" y="4187952"/>
-            <a:ext cx="10241280" cy="2048256"/>
+            <a:off x="960120" y="4078224"/>
+            <a:ext cx="10241280" cy="2130552"/>
           </a:xfrm>
           <a:prstGeom prst="rect">
             <a:avLst/>
@@ -7359,7 +9740,7 @@
           <a:p>
             <a:pPr>
               <a:spcAft>
-                <a:spcPts val="800"/>
+                <a:spcPts val="600"/>
               </a:spcAft>
               <a:defRPr sz="1500" b="1">
                 <a:solidFill>
@@ -7369,193 +9750,37 @@
               </a:defRPr>
             </a:pPr>
             <a:r>
-              <a:t>💡 實戰提示詞 (Prompt)：簡老師強烈推薦：MCP 自我檢核黃金指令</a:t>
-            </a:r>
-          </a:p>
-          <a:p>
-            <a:pPr>
-              <a:spcAft>
-                <a:spcPts val="800"/>
-              </a:spcAft>
-            </a:pPr>
-            <a:r>
-              <a:rPr sz="1200">
-                <a:solidFill>
-                  <a:srgbClr val="0F172A"/>
-                </a:solidFill>
-                <a:latin typeface="Consolas"/>
-              </a:rPr>
-              <a:t>「每次開發完程式，請啟用 MCP 模式，做程式功能的自我檢核，若有問題請直接修正！」</a:t>
-            </a:r>
-          </a:p>
-          <a:p>
-            <a:r>
-              <a:rPr sz="1100" i="1">
-                <a:solidFill>
-                  <a:srgbClr val="64748B"/>
-                </a:solidFill>
-                <a:latin typeface="微軟正黑體"/>
-              </a:rPr>
-              <a:t>📌 教師引導技巧：【除錯密技】教師務必傳授此句！學生遇到 Bug 時不必手足無措，讓 AI 透過工具自動讀取運行日誌、自我發現錯誤並完成修補，大幅降低課堂卡關率。</a:t>
-            </a:r>
-          </a:p>
-        </p:txBody>
-      </p:sp>
-      <p:sp>
-        <p:nvSpPr>
-          <p:cNvPr id="9" name="Rounded Rectangle 8"/>
-          <p:cNvSpPr/>
-          <p:nvPr/>
-        </p:nvSpPr>
-        <p:spPr>
-          <a:xfrm>
-            <a:off x="6309360" y="1371600"/>
-            <a:ext cx="5120640" cy="2468880"/>
-          </a:xfrm>
-          <a:prstGeom prst="roundRect">
-            <a:avLst/>
-          </a:prstGeom>
-          <a:solidFill>
-            <a:srgbClr val="FFFFFF"/>
-          </a:solidFill>
-          <a:ln w="19050">
-            <a:solidFill>
-              <a:srgbClr val="DCE2EB"/>
-            </a:solidFill>
-          </a:ln>
-        </p:spPr>
-        <p:style>
-          <a:lnRef idx="1">
-            <a:schemeClr val="accent1"/>
-          </a:lnRef>
-          <a:fillRef idx="3">
-            <a:schemeClr val="accent1"/>
-          </a:fillRef>
-          <a:effectRef idx="2">
-            <a:schemeClr val="accent1"/>
-          </a:effectRef>
-          <a:fontRef idx="minor">
-            <a:schemeClr val="lt1"/>
-          </a:fontRef>
-        </p:style>
-        <p:txBody>
-          <a:bodyPr rtlCol="0" anchor="ctr"/>
-          <a:lstStyle/>
-          <a:p>
-            <a:pPr algn="ctr"/>
-          </a:p>
-        </p:txBody>
-      </p:sp>
-      <p:sp>
-        <p:nvSpPr>
-          <p:cNvPr id="10" name="TextBox 9"/>
-          <p:cNvSpPr txBox="1"/>
-          <p:nvPr/>
-        </p:nvSpPr>
-        <p:spPr>
-          <a:xfrm>
-            <a:off x="6492240" y="1508760"/>
-            <a:ext cx="4754880" cy="2194560"/>
-          </a:xfrm>
-          <a:prstGeom prst="rect">
-            <a:avLst/>
-          </a:prstGeom>
-          <a:noFill/>
-        </p:spPr>
-        <p:txBody>
-          <a:bodyPr wrap="square">
-            <a:spAutoFit/>
-          </a:bodyPr>
-          <a:lstStyle/>
-          <a:p>
-            <a:pPr>
-              <a:spcAft>
-                <a:spcPts val="1000"/>
-              </a:spcAft>
-              <a:defRPr sz="1600" b="1">
-                <a:solidFill>
-                  <a:srgbClr val="14233C"/>
-                </a:solidFill>
-                <a:latin typeface="微軟正黑體"/>
-              </a:defRPr>
-            </a:pPr>
-            <a:r>
-              <a:t>⚡ 影像品質自動檢核概念</a:t>
-            </a:r>
-          </a:p>
-          <a:p>
-            <a:pPr>
+              <a:t>💡 實戰提示詞 (Prompt)：簡老師強烈推薦：MCP 自我檢核黃金指令   [可直接反白複製]</a:t>
+            </a:r>
+          </a:p>
+          <a:p>
+            <a:pPr>
+              <a:lnSpc>
+                <a:spcPct val="120000"/>
+              </a:lnSpc>
               <a:spcAft>
                 <a:spcPts val="600"/>
               </a:spcAft>
             </a:pPr>
             <a:r>
-              <a:rPr b="1" sz="1300">
-                <a:solidFill>
-                  <a:srgbClr val="1E293B"/>
-                </a:solidFill>
-                <a:latin typeface="微軟正黑體"/>
-              </a:rPr>
-              <a:t>亮度灰階計算： </a:t>
-            </a:r>
-            <a:r>
-              <a:rPr b="0" sz="1300">
-                <a:solidFill>
-                  <a:srgbClr val="64748B"/>
-                </a:solidFill>
-                <a:latin typeface="微軟正黑體"/>
-              </a:rPr>
-              <a:t>將 Frame 轉為灰階後計算平均像素強度（Mean Pixel Value 0~255）。</a:t>
-            </a:r>
-          </a:p>
-          <a:p>
-            <a:pPr>
-              <a:spcAft>
-                <a:spcPts val="600"/>
-              </a:spcAft>
-            </a:pPr>
-            <a:r>
-              <a:rPr b="1" sz="1300">
-                <a:solidFill>
-                  <a:srgbClr val="1E293B"/>
-                </a:solidFill>
-                <a:latin typeface="微軟正黑體"/>
-              </a:rPr>
-              <a:t>過暗警示 (&lt; 50)： </a:t>
-            </a:r>
-            <a:r>
-              <a:rPr b="0" sz="1300">
-                <a:solidFill>
-                  <a:srgbClr val="64748B"/>
-                </a:solidFill>
-                <a:latin typeface="微軟正黑體"/>
-              </a:rPr>
-              <a:t>畫面上即時顯示黃色警示『環境過暗，請開燈或調整曝光』。</a:t>
-            </a:r>
-          </a:p>
-          <a:p>
-            <a:pPr>
-              <a:spcAft>
-                <a:spcPts val="600"/>
-              </a:spcAft>
-            </a:pPr>
-            <a:r>
-              <a:rPr b="1" sz="1300">
-                <a:solidFill>
-                  <a:srgbClr val="1E293B"/>
-                </a:solidFill>
-                <a:latin typeface="微軟正黑體"/>
-              </a:rPr>
-              <a:t>過亮警示 (&gt; 200)： </a:t>
-            </a:r>
-            <a:r>
-              <a:rPr b="0" sz="1300">
-                <a:solidFill>
-                  <a:srgbClr val="64748B"/>
-                </a:solidFill>
-                <a:latin typeface="微軟正黑體"/>
-              </a:rPr>
-              <a:t>畫面顯示紅色警示『畫面過曝，請避開背光光源』。</a:t>
+              <a:rPr sz="1250">
+                <a:solidFill>
+                  <a:srgbClr val="0F172A"/>
+                </a:solidFill>
+                <a:latin typeface="Consolas"/>
+              </a:rPr>
+              <a:t>「每次開發完程式，請啟用 MCP 模式，做程式功能的自我檢核，若有問題請直接修正！」</a:t>
+            </a:r>
+          </a:p>
+          <a:p>
+            <a:r>
+              <a:rPr sz="1150" b="1">
+                <a:solidFill>
+                  <a:srgbClr val="008CA0"/>
+                </a:solidFill>
+                <a:latin typeface="微軟正黑體"/>
+              </a:rPr>
+              <a:t>📌 教師引導技巧：【除錯密技】教師務必傳授此句！學生遇到 Bug 時不必手足無措，讓 AI 透過工具自動讀取運行日誌、自我發現錯誤並完成修補，大幅降低課堂卡關率。</a:t>
             </a:r>
           </a:p>
         </p:txBody>
@@ -7565,6 +9790,9 @@
   <p:clrMapOvr>
     <a:masterClrMapping/>
   </p:clrMapOvr>
+  <p:transition spd="med">
+    <p:fade/>
+  </p:transition>
 </p:sld>
 </file>
 
@@ -7587,18 +9815,16 @@
         <p:spPr>
           <a:xfrm>
             <a:off x="0" y="0"/>
-            <a:ext cx="12191695" cy="1005840"/>
+            <a:ext cx="12191695" cy="6858000"/>
           </a:xfrm>
           <a:prstGeom prst="rect">
             <a:avLst/>
           </a:prstGeom>
           <a:solidFill>
-            <a:srgbClr val="14233C"/>
+            <a:srgbClr val="F8FAFC"/>
           </a:solidFill>
           <a:ln>
-            <a:solidFill>
-              <a:srgbClr val="14233C"/>
-            </a:solidFill>
+            <a:noFill/>
           </a:ln>
         </p:spPr>
         <p:style>
@@ -7625,14 +9851,100 @@
       </p:sp>
       <p:sp>
         <p:nvSpPr>
-          <p:cNvPr id="3" name="TextBox 2"/>
+          <p:cNvPr id="3" name="Rectangle 2"/>
+          <p:cNvSpPr/>
+          <p:nvPr/>
+        </p:nvSpPr>
+        <p:spPr>
+          <a:xfrm>
+            <a:off x="0" y="0"/>
+            <a:ext cx="12191695" cy="1051560"/>
+          </a:xfrm>
+          <a:prstGeom prst="rect">
+            <a:avLst/>
+          </a:prstGeom>
+          <a:solidFill>
+            <a:srgbClr val="14233C"/>
+          </a:solidFill>
+          <a:ln>
+            <a:noFill/>
+          </a:ln>
+        </p:spPr>
+        <p:style>
+          <a:lnRef idx="1">
+            <a:schemeClr val="accent1"/>
+          </a:lnRef>
+          <a:fillRef idx="3">
+            <a:schemeClr val="accent1"/>
+          </a:fillRef>
+          <a:effectRef idx="2">
+            <a:schemeClr val="accent1"/>
+          </a:effectRef>
+          <a:fontRef idx="minor">
+            <a:schemeClr val="lt1"/>
+          </a:fontRef>
+        </p:style>
+        <p:txBody>
+          <a:bodyPr rtlCol="0" anchor="ctr"/>
+          <a:lstStyle/>
+          <a:p>
+            <a:pPr algn="ctr"/>
+          </a:p>
+        </p:txBody>
+      </p:sp>
+      <p:sp>
+        <p:nvSpPr>
+          <p:cNvPr id="4" name="Rectangle 3"/>
+          <p:cNvSpPr/>
+          <p:nvPr/>
+        </p:nvSpPr>
+        <p:spPr>
+          <a:xfrm>
+            <a:off x="0" y="1051560"/>
+            <a:ext cx="4114800" cy="45720"/>
+          </a:xfrm>
+          <a:prstGeom prst="rect">
+            <a:avLst/>
+          </a:prstGeom>
+          <a:solidFill>
+            <a:srgbClr val="008CA0"/>
+          </a:solidFill>
+          <a:ln>
+            <a:noFill/>
+          </a:ln>
+        </p:spPr>
+        <p:style>
+          <a:lnRef idx="1">
+            <a:schemeClr val="accent1"/>
+          </a:lnRef>
+          <a:fillRef idx="3">
+            <a:schemeClr val="accent1"/>
+          </a:fillRef>
+          <a:effectRef idx="2">
+            <a:schemeClr val="accent1"/>
+          </a:effectRef>
+          <a:fontRef idx="minor">
+            <a:schemeClr val="lt1"/>
+          </a:fontRef>
+        </p:style>
+        <p:txBody>
+          <a:bodyPr rtlCol="0" anchor="ctr"/>
+          <a:lstStyle/>
+          <a:p>
+            <a:pPr algn="ctr"/>
+          </a:p>
+        </p:txBody>
+      </p:sp>
+      <p:sp>
+        <p:nvSpPr>
+          <p:cNvPr id="5" name="TextBox 4"/>
           <p:cNvSpPr txBox="1"/>
           <p:nvPr/>
         </p:nvSpPr>
         <p:spPr>
           <a:xfrm>
             <a:off x="731520" y="109728"/>
-            <a:ext cx="10698480" cy="274320"/>
+            <a:ext cx="7772400" cy="274320"/>
           </a:xfrm>
           <a:prstGeom prst="rect">
             <a:avLst/>
@@ -7646,7 +9958,7 @@
           <a:lstStyle/>
           <a:p>
             <a:pPr>
-              <a:defRPr sz="1100" b="1">
+              <a:defRPr sz="1150" b="1">
                 <a:solidFill>
                   <a:srgbClr val="008CA0"/>
                 </a:solidFill>
@@ -7654,20 +9966,56 @@
               </a:defRPr>
             </a:pPr>
             <a:r>
-              <a:t>專題製作與教師研習課程</a:t>
-            </a:r>
-          </a:p>
-        </p:txBody>
-      </p:sp>
-      <p:sp>
-        <p:nvSpPr>
-          <p:cNvPr id="4" name="TextBox 3"/>
+              <a:t>📷 WEBCAM AI 視覺與 YOLO 專題實作課程</a:t>
+            </a:r>
+          </a:p>
+        </p:txBody>
+      </p:sp>
+      <p:sp>
+        <p:nvSpPr>
+          <p:cNvPr id="6" name="TextBox 5"/>
           <p:cNvSpPr txBox="1"/>
           <p:nvPr/>
         </p:nvSpPr>
         <p:spPr>
           <a:xfrm>
-            <a:off x="731520" y="320040"/>
+            <a:off x="9144000" y="109728"/>
+            <a:ext cx="2286000" cy="274320"/>
+          </a:xfrm>
+          <a:prstGeom prst="rect">
+            <a:avLst/>
+          </a:prstGeom>
+          <a:noFill/>
+        </p:spPr>
+        <p:txBody>
+          <a:bodyPr wrap="none">
+            <a:spAutoFit/>
+          </a:bodyPr>
+          <a:lstStyle/>
+          <a:p>
+            <a:pPr algn="r">
+              <a:defRPr sz="1200" b="1">
+                <a:solidFill>
+                  <a:srgbClr val="B4C8E1"/>
+                </a:solidFill>
+                <a:latin typeface="微軟正黑體"/>
+              </a:defRPr>
+            </a:pPr>
+            <a:r>
+              <a:t>第 07 / 14 頁</a:t>
+            </a:r>
+          </a:p>
+        </p:txBody>
+      </p:sp>
+      <p:sp>
+        <p:nvSpPr>
+          <p:cNvPr id="7" name="TextBox 6"/>
+          <p:cNvSpPr txBox="1"/>
+          <p:nvPr/>
+        </p:nvSpPr>
+        <p:spPr>
+          <a:xfrm>
+            <a:off x="731520" y="365760"/>
             <a:ext cx="10698480" cy="594360"/>
           </a:xfrm>
           <a:prstGeom prst="rect">
@@ -7682,7 +10030,7 @@
           <a:lstStyle/>
           <a:p>
             <a:pPr>
-              <a:defRPr sz="2200" b="1">
+              <a:defRPr sz="2400" b="1">
                 <a:solidFill>
                   <a:srgbClr val="FFFFFF"/>
                 </a:solidFill>
@@ -7697,14 +10045,50 @@
       </p:sp>
       <p:sp>
         <p:nvSpPr>
-          <p:cNvPr id="5" name="Rounded Rectangle 4"/>
+          <p:cNvPr id="8" name="TextBox 7"/>
+          <p:cNvSpPr txBox="1"/>
+          <p:nvPr/>
+        </p:nvSpPr>
+        <p:spPr>
+          <a:xfrm>
+            <a:off x="731520" y="6510528"/>
+            <a:ext cx="10698480" cy="274320"/>
+          </a:xfrm>
+          <a:prstGeom prst="rect">
+            <a:avLst/>
+          </a:prstGeom>
+          <a:noFill/>
+        </p:spPr>
+        <p:txBody>
+          <a:bodyPr wrap="none">
+            <a:spAutoFit/>
+          </a:bodyPr>
+          <a:lstStyle/>
+          <a:p>
+            <a:pPr>
+              <a:defRPr sz="1050">
+                <a:solidFill>
+                  <a:srgbClr val="64748B"/>
+                </a:solidFill>
+                <a:latin typeface="微軟正黑體"/>
+              </a:defRPr>
+            </a:pPr>
+            <a:r>
+              <a:t>🌐 互動課程網頁：https://stjedu.github.io/www/yolo_webcam_course.html   |   主講：簡樹桐 老師</a:t>
+            </a:r>
+          </a:p>
+        </p:txBody>
+      </p:sp>
+      <p:sp>
+        <p:nvSpPr>
+          <p:cNvPr id="9" name="Rounded Rectangle 8"/>
           <p:cNvSpPr/>
           <p:nvPr/>
         </p:nvSpPr>
         <p:spPr>
           <a:xfrm>
-            <a:off x="731520" y="1371600"/>
-            <a:ext cx="10698480" cy="2377440"/>
+            <a:off x="731520" y="1325880"/>
+            <a:ext cx="10698480" cy="2423160"/>
           </a:xfrm>
           <a:prstGeom prst="roundRect">
             <a:avLst/>
@@ -7742,14 +10126,14 @@
       </p:sp>
       <p:sp>
         <p:nvSpPr>
-          <p:cNvPr id="6" name="TextBox 5"/>
+          <p:cNvPr id="10" name="TextBox 9"/>
           <p:cNvSpPr txBox="1"/>
           <p:nvPr/>
         </p:nvSpPr>
         <p:spPr>
           <a:xfrm>
-            <a:off x="960120" y="1536192"/>
-            <a:ext cx="10241280" cy="2048256"/>
+            <a:off x="960120" y="1472184"/>
+            <a:ext cx="10241280" cy="2130552"/>
           </a:xfrm>
           <a:prstGeom prst="rect">
             <a:avLst/>
@@ -7764,7 +10148,7 @@
           <a:p>
             <a:pPr>
               <a:spcAft>
-                <a:spcPts val="800"/>
+                <a:spcPts val="600"/>
               </a:spcAft>
               <a:defRPr sz="1500" b="1">
                 <a:solidFill>
@@ -7774,17 +10158,20 @@
               </a:defRPr>
             </a:pPr>
             <a:r>
-              <a:t>💡 實戰提示詞 (Prompt)：1:1 等比例畫面校正與智慧亮度檢測視窗</a:t>
-            </a:r>
-          </a:p>
-          <a:p>
-            <a:pPr>
+              <a:t>💡 實戰提示詞 (Prompt)：1:1 等比例畫面校正與智慧亮度檢測視窗   [可直接反白複製]</a:t>
+            </a:r>
+          </a:p>
+          <a:p>
+            <a:pPr>
+              <a:lnSpc>
+                <a:spcPct val="120000"/>
+              </a:lnSpc>
               <a:spcAft>
-                <a:spcPts val="800"/>
+                <a:spcPts val="600"/>
               </a:spcAft>
             </a:pPr>
             <a:r>
-              <a:rPr sz="1200">
+              <a:rPr sz="1250">
                 <a:solidFill>
                   <a:srgbClr val="0F172A"/>
                 </a:solidFill>
@@ -7799,9 +10186,9 @@
           </a:p>
           <a:p>
             <a:r>
-              <a:rPr sz="1100" i="1">
-                <a:solidFill>
-                  <a:srgbClr val="64748B"/>
+              <a:rPr sz="1150" b="1">
+                <a:solidFill>
+                  <a:srgbClr val="008CA0"/>
                 </a:solidFill>
                 <a:latin typeface="微軟正黑體"/>
               </a:rPr>
@@ -7812,14 +10199,14 @@
       </p:sp>
       <p:sp>
         <p:nvSpPr>
-          <p:cNvPr id="7" name="Rounded Rectangle 6"/>
+          <p:cNvPr id="11" name="Rounded Rectangle 10"/>
           <p:cNvSpPr/>
           <p:nvPr/>
         </p:nvSpPr>
         <p:spPr>
           <a:xfrm>
-            <a:off x="731520" y="4023360"/>
-            <a:ext cx="10698480" cy="2377440"/>
+            <a:off x="731520" y="3931920"/>
+            <a:ext cx="10698480" cy="2423160"/>
           </a:xfrm>
           <a:prstGeom prst="roundRect">
             <a:avLst/>
@@ -7857,14 +10244,14 @@
       </p:sp>
       <p:sp>
         <p:nvSpPr>
-          <p:cNvPr id="8" name="TextBox 7"/>
+          <p:cNvPr id="12" name="TextBox 11"/>
           <p:cNvSpPr txBox="1"/>
           <p:nvPr/>
         </p:nvSpPr>
         <p:spPr>
           <a:xfrm>
-            <a:off x="960120" y="4187952"/>
-            <a:ext cx="10241280" cy="2048256"/>
+            <a:off x="960120" y="4078224"/>
+            <a:ext cx="10241280" cy="2130552"/>
           </a:xfrm>
           <a:prstGeom prst="rect">
             <a:avLst/>
@@ -7879,7 +10266,7 @@
           <a:p>
             <a:pPr>
               <a:spcAft>
-                <a:spcPts val="800"/>
+                <a:spcPts val="600"/>
               </a:spcAft>
               <a:defRPr sz="1500" b="1">
                 <a:solidFill>
@@ -7889,17 +10276,20 @@
               </a:defRPr>
             </a:pPr>
             <a:r>
-              <a:t>💡 實戰提示詞 (Prompt)：推論與儲存分離：高低解析度雙流處理架構</a:t>
-            </a:r>
-          </a:p>
-          <a:p>
-            <a:pPr>
+              <a:t>💡 實戰提示詞 (Prompt)：推論與儲存分離：高低解析度雙流處理架構   [可直接反白複製]</a:t>
+            </a:r>
+          </a:p>
+          <a:p>
+            <a:pPr>
+              <a:lnSpc>
+                <a:spcPct val="120000"/>
+              </a:lnSpc>
               <a:spcAft>
-                <a:spcPts val="800"/>
+                <a:spcPts val="600"/>
               </a:spcAft>
             </a:pPr>
             <a:r>
-              <a:rPr sz="1200">
+              <a:rPr sz="1250">
                 <a:solidFill>
                   <a:srgbClr val="0F172A"/>
                 </a:solidFill>
@@ -7914,9 +10304,9 @@
           </a:p>
           <a:p>
             <a:r>
-              <a:rPr sz="1100" i="1">
-                <a:solidFill>
-                  <a:srgbClr val="64748B"/>
+              <a:rPr sz="1150" b="1">
+                <a:solidFill>
+                  <a:srgbClr val="008CA0"/>
                 </a:solidFill>
                 <a:latin typeface="微軟正黑體"/>
               </a:rPr>
@@ -7930,6 +10320,9 @@
   <p:clrMapOvr>
     <a:masterClrMapping/>
   </p:clrMapOvr>
+  <p:transition spd="med">
+    <p:fade/>
+  </p:transition>
 </p:sld>
 </file>
 
@@ -7952,18 +10345,16 @@
         <p:spPr>
           <a:xfrm>
             <a:off x="0" y="0"/>
-            <a:ext cx="12191695" cy="1005840"/>
+            <a:ext cx="12191695" cy="6858000"/>
           </a:xfrm>
           <a:prstGeom prst="rect">
             <a:avLst/>
           </a:prstGeom>
           <a:solidFill>
-            <a:srgbClr val="14233C"/>
+            <a:srgbClr val="F8FAFC"/>
           </a:solidFill>
           <a:ln>
-            <a:solidFill>
-              <a:srgbClr val="14233C"/>
-            </a:solidFill>
+            <a:noFill/>
           </a:ln>
         </p:spPr>
         <p:style>
@@ -7990,14 +10381,100 @@
       </p:sp>
       <p:sp>
         <p:nvSpPr>
-          <p:cNvPr id="3" name="TextBox 2"/>
+          <p:cNvPr id="3" name="Rectangle 2"/>
+          <p:cNvSpPr/>
+          <p:nvPr/>
+        </p:nvSpPr>
+        <p:spPr>
+          <a:xfrm>
+            <a:off x="0" y="0"/>
+            <a:ext cx="12191695" cy="1051560"/>
+          </a:xfrm>
+          <a:prstGeom prst="rect">
+            <a:avLst/>
+          </a:prstGeom>
+          <a:solidFill>
+            <a:srgbClr val="14233C"/>
+          </a:solidFill>
+          <a:ln>
+            <a:noFill/>
+          </a:ln>
+        </p:spPr>
+        <p:style>
+          <a:lnRef idx="1">
+            <a:schemeClr val="accent1"/>
+          </a:lnRef>
+          <a:fillRef idx="3">
+            <a:schemeClr val="accent1"/>
+          </a:fillRef>
+          <a:effectRef idx="2">
+            <a:schemeClr val="accent1"/>
+          </a:effectRef>
+          <a:fontRef idx="minor">
+            <a:schemeClr val="lt1"/>
+          </a:fontRef>
+        </p:style>
+        <p:txBody>
+          <a:bodyPr rtlCol="0" anchor="ctr"/>
+          <a:lstStyle/>
+          <a:p>
+            <a:pPr algn="ctr"/>
+          </a:p>
+        </p:txBody>
+      </p:sp>
+      <p:sp>
+        <p:nvSpPr>
+          <p:cNvPr id="4" name="Rectangle 3"/>
+          <p:cNvSpPr/>
+          <p:nvPr/>
+        </p:nvSpPr>
+        <p:spPr>
+          <a:xfrm>
+            <a:off x="0" y="1051560"/>
+            <a:ext cx="4114800" cy="45720"/>
+          </a:xfrm>
+          <a:prstGeom prst="rect">
+            <a:avLst/>
+          </a:prstGeom>
+          <a:solidFill>
+            <a:srgbClr val="008CA0"/>
+          </a:solidFill>
+          <a:ln>
+            <a:noFill/>
+          </a:ln>
+        </p:spPr>
+        <p:style>
+          <a:lnRef idx="1">
+            <a:schemeClr val="accent1"/>
+          </a:lnRef>
+          <a:fillRef idx="3">
+            <a:schemeClr val="accent1"/>
+          </a:fillRef>
+          <a:effectRef idx="2">
+            <a:schemeClr val="accent1"/>
+          </a:effectRef>
+          <a:fontRef idx="minor">
+            <a:schemeClr val="lt1"/>
+          </a:fontRef>
+        </p:style>
+        <p:txBody>
+          <a:bodyPr rtlCol="0" anchor="ctr"/>
+          <a:lstStyle/>
+          <a:p>
+            <a:pPr algn="ctr"/>
+          </a:p>
+        </p:txBody>
+      </p:sp>
+      <p:sp>
+        <p:nvSpPr>
+          <p:cNvPr id="5" name="TextBox 4"/>
           <p:cNvSpPr txBox="1"/>
           <p:nvPr/>
         </p:nvSpPr>
         <p:spPr>
           <a:xfrm>
             <a:off x="731520" y="109728"/>
-            <a:ext cx="10698480" cy="274320"/>
+            <a:ext cx="7772400" cy="274320"/>
           </a:xfrm>
           <a:prstGeom prst="rect">
             <a:avLst/>
@@ -8011,7 +10488,7 @@
           <a:lstStyle/>
           <a:p>
             <a:pPr>
-              <a:defRPr sz="1100" b="1">
+              <a:defRPr sz="1150" b="1">
                 <a:solidFill>
                   <a:srgbClr val="008CA0"/>
                 </a:solidFill>
@@ -8019,20 +10496,56 @@
               </a:defRPr>
             </a:pPr>
             <a:r>
-              <a:t>專題製作與教師研習課程</a:t>
-            </a:r>
-          </a:p>
-        </p:txBody>
-      </p:sp>
-      <p:sp>
-        <p:nvSpPr>
-          <p:cNvPr id="4" name="TextBox 3"/>
+              <a:t>📷 WEBCAM AI 視覺與 YOLO 專題實作課程</a:t>
+            </a:r>
+          </a:p>
+        </p:txBody>
+      </p:sp>
+      <p:sp>
+        <p:nvSpPr>
+          <p:cNvPr id="6" name="TextBox 5"/>
           <p:cNvSpPr txBox="1"/>
           <p:nvPr/>
         </p:nvSpPr>
         <p:spPr>
           <a:xfrm>
-            <a:off x="731520" y="320040"/>
+            <a:off x="9144000" y="109728"/>
+            <a:ext cx="2286000" cy="274320"/>
+          </a:xfrm>
+          <a:prstGeom prst="rect">
+            <a:avLst/>
+          </a:prstGeom>
+          <a:noFill/>
+        </p:spPr>
+        <p:txBody>
+          <a:bodyPr wrap="none">
+            <a:spAutoFit/>
+          </a:bodyPr>
+          <a:lstStyle/>
+          <a:p>
+            <a:pPr algn="r">
+              <a:defRPr sz="1200" b="1">
+                <a:solidFill>
+                  <a:srgbClr val="B4C8E1"/>
+                </a:solidFill>
+                <a:latin typeface="微軟正黑體"/>
+              </a:defRPr>
+            </a:pPr>
+            <a:r>
+              <a:t>第 08 / 14 頁</a:t>
+            </a:r>
+          </a:p>
+        </p:txBody>
+      </p:sp>
+      <p:sp>
+        <p:nvSpPr>
+          <p:cNvPr id="7" name="TextBox 6"/>
+          <p:cNvSpPr txBox="1"/>
+          <p:nvPr/>
+        </p:nvSpPr>
+        <p:spPr>
+          <a:xfrm>
+            <a:off x="731520" y="365760"/>
             <a:ext cx="10698480" cy="594360"/>
           </a:xfrm>
           <a:prstGeom prst="rect">
@@ -8047,7 +10560,7 @@
           <a:lstStyle/>
           <a:p>
             <a:pPr>
-              <a:defRPr sz="2200" b="1">
+              <a:defRPr sz="2400" b="1">
                 <a:solidFill>
                   <a:srgbClr val="FFFFFF"/>
                 </a:solidFill>
@@ -8062,14 +10575,50 @@
       </p:sp>
       <p:sp>
         <p:nvSpPr>
-          <p:cNvPr id="5" name="Rounded Rectangle 4"/>
+          <p:cNvPr id="8" name="TextBox 7"/>
+          <p:cNvSpPr txBox="1"/>
+          <p:nvPr/>
+        </p:nvSpPr>
+        <p:spPr>
+          <a:xfrm>
+            <a:off x="731520" y="6510528"/>
+            <a:ext cx="10698480" cy="274320"/>
+          </a:xfrm>
+          <a:prstGeom prst="rect">
+            <a:avLst/>
+          </a:prstGeom>
+          <a:noFill/>
+        </p:spPr>
+        <p:txBody>
+          <a:bodyPr wrap="none">
+            <a:spAutoFit/>
+          </a:bodyPr>
+          <a:lstStyle/>
+          <a:p>
+            <a:pPr>
+              <a:defRPr sz="1050">
+                <a:solidFill>
+                  <a:srgbClr val="64748B"/>
+                </a:solidFill>
+                <a:latin typeface="微軟正黑體"/>
+              </a:defRPr>
+            </a:pPr>
+            <a:r>
+              <a:t>🌐 互動課程網頁：https://stjedu.github.io/www/yolo_webcam_course.html   |   主講：簡樹桐 老師</a:t>
+            </a:r>
+          </a:p>
+        </p:txBody>
+      </p:sp>
+      <p:sp>
+        <p:nvSpPr>
+          <p:cNvPr id="9" name="Rounded Rectangle 8"/>
           <p:cNvSpPr/>
           <p:nvPr/>
         </p:nvSpPr>
         <p:spPr>
           <a:xfrm>
-            <a:off x="731520" y="1371600"/>
-            <a:ext cx="5120640" cy="4937760"/>
+            <a:off x="731520" y="1325880"/>
+            <a:ext cx="5120640" cy="4983480"/>
           </a:xfrm>
           <a:prstGeom prst="roundRect">
             <a:avLst/>
@@ -8107,14 +10656,57 @@
       </p:sp>
       <p:sp>
         <p:nvSpPr>
-          <p:cNvPr id="6" name="TextBox 5"/>
+          <p:cNvPr id="10" name="Rounded Rectangle 9"/>
+          <p:cNvSpPr/>
+          <p:nvPr/>
+        </p:nvSpPr>
+        <p:spPr>
+          <a:xfrm>
+            <a:off x="731520" y="1325880"/>
+            <a:ext cx="5120640" cy="91440"/>
+          </a:xfrm>
+          <a:prstGeom prst="roundRect">
+            <a:avLst/>
+          </a:prstGeom>
+          <a:solidFill>
+            <a:srgbClr val="008CA0"/>
+          </a:solidFill>
+          <a:ln>
+            <a:noFill/>
+          </a:ln>
+        </p:spPr>
+        <p:style>
+          <a:lnRef idx="1">
+            <a:schemeClr val="accent1"/>
+          </a:lnRef>
+          <a:fillRef idx="3">
+            <a:schemeClr val="accent1"/>
+          </a:fillRef>
+          <a:effectRef idx="2">
+            <a:schemeClr val="accent1"/>
+          </a:effectRef>
+          <a:fontRef idx="minor">
+            <a:schemeClr val="lt1"/>
+          </a:fontRef>
+        </p:style>
+        <p:txBody>
+          <a:bodyPr rtlCol="0" anchor="ctr"/>
+          <a:lstStyle/>
+          <a:p>
+            <a:pPr algn="ctr"/>
+          </a:p>
+        </p:txBody>
+      </p:sp>
+      <p:sp>
+        <p:nvSpPr>
+          <p:cNvPr id="11" name="TextBox 10"/>
           <p:cNvSpPr txBox="1"/>
           <p:nvPr/>
         </p:nvSpPr>
         <p:spPr>
           <a:xfrm>
-            <a:off x="914400" y="1508760"/>
-            <a:ext cx="4754880" cy="4663440"/>
+            <a:off x="960120" y="1508760"/>
+            <a:ext cx="4663440" cy="4663440"/>
           </a:xfrm>
           <a:prstGeom prst="rect">
             <a:avLst/>
@@ -8131,7 +10723,7 @@
               <a:spcAft>
                 <a:spcPts val="1000"/>
               </a:spcAft>
-              <a:defRPr sz="1600" b="1">
+              <a:defRPr sz="1750" b="1">
                 <a:solidFill>
                   <a:srgbClr val="14233C"/>
                 </a:solidFill>
@@ -8144,12 +10736,15 @@
           </a:p>
           <a:p>
             <a:pPr>
+              <a:lnSpc>
+                <a:spcPct val="125000"/>
+              </a:lnSpc>
               <a:spcAft>
-                <a:spcPts val="600"/>
+                <a:spcPts val="700"/>
               </a:spcAft>
             </a:pPr>
             <a:r>
-              <a:rPr b="1" sz="1300">
+              <a:rPr b="1" sz="1350">
                 <a:solidFill>
                   <a:srgbClr val="1E293B"/>
                 </a:solidFill>
@@ -8158,7 +10753,7 @@
               <a:t>1920x1080 螢幕佈局： </a:t>
             </a:r>
             <a:r>
-              <a:rPr b="0" sz="1300">
+              <a:rPr b="0" sz="1350">
                 <a:solidFill>
                   <a:srgbClr val="64748B"/>
                 </a:solidFill>
@@ -8169,12 +10764,15 @@
           </a:p>
           <a:p>
             <a:pPr>
+              <a:lnSpc>
+                <a:spcPct val="125000"/>
+              </a:lnSpc>
               <a:spcAft>
-                <a:spcPts val="600"/>
+                <a:spcPts val="700"/>
               </a:spcAft>
             </a:pPr>
             <a:r>
-              <a:rPr b="1" sz="1300">
+              <a:rPr b="1" sz="1350">
                 <a:solidFill>
                   <a:srgbClr val="1E293B"/>
                 </a:solidFill>
@@ -8183,7 +10781,7 @@
               <a:t>不同輸入比例縮放問題： </a:t>
             </a:r>
             <a:r>
-              <a:rPr b="0" sz="1300">
+              <a:rPr b="0" sz="1350">
                 <a:solidFill>
                   <a:srgbClr val="64748B"/>
                 </a:solidFill>
@@ -8194,12 +10792,15 @@
           </a:p>
           <a:p>
             <a:pPr>
+              <a:lnSpc>
+                <a:spcPct val="125000"/>
+              </a:lnSpc>
               <a:spcAft>
-                <a:spcPts val="600"/>
+                <a:spcPts val="700"/>
               </a:spcAft>
             </a:pPr>
             <a:r>
-              <a:rPr b="1" sz="1300">
+              <a:rPr b="1" sz="1350">
                 <a:solidFill>
                   <a:srgbClr val="1E293B"/>
                 </a:solidFill>
@@ -8208,7 +10809,7 @@
               <a:t>陣列拼接 (NumPy Concatenate)： </a:t>
             </a:r>
             <a:r>
-              <a:rPr b="0" sz="1300">
+              <a:rPr b="0" sz="1350">
                 <a:solidFill>
                   <a:srgbClr val="64748B"/>
                 </a:solidFill>
@@ -8219,12 +10820,15 @@
           </a:p>
           <a:p>
             <a:pPr>
+              <a:lnSpc>
+                <a:spcPct val="125000"/>
+              </a:lnSpc>
               <a:spcAft>
-                <a:spcPts val="600"/>
+                <a:spcPts val="700"/>
               </a:spcAft>
             </a:pPr>
             <a:r>
-              <a:rPr b="1" sz="1300">
+              <a:rPr b="1" sz="1350">
                 <a:solidFill>
                   <a:srgbClr val="1E293B"/>
                 </a:solidFill>
@@ -8233,7 +10837,7 @@
               <a:t>多宮格效能瓶頸： </a:t>
             </a:r>
             <a:r>
-              <a:rPr b="0" sz="1300">
+              <a:rPr b="0" sz="1350">
                 <a:solidFill>
                   <a:srgbClr val="64748B"/>
                 </a:solidFill>
@@ -8246,14 +10850,14 @@
       </p:sp>
       <p:sp>
         <p:nvSpPr>
-          <p:cNvPr id="7" name="Rounded Rectangle 6"/>
+          <p:cNvPr id="12" name="Rounded Rectangle 11"/>
           <p:cNvSpPr/>
           <p:nvPr/>
         </p:nvSpPr>
         <p:spPr>
           <a:xfrm>
-            <a:off x="6309360" y="1371600"/>
-            <a:ext cx="5120640" cy="4937760"/>
+            <a:off x="6309360" y="1325880"/>
+            <a:ext cx="5120640" cy="4983480"/>
           </a:xfrm>
           <a:prstGeom prst="roundRect">
             <a:avLst/>
@@ -8291,14 +10895,57 @@
       </p:sp>
       <p:sp>
         <p:nvSpPr>
-          <p:cNvPr id="8" name="TextBox 7"/>
+          <p:cNvPr id="13" name="Rounded Rectangle 12"/>
+          <p:cNvSpPr/>
+          <p:nvPr/>
+        </p:nvSpPr>
+        <p:spPr>
+          <a:xfrm>
+            <a:off x="6309360" y="1325880"/>
+            <a:ext cx="5120640" cy="91440"/>
+          </a:xfrm>
+          <a:prstGeom prst="roundRect">
+            <a:avLst/>
+          </a:prstGeom>
+          <a:solidFill>
+            <a:srgbClr val="EB6E28"/>
+          </a:solidFill>
+          <a:ln>
+            <a:noFill/>
+          </a:ln>
+        </p:spPr>
+        <p:style>
+          <a:lnRef idx="1">
+            <a:schemeClr val="accent1"/>
+          </a:lnRef>
+          <a:fillRef idx="3">
+            <a:schemeClr val="accent1"/>
+          </a:fillRef>
+          <a:effectRef idx="2">
+            <a:schemeClr val="accent1"/>
+          </a:effectRef>
+          <a:fontRef idx="minor">
+            <a:schemeClr val="lt1"/>
+          </a:fontRef>
+        </p:style>
+        <p:txBody>
+          <a:bodyPr rtlCol="0" anchor="ctr"/>
+          <a:lstStyle/>
+          <a:p>
+            <a:pPr algn="ctr"/>
+          </a:p>
+        </p:txBody>
+      </p:sp>
+      <p:sp>
+        <p:nvSpPr>
+          <p:cNvPr id="14" name="TextBox 13"/>
           <p:cNvSpPr txBox="1"/>
           <p:nvPr/>
         </p:nvSpPr>
         <p:spPr>
           <a:xfrm>
-            <a:off x="6492240" y="1508760"/>
-            <a:ext cx="4754880" cy="4663440"/>
+            <a:off x="6537960" y="1508760"/>
+            <a:ext cx="4663440" cy="4663440"/>
           </a:xfrm>
           <a:prstGeom prst="rect">
             <a:avLst/>
@@ -8315,7 +10962,7 @@
               <a:spcAft>
                 <a:spcPts val="1000"/>
               </a:spcAft>
-              <a:defRPr sz="1600" b="1">
+              <a:defRPr sz="1750" b="1">
                 <a:solidFill>
                   <a:srgbClr val="14233C"/>
                 </a:solidFill>
@@ -8328,12 +10975,15 @@
           </a:p>
           <a:p>
             <a:pPr>
+              <a:lnSpc>
+                <a:spcPct val="125000"/>
+              </a:lnSpc>
               <a:spcAft>
-                <a:spcPts val="600"/>
+                <a:spcPts val="700"/>
               </a:spcAft>
             </a:pPr>
             <a:r>
-              <a:rPr b="1" sz="1300">
+              <a:rPr b="1" sz="1350">
                 <a:solidFill>
                   <a:srgbClr val="1E293B"/>
                 </a:solidFill>
@@ -8342,7 +10992,7 @@
               <a:t>多鏡頭硬體管理： </a:t>
             </a:r>
             <a:r>
-              <a:rPr b="0" sz="1300">
+              <a:rPr b="0" sz="1350">
                 <a:solidFill>
                   <a:srgbClr val="64748B"/>
                 </a:solidFill>
@@ -8353,12 +11003,15 @@
           </a:p>
           <a:p>
             <a:pPr>
+              <a:lnSpc>
+                <a:spcPct val="125000"/>
+              </a:lnSpc>
               <a:spcAft>
-                <a:spcPts val="600"/>
+                <a:spcPts val="700"/>
               </a:spcAft>
             </a:pPr>
             <a:r>
-              <a:rPr b="1" sz="1300">
+              <a:rPr b="1" sz="1350">
                 <a:solidFill>
                   <a:srgbClr val="1E293B"/>
                 </a:solidFill>
@@ -8367,7 +11020,7 @@
               <a:t>非同步緒處理： </a:t>
             </a:r>
             <a:r>
-              <a:rPr b="0" sz="1300">
+              <a:rPr b="0" sz="1350">
                 <a:solidFill>
                   <a:srgbClr val="64748B"/>
                 </a:solidFill>
@@ -8378,12 +11031,15 @@
           </a:p>
           <a:p>
             <a:pPr>
+              <a:lnSpc>
+                <a:spcPct val="125000"/>
+              </a:lnSpc>
               <a:spcAft>
-                <a:spcPts val="600"/>
+                <a:spcPts val="700"/>
               </a:spcAft>
             </a:pPr>
             <a:r>
-              <a:rPr b="1" sz="1300">
+              <a:rPr b="1" sz="1350">
                 <a:solidFill>
                   <a:srgbClr val="1E293B"/>
                 </a:solidFill>
@@ -8392,7 +11048,7 @@
               <a:t>焦點切換與畫面互換： </a:t>
             </a:r>
             <a:r>
-              <a:rPr b="0" sz="1300">
+              <a:rPr b="0" sz="1350">
                 <a:solidFill>
                   <a:srgbClr val="64748B"/>
                 </a:solidFill>
@@ -8403,12 +11059,15 @@
           </a:p>
           <a:p>
             <a:pPr>
+              <a:lnSpc>
+                <a:spcPct val="125000"/>
+              </a:lnSpc>
               <a:spcAft>
-                <a:spcPts val="600"/>
+                <a:spcPts val="700"/>
               </a:spcAft>
             </a:pPr>
             <a:r>
-              <a:rPr b="1" sz="1300">
+              <a:rPr b="1" sz="1350">
                 <a:solidFill>
                   <a:srgbClr val="1E293B"/>
                 </a:solidFill>
@@ -8417,7 +11076,7 @@
               <a:t>動態資源調配： </a:t>
             </a:r>
             <a:r>
-              <a:rPr b="0" sz="1300">
+              <a:rPr b="0" sz="1350">
                 <a:solidFill>
                   <a:srgbClr val="64748B"/>
                 </a:solidFill>
@@ -8433,6 +11092,9 @@
   <p:clrMapOvr>
     <a:masterClrMapping/>
   </p:clrMapOvr>
+  <p:transition spd="med">
+    <p:fade/>
+  </p:transition>
 </p:sld>
 </file>
 
@@ -8455,18 +11117,16 @@
         <p:spPr>
           <a:xfrm>
             <a:off x="0" y="0"/>
-            <a:ext cx="12191695" cy="1005840"/>
+            <a:ext cx="12191695" cy="6858000"/>
           </a:xfrm>
           <a:prstGeom prst="rect">
             <a:avLst/>
           </a:prstGeom>
           <a:solidFill>
-            <a:srgbClr val="14233C"/>
+            <a:srgbClr val="F8FAFC"/>
           </a:solidFill>
           <a:ln>
-            <a:solidFill>
-              <a:srgbClr val="14233C"/>
-            </a:solidFill>
+            <a:noFill/>
           </a:ln>
         </p:spPr>
         <p:style>
@@ -8493,14 +11153,100 @@
       </p:sp>
       <p:sp>
         <p:nvSpPr>
-          <p:cNvPr id="3" name="TextBox 2"/>
+          <p:cNvPr id="3" name="Rectangle 2"/>
+          <p:cNvSpPr/>
+          <p:nvPr/>
+        </p:nvSpPr>
+        <p:spPr>
+          <a:xfrm>
+            <a:off x="0" y="0"/>
+            <a:ext cx="12191695" cy="1051560"/>
+          </a:xfrm>
+          <a:prstGeom prst="rect">
+            <a:avLst/>
+          </a:prstGeom>
+          <a:solidFill>
+            <a:srgbClr val="14233C"/>
+          </a:solidFill>
+          <a:ln>
+            <a:noFill/>
+          </a:ln>
+        </p:spPr>
+        <p:style>
+          <a:lnRef idx="1">
+            <a:schemeClr val="accent1"/>
+          </a:lnRef>
+          <a:fillRef idx="3">
+            <a:schemeClr val="accent1"/>
+          </a:fillRef>
+          <a:effectRef idx="2">
+            <a:schemeClr val="accent1"/>
+          </a:effectRef>
+          <a:fontRef idx="minor">
+            <a:schemeClr val="lt1"/>
+          </a:fontRef>
+        </p:style>
+        <p:txBody>
+          <a:bodyPr rtlCol="0" anchor="ctr"/>
+          <a:lstStyle/>
+          <a:p>
+            <a:pPr algn="ctr"/>
+          </a:p>
+        </p:txBody>
+      </p:sp>
+      <p:sp>
+        <p:nvSpPr>
+          <p:cNvPr id="4" name="Rectangle 3"/>
+          <p:cNvSpPr/>
+          <p:nvPr/>
+        </p:nvSpPr>
+        <p:spPr>
+          <a:xfrm>
+            <a:off x="0" y="1051560"/>
+            <a:ext cx="4114800" cy="45720"/>
+          </a:xfrm>
+          <a:prstGeom prst="rect">
+            <a:avLst/>
+          </a:prstGeom>
+          <a:solidFill>
+            <a:srgbClr val="008CA0"/>
+          </a:solidFill>
+          <a:ln>
+            <a:noFill/>
+          </a:ln>
+        </p:spPr>
+        <p:style>
+          <a:lnRef idx="1">
+            <a:schemeClr val="accent1"/>
+          </a:lnRef>
+          <a:fillRef idx="3">
+            <a:schemeClr val="accent1"/>
+          </a:fillRef>
+          <a:effectRef idx="2">
+            <a:schemeClr val="accent1"/>
+          </a:effectRef>
+          <a:fontRef idx="minor">
+            <a:schemeClr val="lt1"/>
+          </a:fontRef>
+        </p:style>
+        <p:txBody>
+          <a:bodyPr rtlCol="0" anchor="ctr"/>
+          <a:lstStyle/>
+          <a:p>
+            <a:pPr algn="ctr"/>
+          </a:p>
+        </p:txBody>
+      </p:sp>
+      <p:sp>
+        <p:nvSpPr>
+          <p:cNvPr id="5" name="TextBox 4"/>
           <p:cNvSpPr txBox="1"/>
           <p:nvPr/>
         </p:nvSpPr>
         <p:spPr>
           <a:xfrm>
             <a:off x="731520" y="109728"/>
-            <a:ext cx="10698480" cy="274320"/>
+            <a:ext cx="7772400" cy="274320"/>
           </a:xfrm>
           <a:prstGeom prst="rect">
             <a:avLst/>
@@ -8514,7 +11260,7 @@
           <a:lstStyle/>
           <a:p>
             <a:pPr>
-              <a:defRPr sz="1100" b="1">
+              <a:defRPr sz="1150" b="1">
                 <a:solidFill>
                   <a:srgbClr val="008CA0"/>
                 </a:solidFill>
@@ -8522,20 +11268,56 @@
               </a:defRPr>
             </a:pPr>
             <a:r>
-              <a:t>專題製作與教師研習課程</a:t>
-            </a:r>
-          </a:p>
-        </p:txBody>
-      </p:sp>
-      <p:sp>
-        <p:nvSpPr>
-          <p:cNvPr id="4" name="TextBox 3"/>
+              <a:t>📷 WEBCAM AI 視覺與 YOLO 專題實作課程</a:t>
+            </a:r>
+          </a:p>
+        </p:txBody>
+      </p:sp>
+      <p:sp>
+        <p:nvSpPr>
+          <p:cNvPr id="6" name="TextBox 5"/>
           <p:cNvSpPr txBox="1"/>
           <p:nvPr/>
         </p:nvSpPr>
         <p:spPr>
           <a:xfrm>
-            <a:off x="731520" y="320040"/>
+            <a:off x="9144000" y="109728"/>
+            <a:ext cx="2286000" cy="274320"/>
+          </a:xfrm>
+          <a:prstGeom prst="rect">
+            <a:avLst/>
+          </a:prstGeom>
+          <a:noFill/>
+        </p:spPr>
+        <p:txBody>
+          <a:bodyPr wrap="none">
+            <a:spAutoFit/>
+          </a:bodyPr>
+          <a:lstStyle/>
+          <a:p>
+            <a:pPr algn="r">
+              <a:defRPr sz="1200" b="1">
+                <a:solidFill>
+                  <a:srgbClr val="B4C8E1"/>
+                </a:solidFill>
+                <a:latin typeface="微軟正黑體"/>
+              </a:defRPr>
+            </a:pPr>
+            <a:r>
+              <a:t>第 09 / 14 頁</a:t>
+            </a:r>
+          </a:p>
+        </p:txBody>
+      </p:sp>
+      <p:sp>
+        <p:nvSpPr>
+          <p:cNvPr id="7" name="TextBox 6"/>
+          <p:cNvSpPr txBox="1"/>
+          <p:nvPr/>
+        </p:nvSpPr>
+        <p:spPr>
+          <a:xfrm>
+            <a:off x="731520" y="365760"/>
             <a:ext cx="10698480" cy="594360"/>
           </a:xfrm>
           <a:prstGeom prst="rect">
@@ -8550,7 +11332,7 @@
           <a:lstStyle/>
           <a:p>
             <a:pPr>
-              <a:defRPr sz="2200" b="1">
+              <a:defRPr sz="2400" b="1">
                 <a:solidFill>
                   <a:srgbClr val="FFFFFF"/>
                 </a:solidFill>
@@ -8565,14 +11347,50 @@
       </p:sp>
       <p:sp>
         <p:nvSpPr>
-          <p:cNvPr id="5" name="Rounded Rectangle 4"/>
+          <p:cNvPr id="8" name="TextBox 7"/>
+          <p:cNvSpPr txBox="1"/>
+          <p:nvPr/>
+        </p:nvSpPr>
+        <p:spPr>
+          <a:xfrm>
+            <a:off x="731520" y="6510528"/>
+            <a:ext cx="10698480" cy="274320"/>
+          </a:xfrm>
+          <a:prstGeom prst="rect">
+            <a:avLst/>
+          </a:prstGeom>
+          <a:noFill/>
+        </p:spPr>
+        <p:txBody>
+          <a:bodyPr wrap="none">
+            <a:spAutoFit/>
+          </a:bodyPr>
+          <a:lstStyle/>
+          <a:p>
+            <a:pPr>
+              <a:defRPr sz="1050">
+                <a:solidFill>
+                  <a:srgbClr val="64748B"/>
+                </a:solidFill>
+                <a:latin typeface="微軟正黑體"/>
+              </a:defRPr>
+            </a:pPr>
+            <a:r>
+              <a:t>🌐 互動課程網頁：https://stjedu.github.io/www/yolo_webcam_course.html   |   主講：簡樹桐 老師</a:t>
+            </a:r>
+          </a:p>
+        </p:txBody>
+      </p:sp>
+      <p:sp>
+        <p:nvSpPr>
+          <p:cNvPr id="9" name="Rounded Rectangle 8"/>
           <p:cNvSpPr/>
           <p:nvPr/>
         </p:nvSpPr>
         <p:spPr>
           <a:xfrm>
-            <a:off x="731520" y="1371600"/>
-            <a:ext cx="10698480" cy="2377440"/>
+            <a:off x="731520" y="1325880"/>
+            <a:ext cx="10698480" cy="2423160"/>
           </a:xfrm>
           <a:prstGeom prst="roundRect">
             <a:avLst/>
@@ -8610,14 +11428,14 @@
       </p:sp>
       <p:sp>
         <p:nvSpPr>
-          <p:cNvPr id="6" name="TextBox 5"/>
+          <p:cNvPr id="10" name="TextBox 9"/>
           <p:cNvSpPr txBox="1"/>
           <p:nvPr/>
         </p:nvSpPr>
         <p:spPr>
           <a:xfrm>
-            <a:off x="960120" y="1536192"/>
-            <a:ext cx="10241280" cy="2048256"/>
+            <a:off x="960120" y="1472184"/>
+            <a:ext cx="10241280" cy="2130552"/>
           </a:xfrm>
           <a:prstGeom prst="rect">
             <a:avLst/>
@@ -8632,7 +11450,7 @@
           <a:p>
             <a:pPr>
               <a:spcAft>
-                <a:spcPts val="800"/>
+                <a:spcPts val="600"/>
               </a:spcAft>
               <a:defRPr sz="1500" b="1">
                 <a:solidFill>
@@ -8642,17 +11460,20 @@
               </a:defRPr>
             </a:pPr>
             <a:r>
-              <a:t>💡 實戰提示詞 (Prompt)：四宮格 (2x2) 多分割監控畫面與動態切換</a:t>
-            </a:r>
-          </a:p>
-          <a:p>
-            <a:pPr>
+              <a:t>💡 實戰提示詞 (Prompt)：四宮格 (2x2) 多分割監控畫面與動態切換   [可直接反白複製]</a:t>
+            </a:r>
+          </a:p>
+          <a:p>
+            <a:pPr>
+              <a:lnSpc>
+                <a:spcPct val="120000"/>
+              </a:lnSpc>
               <a:spcAft>
-                <a:spcPts val="800"/>
+                <a:spcPts val="600"/>
               </a:spcAft>
             </a:pPr>
             <a:r>
-              <a:rPr sz="1200">
+              <a:rPr sz="1250">
                 <a:solidFill>
                   <a:srgbClr val="0F172A"/>
                 </a:solidFill>
@@ -8667,9 +11488,9 @@
           </a:p>
           <a:p>
             <a:r>
-              <a:rPr sz="1100" i="1">
-                <a:solidFill>
-                  <a:srgbClr val="64748B"/>
+              <a:rPr sz="1150" b="1">
+                <a:solidFill>
+                  <a:srgbClr val="008CA0"/>
                 </a:solidFill>
                 <a:latin typeface="微軟正黑體"/>
               </a:rPr>
@@ -8680,14 +11501,14 @@
       </p:sp>
       <p:sp>
         <p:nvSpPr>
-          <p:cNvPr id="7" name="Rounded Rectangle 6"/>
+          <p:cNvPr id="11" name="Rounded Rectangle 10"/>
           <p:cNvSpPr/>
           <p:nvPr/>
         </p:nvSpPr>
         <p:spPr>
           <a:xfrm>
-            <a:off x="731520" y="4023360"/>
-            <a:ext cx="10698480" cy="2377440"/>
+            <a:off x="731520" y="3931920"/>
+            <a:ext cx="10698480" cy="2423160"/>
           </a:xfrm>
           <a:prstGeom prst="roundRect">
             <a:avLst/>
@@ -8725,14 +11546,14 @@
       </p:sp>
       <p:sp>
         <p:nvSpPr>
-          <p:cNvPr id="8" name="TextBox 7"/>
+          <p:cNvPr id="12" name="TextBox 11"/>
           <p:cNvSpPr txBox="1"/>
           <p:nvPr/>
         </p:nvSpPr>
         <p:spPr>
           <a:xfrm>
-            <a:off x="960120" y="4187952"/>
-            <a:ext cx="10241280" cy="2048256"/>
+            <a:off x="960120" y="4078224"/>
+            <a:ext cx="10241280" cy="2130552"/>
           </a:xfrm>
           <a:prstGeom prst="rect">
             <a:avLst/>
@@ -8747,7 +11568,7 @@
           <a:p>
             <a:pPr>
               <a:spcAft>
-                <a:spcPts val="800"/>
+                <a:spcPts val="600"/>
               </a:spcAft>
               <a:defRPr sz="1500" b="1">
                 <a:solidFill>
@@ -8757,17 +11578,20 @@
               </a:defRPr>
             </a:pPr>
             <a:r>
-              <a:t>💡 實戰提示詞 (Prompt)：雙實體攝影機 (Dual WebCam) 即時拼接與畫面互換</a:t>
-            </a:r>
-          </a:p>
-          <a:p>
-            <a:pPr>
+              <a:t>💡 實戰提示詞 (Prompt)：雙實體攝影機 (Dual WebCam) 即時拼接與畫面互換   [可直接反白複製]</a:t>
+            </a:r>
+          </a:p>
+          <a:p>
+            <a:pPr>
+              <a:lnSpc>
+                <a:spcPct val="120000"/>
+              </a:lnSpc>
               <a:spcAft>
-                <a:spcPts val="800"/>
+                <a:spcPts val="600"/>
               </a:spcAft>
             </a:pPr>
             <a:r>
-              <a:rPr sz="1200">
+              <a:rPr sz="1250">
                 <a:solidFill>
                   <a:srgbClr val="0F172A"/>
                 </a:solidFill>
@@ -8783,9 +11607,9 @@
           </a:p>
           <a:p>
             <a:r>
-              <a:rPr sz="1100" i="1">
-                <a:solidFill>
-                  <a:srgbClr val="64748B"/>
+              <a:rPr sz="1150" b="1">
+                <a:solidFill>
+                  <a:srgbClr val="008CA0"/>
                 </a:solidFill>
                 <a:latin typeface="微軟正黑體"/>
               </a:rPr>
@@ -8799,6 +11623,9 @@
   <p:clrMapOvr>
     <a:masterClrMapping/>
   </p:clrMapOvr>
+  <p:transition spd="med">
+    <p:fade/>
+  </p:transition>
 </p:sld>
 </file>
 
